--- a/curso/semana-03-roles-y-prototipos/nuestras-entregas/PPT_Presentacion_NewBit/PPT_Presentacion_NewBit.pptx
+++ b/curso/semana-03-roles-y-prototipos/nuestras-entregas/PPT_Presentacion_NewBit/PPT_Presentacion_NewBit.pptx
@@ -4,6 +4,9 @@
   <p:sldMasterIdLst>
     <p:sldMasterId id="2147483648" r:id="rId1"/>
   </p:sldMasterIdLst>
+  <p:notesMasterIdLst>
+    <p:notesMasterId r:id="rId14"/>
+  </p:notesMasterIdLst>
   <p:sldIdLst>
     <p:sldId id="256" r:id="rId2"/>
     <p:sldId id="257" r:id="rId3"/>
@@ -18,9 +21,6 @@
     <p:sldId id="266" r:id="rId12"/>
     <p:sldId id="267" r:id="rId13"/>
   </p:sldIdLst>
-  <p:notesMasterIdLst>
-    <p:notesMasterId r:id="rId14"/>
-  </p:notesMasterIdLst>
   <p:sldSz cx="12192000" cy="6858000"/>
   <p:notesSz cx="6858000" cy="12192000"/>
   <p:defaultTextStyle>
@@ -118,37 +118,37 @@
   <p:extLst>
     <p:ext uri="{521415D9-36F7-43E2-AB2F-B90AF26B5E84}">
       <p14:sectionLst xmlns:p14="http://schemas.microsoft.com/office/powerpoint/2010/main">
-        <p14:section name="Inicio" id="{bb0e4f6c-97a7-e9d1-2ef6-51dac7824fda}">
+        <p14:section name="Inicio" id="{BB0E4F6C-97A7-E9D1-2EF6-51DAC7824FDA}">
           <p14:sldIdLst>
             <p14:sldId id="256"/>
           </p14:sldIdLst>
         </p14:section>
-        <p14:section name="Problema y solución" id="{b3e5ab63-0a47-302a-5766-712763d7984e}">
+        <p14:section name="Problema y solución" id="{B3E5AB63-0A47-302A-5766-712763D7984E}">
           <p14:sldIdLst>
             <p14:sldId id="257"/>
             <p14:sldId id="258"/>
           </p14:sldIdLst>
         </p14:section>
-        <p14:section name="Cómo funciona" id="{742314a1-c8bf-ea98-3c5f-ce7f282ee121}">
+        <p14:section name="Cómo funciona" id="{742314A1-C8BF-EA98-3C5F-CE7F282EE121}">
           <p14:sldIdLst>
             <p14:sldId id="259"/>
             <p14:sldId id="260"/>
             <p14:sldId id="261"/>
           </p14:sldIdLst>
         </p14:section>
-        <p14:section name="Usuarios y equipo" id="{a6248d91-5537-b03f-8eb9-552f8f83cbed}">
+        <p14:section name="Usuarios y equipo" id="{A6248D91-5537-B03F-8EB9-552F8F83CBED}">
           <p14:sldIdLst>
             <p14:sldId id="262"/>
             <p14:sldId id="263"/>
           </p14:sldIdLst>
         </p14:section>
-        <p14:section name="Épicas e historias" id="{2167496f-7c61-d843-09be-d850312cf759}">
+        <p14:section name="Épicas e historias" id="{2167496F-7C61-D843-09BE-D850312CF759}">
           <p14:sldIdLst>
             <p14:sldId id="264"/>
             <p14:sldId id="265"/>
           </p14:sldIdLst>
         </p14:section>
-        <p14:section name="Viabilidad y cierre" id="{c17a1117-80b7-f10d-4071-b6e7a1ef4abd}">
+        <p14:section name="Viabilidad y cierre" id="{C17A1117-80B7-F10D-4071-B6E7A1EF4ABD}">
           <p14:sldIdLst>
             <p14:sldId id="266"/>
             <p14:sldId id="267"/>
@@ -185,234 +185,10 @@
           <a:chExt cx="0" cy="0"/>
         </a:xfrm>
       </p:grpSpPr>
-      <p:sp>
-        <p:nvSpPr>
-          <p:cNvPr id="2" name="Header Placeholder 1"/>
-          <p:cNvSpPr>
-            <a:spLocks noGrp="1"/>
-          </p:cNvSpPr>
-          <p:nvPr>
-            <p:ph type="hdr" sz="quarter"/>
-          </p:nvPr>
-        </p:nvSpPr>
-        <p:spPr>
-          <a:xfrm>
-            <a:off x="0" y="0"/>
-            <a:ext cx="2971800" cy="458788"/>
-          </a:xfrm>
-          <a:prstGeom prst="rect">
-            <a:avLst/>
-          </a:prstGeom>
-        </p:spPr>
-        <p:txBody>
-          <a:bodyPr vert="horz" lIns="91440" tIns="45720" rIns="91440" bIns="45720" rtlCol="0"/>
-          <a:lstStyle>
-            <a:lvl1pPr algn="l">
-              <a:defRPr sz="1200"/>
-            </a:lvl1pPr>
-          </a:lstStyle>
-          <a:p>
-            <a:endParaRPr lang="en-US"/>
-          </a:p>
-        </p:txBody>
-      </p:sp>
-      <p:sp>
-        <p:nvSpPr>
-          <p:cNvPr id="3" name="Date Placeholder 2"/>
-          <p:cNvSpPr>
-            <a:spLocks noGrp="1"/>
-          </p:cNvSpPr>
-          <p:nvPr>
-            <p:ph type="dt" idx="1"/>
-          </p:nvPr>
-        </p:nvSpPr>
-        <p:spPr>
-          <a:xfrm>
-            <a:off x="3884613" y="0"/>
-            <a:ext cx="2971800" cy="458788"/>
-          </a:xfrm>
-          <a:prstGeom prst="rect">
-            <a:avLst/>
-          </a:prstGeom>
-        </p:spPr>
-        <p:txBody>
-          <a:bodyPr vert="horz" lIns="91440" tIns="45720" rIns="91440" bIns="45720" rtlCol="0"/>
-          <a:lstStyle>
-            <a:lvl1pPr algn="r">
-              <a:defRPr sz="1200"/>
-            </a:lvl1pPr>
-          </a:lstStyle>
-          <a:p>
-            <a:fld id="{5282F153-3F37-0F45-9E97-73ACFA13230C}" type="datetimeFigureOut">
-              <a:rPr lang="en-US"/>
-              <a:t>7/23/19</a:t>
-            </a:fld>
-            <a:endParaRPr lang="en-US"/>
-          </a:p>
-        </p:txBody>
-      </p:sp>
-      <p:sp>
-        <p:nvSpPr>
-          <p:cNvPr id="4" name="Slide Image Placeholder 3"/>
-          <p:cNvSpPr>
-            <a:spLocks noGrp="1" noRot="1" noChangeAspect="1"/>
-          </p:cNvSpPr>
-          <p:nvPr>
-            <p:ph type="sldImg" idx="2"/>
-          </p:nvPr>
-        </p:nvSpPr>
-        <p:spPr>
-          <a:xfrm>
-            <a:off x="685800" y="1143000"/>
-            <a:ext cx="5486400" cy="3086100"/>
-          </a:xfrm>
-          <a:prstGeom prst="rect">
-            <a:avLst/>
-          </a:prstGeom>
-          <a:noFill/>
-          <a:ln w="12700">
-            <a:solidFill>
-              <a:prstClr val="black"/>
-            </a:solidFill>
-          </a:ln>
-        </p:spPr>
-        <p:txBody>
-          <a:bodyPr vert="horz" lIns="91440" tIns="45720" rIns="91440" bIns="45720" rtlCol="0" anchor="ctr"/>
-          <a:lstStyle/>
-          <a:p>
-            <a:endParaRPr lang="en-US"/>
-          </a:p>
-        </p:txBody>
-      </p:sp>
-      <p:sp>
-        <p:nvSpPr>
-          <p:cNvPr id="5" name="Notes Placeholder 4"/>
-          <p:cNvSpPr>
-            <a:spLocks noGrp="1"/>
-          </p:cNvSpPr>
-          <p:nvPr>
-            <p:ph type="body" sz="quarter" idx="3"/>
-          </p:nvPr>
-        </p:nvSpPr>
-        <p:spPr>
-          <a:xfrm>
-            <a:off x="685800" y="4400550"/>
-            <a:ext cx="5486400" cy="3600450"/>
-          </a:xfrm>
-          <a:prstGeom prst="rect">
-            <a:avLst/>
-          </a:prstGeom>
-        </p:spPr>
-        <p:txBody>
-          <a:bodyPr vert="horz" lIns="91440" tIns="45720" rIns="91440" bIns="45720" rtlCol="0"/>
-          <a:lstStyle/>
-          <a:p>
-            <a:pPr lvl="0"/>
-            <a:r>
-              <a:rPr lang="en-US"/>
-              <a:t>Click to edit Master text styles</a:t>
-            </a:r>
-          </a:p>
-          <a:p>
-            <a:pPr lvl="1"/>
-            <a:r>
-              <a:rPr lang="en-US"/>
-              <a:t>Second level</a:t>
-            </a:r>
-          </a:p>
-          <a:p>
-            <a:pPr lvl="2"/>
-            <a:r>
-              <a:rPr lang="en-US"/>
-              <a:t>Third level</a:t>
-            </a:r>
-          </a:p>
-          <a:p>
-            <a:pPr lvl="3"/>
-            <a:r>
-              <a:rPr lang="en-US"/>
-              <a:t>Fourth level</a:t>
-            </a:r>
-          </a:p>
-          <a:p>
-            <a:pPr lvl="4"/>
-            <a:r>
-              <a:rPr lang="en-US"/>
-              <a:t>Fifth level</a:t>
-            </a:r>
-          </a:p>
-        </p:txBody>
-      </p:sp>
-      <p:sp>
-        <p:nvSpPr>
-          <p:cNvPr id="6" name="Footer Placeholder 5"/>
-          <p:cNvSpPr>
-            <a:spLocks noGrp="1"/>
-          </p:cNvSpPr>
-          <p:nvPr>
-            <p:ph type="ftr" sz="quarter" idx="4"/>
-          </p:nvPr>
-        </p:nvSpPr>
-        <p:spPr>
-          <a:xfrm>
-            <a:off x="0" y="8685213"/>
-            <a:ext cx="2971800" cy="458787"/>
-          </a:xfrm>
-          <a:prstGeom prst="rect">
-            <a:avLst/>
-          </a:prstGeom>
-        </p:spPr>
-        <p:txBody>
-          <a:bodyPr vert="horz" lIns="91440" tIns="45720" rIns="91440" bIns="45720" rtlCol="0" anchor="b"/>
-          <a:lstStyle>
-            <a:lvl1pPr algn="l">
-              <a:defRPr sz="1200"/>
-            </a:lvl1pPr>
-          </a:lstStyle>
-          <a:p>
-            <a:endParaRPr lang="en-US"/>
-          </a:p>
-        </p:txBody>
-      </p:sp>
-      <p:sp>
-        <p:nvSpPr>
-          <p:cNvPr id="7" name="Slide Number Placeholder 6"/>
-          <p:cNvSpPr>
-            <a:spLocks noGrp="1"/>
-          </p:cNvSpPr>
-          <p:nvPr>
-            <p:ph type="sldNum" sz="quarter" idx="5"/>
-          </p:nvPr>
-        </p:nvSpPr>
-        <p:spPr>
-          <a:xfrm>
-            <a:off x="3884613" y="8685213"/>
-            <a:ext cx="2971800" cy="458787"/>
-          </a:xfrm>
-          <a:prstGeom prst="rect">
-            <a:avLst/>
-          </a:prstGeom>
-        </p:spPr>
-        <p:txBody>
-          <a:bodyPr vert="horz" lIns="91440" tIns="45720" rIns="91440" bIns="45720" rtlCol="0" anchor="b"/>
-          <a:lstStyle>
-            <a:lvl1pPr algn="r">
-              <a:defRPr sz="1200"/>
-            </a:lvl1pPr>
-          </a:lstStyle>
-          <a:p>
-            <a:fld id="{CE5E9CC1-C706-0F49-92D6-E571CC5EEA8F}" type="slidenum">
-              <a:rPr lang="en-US"/>
-              <a:t>‹#›</a:t>
-            </a:fld>
-            <a:endParaRPr lang="en-US"/>
-          </a:p>
-        </p:txBody>
-      </p:sp>
     </p:spTree>
     <p:extLst>
       <p:ext uri="{BB962C8B-B14F-4D97-AF65-F5344CB8AC3E}">
-        <p14:creationId xmlns:p14="http://schemas.microsoft.com/office/powerpoint/2010/main" val="1024086991"/>
+        <p14:creationId xmlns:p14="http://schemas.microsoft.com/office/powerpoint/2010/main" val="388679115"/>
       </p:ext>
     </p:extLst>
   </p:cSld>
@@ -560,7 +336,6 @@
               <a:rPr lang="en-US" dirty="0"/>
               <a:t>Presentamos NewBit, nuestra plataforma de Computer Vision para operaciones industriales. Somos tres: Albert es el Product Owner, Anthony es Scrum Master y Developer, y Luis es Developer. El proyecto se desarrolla con Scrum en cuatro sprints.</a:t>
             </a:r>
-            <a:endParaRPr lang="en-US" dirty="0"/>
           </a:p>
         </p:txBody>
       </p:sp>
@@ -648,7 +423,6 @@
               <a:rPr lang="en-US" dirty="0"/>
               <a:t>Cada épica se descompone en historias de usuario más pequeñas y verificables. Por ejemplo, la EP04 se divide en procesar el clip con ConvLSTM y etiquetar la conducta. Son doce historias iniciales que luego priorizamos en el Product Backlog y repartimos entre los cuatro sprints.</a:t>
             </a:r>
-            <a:endParaRPr lang="en-US" dirty="0"/>
           </a:p>
         </p:txBody>
       </p:sp>
@@ -736,7 +510,6 @@
               <a:rPr lang="en-US" dirty="0"/>
               <a:t>El presupuesto total es de 20 768 soles, el mismo del Acta. Casi todo es la dedicación valorizada del equipo; el gasto real en efectivo es de unos 280 soles más la contingencia, porque el dataset y las herramientas son abiertos. No afirmamos ahorros: se medirán con la evaluación.</a:t>
             </a:r>
-            <a:endParaRPr lang="en-US" dirty="0"/>
           </a:p>
         </p:txBody>
       </p:sp>
@@ -824,7 +597,6 @@
               <a:rPr lang="en-US" dirty="0"/>
               <a:t>Cerramos con los principios de NewBit: evaluamos conductas y no frames, una persona valida cada alerta, protegemos la privacidad y todo es reproducible. Gracias; quedamos atentos a sus preguntas.</a:t>
             </a:r>
-            <a:endParaRPr lang="en-US" dirty="0"/>
           </a:p>
         </p:txBody>
       </p:sp>
@@ -912,7 +684,6 @@
               <a:rPr lang="en-US" dirty="0"/>
               <a:t>El problema no es la falta de cámaras: las plantas ya las tienen. El problema es que graban sin avisar. Las inspecciones son puntuales y las conductas inseguras duran segundos, así que se detectan tarde o nunca.</a:t>
             </a:r>
-            <a:endParaRPr lang="en-US" dirty="0"/>
           </a:p>
         </p:txBody>
       </p:sp>
@@ -1000,7 +771,6 @@
               <a:rPr lang="en-US" dirty="0"/>
               <a:t>NewBit aprovecha las cámaras existentes. Hace tres cosas: detecta la conducta en el video, alerta con evidencia y registra todo para que la gerencia pueda decidir. Una persona siempre valida la alerta.</a:t>
             </a:r>
-            <a:endParaRPr lang="en-US" dirty="0"/>
           </a:p>
         </p:txBody>
       </p:sp>
@@ -1085,8 +855,8 @@
           <a:lstStyle/>
           <a:p>
             <a:r>
-              <a:rPr lang="en-US" dirty="0"/>
-              <a:t>Este es el corazón técnico. El video entra, YOLOv4 detecta personas y objetos en cada frame, descartamos los frames sin actividad, armamos secuencias y el ConvLSTM reconoce la conducta. Si es insegura, se genera la alerta con evidencia y una persona la valida. Cada etapa corresponde a un requisito del Acta.</a:t>
+              <a:rPr lang="es-ES"/>
+              <a:t>Este es el corazón técnico. El video entra, YOLOv8 detecta personas y objetos en cada frame, descartamos los frames sin actividad, armamos secuencias y el ConvLSTM reconoce la conducta. Si es insegura, se genera la alerta con evidencia y una persona la valida. Cada etapa corresponde a un requisito del Acta.</a:t>
             </a:r>
             <a:endParaRPr lang="en-US" dirty="0"/>
           </a:p>
@@ -1176,7 +946,6 @@
               <a:rPr lang="en-US" dirty="0"/>
               <a:t>Empezamos con dos conductas visualmente distintas que se pueden entrenar en cuatro sprints. El modelo también aprende los casos seguros de contraste. La plataforma queda lista para sumar más conductas.</a:t>
             </a:r>
-            <a:endParaRPr lang="en-US" dirty="0"/>
           </a:p>
         </p:txBody>
       </p:sp>
@@ -1261,8 +1030,8 @@
           <a:lstStyle/>
           <a:p>
             <a:r>
-              <a:rPr lang="en-US" dirty="0"/>
-              <a:t>Antes de operar, NewBit aprende con un dataset público de video industrial con licencia abierta. Anotamos frames, entrenamos YOLOv4 y ConvLSTM, evaluamos con métricas por clase y versionamos los modelos. No prometemos cifras: las metas salen de la línea base del Sprint 3.</a:t>
+              <a:rPr lang="es-ES"/>
+              <a:t>Antes de operar, NewBit aprende con un dataset público de video industrial con licencia abierta. Anotamos frames, entrenamos YOLOv8 y ConvLSTM, evaluamos con métricas por clase y versionamos los modelos. No prometemos cifras: las metas salen de la línea base del Sprint 3.</a:t>
             </a:r>
             <a:endParaRPr lang="en-US" dirty="0"/>
           </a:p>
@@ -1352,7 +1121,6 @@
               <a:rPr lang="en-US" dirty="0"/>
               <a:t>Diseñamos NewBit para cinco perfiles. Cada uno tiene una necesidad distinta: el administrador configura, la supervisora de SST y la operadora atienden alertas, el supervisor de turno corrige y el gerente decide con reportes.</a:t>
             </a:r>
-            <a:endParaRPr lang="en-US" dirty="0"/>
           </a:p>
         </p:txBody>
       </p:sp>
@@ -1440,7 +1208,6 @@
               <a:rPr lang="en-US" dirty="0"/>
               <a:t>Somos tres. Albert es el Product Owner, Anthony combina Scrum Master y Developer, y Luis es Developer; los dos Developers se revisan el código entre sí. Trabajamos en cuatro sprints de dos semanas, del 19 de octubre al 11 de diciembre.</a:t>
             </a:r>
-            <a:endParaRPr lang="en-US" dirty="0"/>
           </a:p>
         </p:txBody>
       </p:sp>
@@ -1525,8 +1292,8 @@
           <a:lstStyle/>
           <a:p>
             <a:r>
-              <a:rPr lang="en-US" dirty="0"/>
-              <a:t>Organizamos el trabajo en seis épicas que siguen el recorrido del video: ingestión, filtrado con YOLOv4, segmentación en clips, clasificación con ConvLSTM, interfaz con alertas y administración de parámetros. La épica central es la EP04. Cada épica tiene la forma: como rol, yo debería, a fin de.</a:t>
+              <a:rPr lang="es-ES"/>
+              <a:t>Organizamos el trabajo en seis épicas que siguen el recorrido del video: ingestión, filtrado con YOLOv8, segmentación en clips, clasificación con ConvLSTM, interfaz con alertas y administración de parámetros. La épica central es la EP04. Cada épica tiene la forma: como rol, yo debería, a fin de.</a:t>
             </a:r>
             <a:endParaRPr lang="en-US" dirty="0"/>
           </a:p>
@@ -1606,6 +1373,7 @@
         <a:solidFill>
           <a:srgbClr val="12233F"/>
         </a:solidFill>
+        <a:effectLst/>
       </p:bgPr>
     </p:bg>
     <p:spTree>
@@ -1638,6 +1406,7 @@
         <a:solidFill>
           <a:srgbClr val="FFFFFF"/>
         </a:solidFill>
+        <a:effectLst/>
       </p:bgPr>
     </p:bg>
     <p:spTree>
@@ -1657,9 +1426,11 @@
       <p:sp>
         <p:nvSpPr>
           <p:cNvPr id="2" name="Text 0"/>
-          <p:cNvSpPr/>
+          <p:cNvSpPr>
+            <a:spLocks noGrp="1"/>
+          </p:cNvSpPr>
           <p:nvPr>
-            <p:ph idx="100" type="title" hasCustomPrompt="1"/>
+            <p:ph type="title" idx="100" hasCustomPrompt="1"/>
           </p:nvPr>
         </p:nvSpPr>
         <p:spPr>
@@ -1676,7 +1447,7 @@
         <p:txBody>
           <a:bodyPr wrap="square" rtlCol="0"/>
           <a:lstStyle>
-            <a:lvl1pPr algn="l" indent="0" marL="0">
+            <a:lvl1pPr marL="0" indent="0" algn="l">
               <a:buNone/>
               <a:defRPr lang="en-US" sz="3200" b="1" dirty="0">
                 <a:solidFill>
@@ -1689,7 +1460,7 @@
             </a:lvl1pPr>
           </a:lstStyle>
           <a:p>
-            <a:pPr algn="l" indent="0" marL="0">
+            <a:pPr marL="0" indent="0" algn="l">
               <a:buNone/>
             </a:pPr>
             <a:endParaRPr lang="en-US" sz="3200" dirty="0"/>
@@ -1717,7 +1488,7 @@
           <a:bodyPr wrap="square" lIns="0" tIns="0" rIns="0" bIns="0" rtlCol="0" anchor="ctr"/>
           <a:lstStyle/>
           <a:p>
-            <a:pPr indent="0" marL="0">
+            <a:pPr marL="0" indent="0">
               <a:buNone/>
             </a:pPr>
             <a:r>
@@ -1755,7 +1526,7 @@
           </a:prstGeom>
           <a:extLst>
             <a:ext uri="{C572A759-6A51-4108-AA02-DFA0A04FC94B}">
-              <ma14:wrappingTextBoxFlag xmlns:ma14="http://schemas.microsoft.com/office/mac/drawingml/2011/main" val="0"/>
+              <ma14:wrappingTextBoxFlag xmlns:ma14="http://schemas.microsoft.com/office/mac/drawingml/2011/main" xmlns="" val="0"/>
             </a:ext>
           </a:extLst>
         </p:spPr>
@@ -1776,8 +1547,8 @@
           <a:p>
             <a:pPr algn="r"/>
             <a:fld id="{F7021451-1387-4CA6-816F-3879F97B5CBC}" type="slidenum">
-              <a:rPr b="0" lang="en-US"/>
-              <a:t>1003</a:t>
+              <a:rPr lang="en-US" b="0"/>
+              <a:t>‹Nº›</a:t>
             </a:fld>
             <a:endParaRPr lang="en-US"/>
           </a:p>
@@ -1794,6 +1565,11 @@
 <file path=ppt/slideMasters/slideMaster1.xml><?xml version="1.0" encoding="utf-8"?>
 <p:sldMaster xmlns:a="http://schemas.openxmlformats.org/drawingml/2006/main" xmlns:r="http://schemas.openxmlformats.org/officeDocument/2006/relationships" xmlns:p="http://schemas.openxmlformats.org/presentationml/2006/main">
   <p:cSld>
+    <p:bg>
+      <p:bgRef idx="1001">
+        <a:schemeClr val="bg1"/>
+      </p:bgRef>
+    </p:bg>
     <p:spTree>
       <p:nvGrpSpPr>
         <p:cNvPr id="1" name=""/>
@@ -1828,7 +1604,7 @@
           </a:prstGeom>
           <a:extLst>
             <a:ext uri="{C572A759-6A51-4108-AA02-DFA0A04FC94B}">
-              <ma14:wrappingTextBoxFlag xmlns:ma14="http://schemas.microsoft.com/office/mac/drawingml/2011/main" val="0"/>
+              <ma14:wrappingTextBoxFlag xmlns:ma14="http://schemas.microsoft.com/office/mac/drawingml/2011/main" xmlns="" val="0"/>
             </a:ext>
           </a:extLst>
         </p:spPr>
@@ -1849,8 +1625,8 @@
           <a:p>
             <a:pPr algn="r"/>
             <a:fld id="{F7021451-1387-4CA6-816F-3879F97B5CBC}" type="slidenum">
-              <a:rPr b="0" lang="en-US"/>
-              <a:t>null</a:t>
+              <a:rPr lang="en-US" b="0"/>
+              <a:t>‹Nº›</a:t>
             </a:fld>
             <a:endParaRPr lang="en-US"/>
           </a:p>
@@ -2159,6 +1935,13 @@
             <a:prstDash val="solid"/>
           </a:ln>
         </p:spPr>
+        <p:txBody>
+          <a:bodyPr/>
+          <a:lstStyle/>
+          <a:p>
+            <a:endParaRPr lang="es-ES"/>
+          </a:p>
+        </p:txBody>
       </p:sp>
       <p:sp>
         <p:nvSpPr>
@@ -2186,17 +1969,24 @@
             <a:prstDash val="solid"/>
           </a:ln>
         </p:spPr>
+        <p:txBody>
+          <a:bodyPr/>
+          <a:lstStyle/>
+          <a:p>
+            <a:endParaRPr lang="es-ES"/>
+          </a:p>
+        </p:txBody>
       </p:sp>
       <p:pic>
         <p:nvPicPr>
-          <p:cNvPr id="4" name="Image 0" descr="preencoded.png">    </p:cNvPr>
+          <p:cNvPr id="4" name="Image 0" descr="preencoded.png"/>
           <p:cNvPicPr>
             <a:picLocks noChangeAspect="1"/>
           </p:cNvPicPr>
           <p:nvPr/>
         </p:nvPicPr>
         <p:blipFill>
-          <a:blip r:embed="rId1"/>
+          <a:blip r:embed="rId3"/>
           <a:stretch>
             <a:fillRect/>
           </a:stretch>
@@ -2232,11 +2022,11 @@
           <a:bodyPr wrap="square" lIns="0" tIns="0" rIns="0" bIns="0" rtlCol="0" anchor="ctr"/>
           <a:lstStyle/>
           <a:p>
-            <a:pPr indent="0" marL="0">
-              <a:buNone/>
-            </a:pPr>
-            <a:r>
-              <a:rPr lang="en-US" sz="6600" b="1" dirty="0">
+            <a:pPr marL="0" indent="0">
+              <a:buNone/>
+            </a:pPr>
+            <a:r>
+              <a:rPr lang="en-US" sz="6600" b="1">
                 <a:solidFill>
                   <a:srgbClr val="FFFFFF"/>
                 </a:solidFill>
@@ -2271,11 +2061,11 @@
           <a:bodyPr wrap="square" lIns="0" tIns="0" rIns="0" bIns="0" rtlCol="0" anchor="ctr"/>
           <a:lstStyle/>
           <a:p>
-            <a:pPr indent="0" marL="0">
-              <a:buNone/>
-            </a:pPr>
-            <a:r>
-              <a:rPr lang="en-US" sz="2200" dirty="0">
+            <a:pPr marL="0" indent="0">
+              <a:buNone/>
+            </a:pPr>
+            <a:r>
+              <a:rPr lang="es-ES" sz="2200">
                 <a:solidFill>
                   <a:srgbClr val="C9D6EA"/>
                 </a:solidFill>
@@ -2315,6 +2105,13 @@
             <a:prstDash val="solid"/>
           </a:ln>
         </p:spPr>
+        <p:txBody>
+          <a:bodyPr/>
+          <a:lstStyle/>
+          <a:p>
+            <a:endParaRPr lang="es-ES"/>
+          </a:p>
+        </p:txBody>
       </p:sp>
       <p:sp>
         <p:nvSpPr>
@@ -2337,11 +2134,11 @@
           <a:bodyPr wrap="square" lIns="0" tIns="0" rIns="0" bIns="0" rtlCol="0" anchor="ctr"/>
           <a:lstStyle/>
           <a:p>
-            <a:pPr algn="ctr" indent="0" marL="0">
-              <a:buNone/>
-            </a:pPr>
-            <a:r>
-              <a:rPr lang="en-US" sz="1300" dirty="0">
+            <a:pPr marL="0" indent="0" algn="ctr">
+              <a:buNone/>
+            </a:pPr>
+            <a:r>
+              <a:rPr lang="en-US" sz="1300">
                 <a:solidFill>
                   <a:srgbClr val="FFFFFF"/>
                 </a:solidFill>
@@ -2381,6 +2178,13 @@
             <a:prstDash val="solid"/>
           </a:ln>
         </p:spPr>
+        <p:txBody>
+          <a:bodyPr/>
+          <a:lstStyle/>
+          <a:p>
+            <a:endParaRPr lang="es-ES"/>
+          </a:p>
+        </p:txBody>
       </p:sp>
       <p:sp>
         <p:nvSpPr>
@@ -2403,11 +2207,11 @@
           <a:bodyPr wrap="square" lIns="0" tIns="0" rIns="0" bIns="0" rtlCol="0" anchor="ctr"/>
           <a:lstStyle/>
           <a:p>
-            <a:pPr algn="ctr" indent="0" marL="0">
-              <a:buNone/>
-            </a:pPr>
-            <a:r>
-              <a:rPr lang="en-US" sz="1300" dirty="0">
+            <a:pPr marL="0" indent="0" algn="ctr">
+              <a:buNone/>
+            </a:pPr>
+            <a:r>
+              <a:rPr lang="en-US" sz="1300">
                 <a:solidFill>
                   <a:srgbClr val="FFFFFF"/>
                 </a:solidFill>
@@ -2447,6 +2251,13 @@
             <a:prstDash val="solid"/>
           </a:ln>
         </p:spPr>
+        <p:txBody>
+          <a:bodyPr/>
+          <a:lstStyle/>
+          <a:p>
+            <a:endParaRPr lang="es-ES"/>
+          </a:p>
+        </p:txBody>
       </p:sp>
       <p:sp>
         <p:nvSpPr>
@@ -2469,11 +2280,11 @@
           <a:bodyPr wrap="square" lIns="0" tIns="0" rIns="0" bIns="0" rtlCol="0" anchor="ctr"/>
           <a:lstStyle/>
           <a:p>
-            <a:pPr algn="ctr" indent="0" marL="0">
-              <a:buNone/>
-            </a:pPr>
-            <a:r>
-              <a:rPr lang="en-US" sz="1300" dirty="0">
+            <a:pPr marL="0" indent="0" algn="ctr">
+              <a:buNone/>
+            </a:pPr>
+            <a:r>
+              <a:rPr lang="en-US" sz="1300">
                 <a:solidFill>
                   <a:srgbClr val="FFFFFF"/>
                 </a:solidFill>
@@ -2508,11 +2319,11 @@
           <a:bodyPr wrap="square" lIns="0" tIns="0" rIns="0" bIns="0" rtlCol="0" anchor="ctr"/>
           <a:lstStyle/>
           <a:p>
-            <a:pPr indent="0" marL="0">
-              <a:buNone/>
-            </a:pPr>
-            <a:r>
-              <a:rPr lang="en-US" sz="1400" b="1" dirty="0">
+            <a:pPr marL="0" indent="0">
+              <a:buNone/>
+            </a:pPr>
+            <a:r>
+              <a:rPr lang="en-US" sz="1400" b="1">
                 <a:solidFill>
                   <a:srgbClr val="F5A623"/>
                 </a:solidFill>
@@ -2520,21 +2331,7 @@
                 <a:ea typeface="Calibri" pitchFamily="34" charset="-122"/>
                 <a:cs typeface="Calibri" pitchFamily="34" charset="-120"/>
               </a:rPr>
-              <a:t>Equipo: </a:t>
-            </a:r>
-            <a:pPr indent="0" marL="0">
-              <a:buNone/>
-            </a:pPr>
-            <a:r>
-              <a:rPr lang="en-US" sz="1400" dirty="0">
-                <a:solidFill>
-                  <a:srgbClr val="FFFFFF"/>
-                </a:solidFill>
-                <a:latin typeface="Calibri" pitchFamily="34" charset="0"/>
-                <a:ea typeface="Calibri" pitchFamily="34" charset="-122"/>
-                <a:cs typeface="Calibri" pitchFamily="34" charset="-120"/>
-              </a:rPr>
-              <a:t>Albert Sebastian Chumacero Chávarry (Product Owner) · Anthony Gabriel Lopez Yrribarren (Scrum Master y Developer) · Luis Fernando Salazar Diaz (Developer)</a:t>
+              <a:t>Equipo: Albert Sebastian Chumacero Chávarry (Product Owner) · Anthony Gabriel Lopez Yrribarren (Scrum Master y Developer) · Luis Fernando Salazar Diaz (Developer)</a:t>
             </a:r>
             <a:endParaRPr lang="en-US" sz="1400" dirty="0"/>
           </a:p>
@@ -2561,11 +2358,11 @@
           <a:bodyPr wrap="square" lIns="0" tIns="0" rIns="0" bIns="0" rtlCol="0" anchor="ctr"/>
           <a:lstStyle/>
           <a:p>
-            <a:pPr indent="0" marL="0">
-              <a:buNone/>
-            </a:pPr>
-            <a:r>
-              <a:rPr lang="en-US" sz="1200" dirty="0">
+            <a:pPr marL="0" indent="0">
+              <a:buNone/>
+            </a:pPr>
+            <a:r>
+              <a:rPr lang="es-ES" sz="1200">
                 <a:solidFill>
                   <a:srgbClr val="C9D6EA"/>
                 </a:solidFill>
@@ -2607,9 +2404,11 @@
       <p:sp>
         <p:nvSpPr>
           <p:cNvPr id="2" name="Text 0"/>
-          <p:cNvSpPr/>
+          <p:cNvSpPr>
+            <a:spLocks noGrp="1"/>
+          </p:cNvSpPr>
           <p:nvPr>
-            <p:ph idx="100" type="title" hasCustomPrompt="1"/>
+            <p:ph type="title" idx="100" hasCustomPrompt="1"/>
           </p:nvPr>
         </p:nvSpPr>
         <p:spPr>
@@ -2627,11 +2426,11 @@
           <a:bodyPr wrap="square" lIns="0" tIns="0" rIns="0" bIns="0" rtlCol="0" anchor="ctr"/>
           <a:lstStyle/>
           <a:p>
-            <a:pPr algn="l" indent="0" marL="0">
-              <a:buNone/>
-            </a:pPr>
-            <a:r>
-              <a:rPr lang="en-US" sz="3200" b="1" dirty="0">
+            <a:pPr marL="0" indent="0" algn="l">
+              <a:buNone/>
+            </a:pPr>
+            <a:r>
+              <a:rPr lang="en-US" sz="3200" b="1">
                 <a:solidFill>
                   <a:srgbClr val="0F1B2D"/>
                 </a:solidFill>
@@ -2671,6 +2470,13 @@
             <a:prstDash val="solid"/>
           </a:ln>
         </p:spPr>
+        <p:txBody>
+          <a:bodyPr/>
+          <a:lstStyle/>
+          <a:p>
+            <a:endParaRPr lang="es-ES"/>
+          </a:p>
+        </p:txBody>
       </p:sp>
       <p:sp>
         <p:nvSpPr>
@@ -2693,11 +2499,11 @@
           <a:bodyPr wrap="square" lIns="0" tIns="0" rIns="0" bIns="0" rtlCol="0" anchor="ctr"/>
           <a:lstStyle/>
           <a:p>
-            <a:pPr indent="0" marL="0">
-              <a:buNone/>
-            </a:pPr>
-            <a:r>
-              <a:rPr lang="en-US" sz="1400" b="1" dirty="0">
+            <a:pPr marL="0" indent="0">
+              <a:buNone/>
+            </a:pPr>
+            <a:r>
+              <a:rPr lang="en-US" sz="1400" b="1">
                 <a:solidFill>
                   <a:srgbClr val="FFFFFF"/>
                 </a:solidFill>
@@ -2705,21 +2511,7 @@
                 <a:ea typeface="Calibri" pitchFamily="34" charset="-122"/>
                 <a:cs typeface="Calibri" pitchFamily="34" charset="-120"/>
               </a:rPr>
-              <a:t>EP01  </a:t>
-            </a:r>
-            <a:pPr indent="0" marL="0">
-              <a:buNone/>
-            </a:pPr>
-            <a:r>
-              <a:rPr lang="en-US" sz="1400" dirty="0">
-                <a:solidFill>
-                  <a:srgbClr val="FFFFFF"/>
-                </a:solidFill>
-                <a:latin typeface="Calibri" pitchFamily="34" charset="0"/>
-                <a:ea typeface="Calibri" pitchFamily="34" charset="-122"/>
-                <a:cs typeface="Calibri" pitchFamily="34" charset="-120"/>
-              </a:rPr>
-              <a:t>Ingestión</a:t>
+              <a:t>EP01  Ingestión</a:t>
             </a:r>
             <a:endParaRPr lang="en-US" sz="1400" dirty="0"/>
           </a:p>
@@ -2751,6 +2543,13 @@
             <a:prstDash val="solid"/>
           </a:ln>
         </p:spPr>
+        <p:txBody>
+          <a:bodyPr/>
+          <a:lstStyle/>
+          <a:p>
+            <a:endParaRPr lang="es-ES"/>
+          </a:p>
+        </p:txBody>
       </p:sp>
       <p:sp>
         <p:nvSpPr>
@@ -2773,11 +2572,11 @@
           <a:bodyPr wrap="square" lIns="0" tIns="0" rIns="0" bIns="0" rtlCol="0" anchor="ctr"/>
           <a:lstStyle/>
           <a:p>
-            <a:pPr indent="0" marL="0">
-              <a:buNone/>
-            </a:pPr>
-            <a:r>
-              <a:rPr lang="en-US" sz="1300" b="1" dirty="0">
+            <a:pPr marL="0" indent="0">
+              <a:buNone/>
+            </a:pPr>
+            <a:r>
+              <a:rPr lang="es-ES" sz="1300" b="1">
                 <a:solidFill>
                   <a:srgbClr val="2F6FE4"/>
                 </a:solidFill>
@@ -2785,21 +2584,7 @@
                 <a:ea typeface="Calibri" pitchFamily="34" charset="-122"/>
                 <a:cs typeface="Calibri" pitchFamily="34" charset="-120"/>
               </a:rPr>
-              <a:t>HU01 </a:t>
-            </a:r>
-            <a:pPr indent="0" marL="0">
-              <a:buNone/>
-            </a:pPr>
-            <a:r>
-              <a:rPr lang="en-US" sz="1300" dirty="0">
-                <a:solidFill>
-                  <a:srgbClr val="0F1B2D"/>
-                </a:solidFill>
-                <a:latin typeface="Calibri" pitchFamily="34" charset="0"/>
-                <a:ea typeface="Calibri" pitchFamily="34" charset="-122"/>
-                <a:cs typeface="Calibri" pitchFamily="34" charset="-120"/>
-              </a:rPr>
-              <a:t>Cargar un video industrial</a:t>
+              <a:t>HU01 Cargar un video industrial</a:t>
             </a:r>
             <a:endParaRPr lang="en-US" sz="1300" dirty="0"/>
           </a:p>
@@ -2831,6 +2616,13 @@
             <a:prstDash val="solid"/>
           </a:ln>
         </p:spPr>
+        <p:txBody>
+          <a:bodyPr/>
+          <a:lstStyle/>
+          <a:p>
+            <a:endParaRPr lang="es-ES"/>
+          </a:p>
+        </p:txBody>
       </p:sp>
       <p:sp>
         <p:nvSpPr>
@@ -2853,11 +2645,11 @@
           <a:bodyPr wrap="square" lIns="0" tIns="0" rIns="0" bIns="0" rtlCol="0" anchor="ctr"/>
           <a:lstStyle/>
           <a:p>
-            <a:pPr indent="0" marL="0">
-              <a:buNone/>
-            </a:pPr>
-            <a:r>
-              <a:rPr lang="en-US" sz="1300" b="1" dirty="0">
+            <a:pPr marL="0" indent="0">
+              <a:buNone/>
+            </a:pPr>
+            <a:r>
+              <a:rPr lang="es-ES" sz="1300" b="1">
                 <a:solidFill>
                   <a:srgbClr val="2F6FE4"/>
                 </a:solidFill>
@@ -2865,21 +2657,7 @@
                 <a:ea typeface="Calibri" pitchFamily="34" charset="-122"/>
                 <a:cs typeface="Calibri" pitchFamily="34" charset="-120"/>
               </a:rPr>
-              <a:t>HU02 </a:t>
-            </a:r>
-            <a:pPr indent="0" marL="0">
-              <a:buNone/>
-            </a:pPr>
-            <a:r>
-              <a:rPr lang="en-US" sz="1300" dirty="0">
-                <a:solidFill>
-                  <a:srgbClr val="0F1B2D"/>
-                </a:solidFill>
-                <a:latin typeface="Calibri" pitchFamily="34" charset="0"/>
-                <a:ea typeface="Calibri" pitchFamily="34" charset="-122"/>
-                <a:cs typeface="Calibri" pitchFamily="34" charset="-120"/>
-              </a:rPr>
-              <a:t>Fragmentar el video en frames</a:t>
+              <a:t>HU02 Fragmentar el video en frames</a:t>
             </a:r>
             <a:endParaRPr lang="en-US" sz="1300" dirty="0"/>
           </a:p>
@@ -2911,6 +2689,13 @@
             <a:prstDash val="solid"/>
           </a:ln>
         </p:spPr>
+        <p:txBody>
+          <a:bodyPr/>
+          <a:lstStyle/>
+          <a:p>
+            <a:endParaRPr lang="es-ES"/>
+          </a:p>
+        </p:txBody>
       </p:sp>
       <p:sp>
         <p:nvSpPr>
@@ -2933,11 +2718,11 @@
           <a:bodyPr wrap="square" lIns="0" tIns="0" rIns="0" bIns="0" rtlCol="0" anchor="ctr"/>
           <a:lstStyle/>
           <a:p>
-            <a:pPr indent="0" marL="0">
-              <a:buNone/>
-            </a:pPr>
-            <a:r>
-              <a:rPr lang="en-US" sz="1400" b="1" dirty="0">
+            <a:pPr marL="0" indent="0">
+              <a:buNone/>
+            </a:pPr>
+            <a:r>
+              <a:rPr lang="en-US" sz="1400" b="1">
                 <a:solidFill>
                   <a:srgbClr val="FFFFFF"/>
                 </a:solidFill>
@@ -2945,21 +2730,7 @@
                 <a:ea typeface="Calibri" pitchFamily="34" charset="-122"/>
                 <a:cs typeface="Calibri" pitchFamily="34" charset="-120"/>
               </a:rPr>
-              <a:t>EP02  </a:t>
-            </a:r>
-            <a:pPr indent="0" marL="0">
-              <a:buNone/>
-            </a:pPr>
-            <a:r>
-              <a:rPr lang="en-US" sz="1400" dirty="0">
-                <a:solidFill>
-                  <a:srgbClr val="FFFFFF"/>
-                </a:solidFill>
-                <a:latin typeface="Calibri" pitchFamily="34" charset="0"/>
-                <a:ea typeface="Calibri" pitchFamily="34" charset="-122"/>
-                <a:cs typeface="Calibri" pitchFamily="34" charset="-120"/>
-              </a:rPr>
-              <a:t>Filtrado YOLOv4</a:t>
+              <a:t>EP02  Filtrado YOLOv8</a:t>
             </a:r>
             <a:endParaRPr lang="en-US" sz="1400" dirty="0"/>
           </a:p>
@@ -2991,6 +2762,13 @@
             <a:prstDash val="solid"/>
           </a:ln>
         </p:spPr>
+        <p:txBody>
+          <a:bodyPr/>
+          <a:lstStyle/>
+          <a:p>
+            <a:endParaRPr lang="es-ES"/>
+          </a:p>
+        </p:txBody>
       </p:sp>
       <p:sp>
         <p:nvSpPr>
@@ -3013,11 +2791,11 @@
           <a:bodyPr wrap="square" lIns="0" tIns="0" rIns="0" bIns="0" rtlCol="0" anchor="ctr"/>
           <a:lstStyle/>
           <a:p>
-            <a:pPr indent="0" marL="0">
-              <a:buNone/>
-            </a:pPr>
-            <a:r>
-              <a:rPr lang="en-US" sz="1300" b="1" dirty="0">
+            <a:pPr marL="0" indent="0">
+              <a:buNone/>
+            </a:pPr>
+            <a:r>
+              <a:rPr lang="es-ES" sz="1300" b="1">
                 <a:solidFill>
                   <a:srgbClr val="5B4BDB"/>
                 </a:solidFill>
@@ -3025,21 +2803,7 @@
                 <a:ea typeface="Calibri" pitchFamily="34" charset="-122"/>
                 <a:cs typeface="Calibri" pitchFamily="34" charset="-120"/>
               </a:rPr>
-              <a:t>HU03 </a:t>
-            </a:r>
-            <a:pPr indent="0" marL="0">
-              <a:buNone/>
-            </a:pPr>
-            <a:r>
-              <a:rPr lang="en-US" sz="1300" dirty="0">
-                <a:solidFill>
-                  <a:srgbClr val="0F1B2D"/>
-                </a:solidFill>
-                <a:latin typeface="Calibri" pitchFamily="34" charset="0"/>
-                <a:ea typeface="Calibri" pitchFamily="34" charset="-122"/>
-                <a:cs typeface="Calibri" pitchFamily="34" charset="-120"/>
-              </a:rPr>
-              <a:t>Detectar trabajadores en cada frame</a:t>
+              <a:t>HU03 Detectar trabajadores en cada frame</a:t>
             </a:r>
             <a:endParaRPr lang="en-US" sz="1300" dirty="0"/>
           </a:p>
@@ -3071,6 +2835,13 @@
             <a:prstDash val="solid"/>
           </a:ln>
         </p:spPr>
+        <p:txBody>
+          <a:bodyPr/>
+          <a:lstStyle/>
+          <a:p>
+            <a:endParaRPr lang="es-ES"/>
+          </a:p>
+        </p:txBody>
       </p:sp>
       <p:sp>
         <p:nvSpPr>
@@ -3093,11 +2864,11 @@
           <a:bodyPr wrap="square" lIns="0" tIns="0" rIns="0" bIns="0" rtlCol="0" anchor="ctr"/>
           <a:lstStyle/>
           <a:p>
-            <a:pPr indent="0" marL="0">
-              <a:buNone/>
-            </a:pPr>
-            <a:r>
-              <a:rPr lang="en-US" sz="1300" b="1" dirty="0">
+            <a:pPr marL="0" indent="0">
+              <a:buNone/>
+            </a:pPr>
+            <a:r>
+              <a:rPr lang="es-ES" sz="1300" b="1">
                 <a:solidFill>
                   <a:srgbClr val="5B4BDB"/>
                 </a:solidFill>
@@ -3105,21 +2876,7 @@
                 <a:ea typeface="Calibri" pitchFamily="34" charset="-122"/>
                 <a:cs typeface="Calibri" pitchFamily="34" charset="-120"/>
               </a:rPr>
-              <a:t>HU04 </a:t>
-            </a:r>
-            <a:pPr indent="0" marL="0">
-              <a:buNone/>
-            </a:pPr>
-            <a:r>
-              <a:rPr lang="en-US" sz="1300" dirty="0">
-                <a:solidFill>
-                  <a:srgbClr val="0F1B2D"/>
-                </a:solidFill>
-                <a:latin typeface="Calibri" pitchFamily="34" charset="0"/>
-                <a:ea typeface="Calibri" pitchFamily="34" charset="-122"/>
-                <a:cs typeface="Calibri" pitchFamily="34" charset="-120"/>
-              </a:rPr>
-              <a:t>Descartar frames sin trabajadores</a:t>
+              <a:t>HU04 Descartar frames sin trabajadores</a:t>
             </a:r>
             <a:endParaRPr lang="en-US" sz="1300" dirty="0"/>
           </a:p>
@@ -3151,6 +2908,13 @@
             <a:prstDash val="solid"/>
           </a:ln>
         </p:spPr>
+        <p:txBody>
+          <a:bodyPr/>
+          <a:lstStyle/>
+          <a:p>
+            <a:endParaRPr lang="es-ES"/>
+          </a:p>
+        </p:txBody>
       </p:sp>
       <p:sp>
         <p:nvSpPr>
@@ -3173,11 +2937,11 @@
           <a:bodyPr wrap="square" lIns="0" tIns="0" rIns="0" bIns="0" rtlCol="0" anchor="ctr"/>
           <a:lstStyle/>
           <a:p>
-            <a:pPr indent="0" marL="0">
-              <a:buNone/>
-            </a:pPr>
-            <a:r>
-              <a:rPr lang="en-US" sz="1400" b="1" dirty="0">
+            <a:pPr marL="0" indent="0">
+              <a:buNone/>
+            </a:pPr>
+            <a:r>
+              <a:rPr lang="en-US" sz="1400" b="1">
                 <a:solidFill>
                   <a:srgbClr val="FFFFFF"/>
                 </a:solidFill>
@@ -3185,21 +2949,7 @@
                 <a:ea typeface="Calibri" pitchFamily="34" charset="-122"/>
                 <a:cs typeface="Calibri" pitchFamily="34" charset="-120"/>
               </a:rPr>
-              <a:t>EP03  </a:t>
-            </a:r>
-            <a:pPr indent="0" marL="0">
-              <a:buNone/>
-            </a:pPr>
-            <a:r>
-              <a:rPr lang="en-US" sz="1400" dirty="0">
-                <a:solidFill>
-                  <a:srgbClr val="FFFFFF"/>
-                </a:solidFill>
-                <a:latin typeface="Calibri" pitchFamily="34" charset="0"/>
-                <a:ea typeface="Calibri" pitchFamily="34" charset="-122"/>
-                <a:cs typeface="Calibri" pitchFamily="34" charset="-120"/>
-              </a:rPr>
-              <a:t>Segmentación</a:t>
+              <a:t>EP03  Segmentación</a:t>
             </a:r>
             <a:endParaRPr lang="en-US" sz="1400" dirty="0"/>
           </a:p>
@@ -3231,6 +2981,13 @@
             <a:prstDash val="solid"/>
           </a:ln>
         </p:spPr>
+        <p:txBody>
+          <a:bodyPr/>
+          <a:lstStyle/>
+          <a:p>
+            <a:endParaRPr lang="es-ES"/>
+          </a:p>
+        </p:txBody>
       </p:sp>
       <p:sp>
         <p:nvSpPr>
@@ -3253,11 +3010,11 @@
           <a:bodyPr wrap="square" lIns="0" tIns="0" rIns="0" bIns="0" rtlCol="0" anchor="ctr"/>
           <a:lstStyle/>
           <a:p>
-            <a:pPr indent="0" marL="0">
-              <a:buNone/>
-            </a:pPr>
-            <a:r>
-              <a:rPr lang="en-US" sz="1300" b="1" dirty="0">
+            <a:pPr marL="0" indent="0">
+              <a:buNone/>
+            </a:pPr>
+            <a:r>
+              <a:rPr lang="es-ES" sz="1300" b="1">
                 <a:solidFill>
                   <a:srgbClr val="5B4BDB"/>
                 </a:solidFill>
@@ -3265,21 +3022,7 @@
                 <a:ea typeface="Calibri" pitchFamily="34" charset="-122"/>
                 <a:cs typeface="Calibri" pitchFamily="34" charset="-120"/>
               </a:rPr>
-              <a:t>HU05 </a:t>
-            </a:r>
-            <a:pPr indent="0" marL="0">
-              <a:buNone/>
-            </a:pPr>
-            <a:r>
-              <a:rPr lang="en-US" sz="1300" dirty="0">
-                <a:solidFill>
-                  <a:srgbClr val="0F1B2D"/>
-                </a:solidFill>
-                <a:latin typeface="Calibri" pitchFamily="34" charset="0"/>
-                <a:ea typeface="Calibri" pitchFamily="34" charset="-122"/>
-                <a:cs typeface="Calibri" pitchFamily="34" charset="-120"/>
-              </a:rPr>
-              <a:t>Agrupar frames en clips de tamaño fijo</a:t>
+              <a:t>HU05 Agrupar frames en clips de tamaño fijo</a:t>
             </a:r>
             <a:endParaRPr lang="en-US" sz="1300" dirty="0"/>
           </a:p>
@@ -3311,6 +3054,13 @@
             <a:prstDash val="solid"/>
           </a:ln>
         </p:spPr>
+        <p:txBody>
+          <a:bodyPr/>
+          <a:lstStyle/>
+          <a:p>
+            <a:endParaRPr lang="es-ES"/>
+          </a:p>
+        </p:txBody>
       </p:sp>
       <p:sp>
         <p:nvSpPr>
@@ -3333,11 +3083,11 @@
           <a:bodyPr wrap="square" lIns="0" tIns="0" rIns="0" bIns="0" rtlCol="0" anchor="ctr"/>
           <a:lstStyle/>
           <a:p>
-            <a:pPr indent="0" marL="0">
-              <a:buNone/>
-            </a:pPr>
-            <a:r>
-              <a:rPr lang="en-US" sz="1300" b="1" dirty="0">
+            <a:pPr marL="0" indent="0">
+              <a:buNone/>
+            </a:pPr>
+            <a:r>
+              <a:rPr lang="es-ES" sz="1300" b="1">
                 <a:solidFill>
                   <a:srgbClr val="5B4BDB"/>
                 </a:solidFill>
@@ -3345,21 +3095,7 @@
                 <a:ea typeface="Calibri" pitchFamily="34" charset="-122"/>
                 <a:cs typeface="Calibri" pitchFamily="34" charset="-120"/>
               </a:rPr>
-              <a:t>HU06 </a:t>
-            </a:r>
-            <a:pPr indent="0" marL="0">
-              <a:buNone/>
-            </a:pPr>
-            <a:r>
-              <a:rPr lang="en-US" sz="1300" dirty="0">
-                <a:solidFill>
-                  <a:srgbClr val="0F1B2D"/>
-                </a:solidFill>
-                <a:latin typeface="Calibri" pitchFamily="34" charset="0"/>
-                <a:ea typeface="Calibri" pitchFamily="34" charset="-122"/>
-                <a:cs typeface="Calibri" pitchFamily="34" charset="-120"/>
-              </a:rPr>
-              <a:t>Descartar clips sin tiempo mínimo de acción</a:t>
+              <a:t>HU06 Descartar clips sin tiempo mínimo de acción</a:t>
             </a:r>
             <a:endParaRPr lang="en-US" sz="1300" dirty="0"/>
           </a:p>
@@ -3391,6 +3127,13 @@
             <a:prstDash val="solid"/>
           </a:ln>
         </p:spPr>
+        <p:txBody>
+          <a:bodyPr/>
+          <a:lstStyle/>
+          <a:p>
+            <a:endParaRPr lang="es-ES"/>
+          </a:p>
+        </p:txBody>
       </p:sp>
       <p:sp>
         <p:nvSpPr>
@@ -3413,11 +3156,11 @@
           <a:bodyPr wrap="square" lIns="0" tIns="0" rIns="0" bIns="0" rtlCol="0" anchor="ctr"/>
           <a:lstStyle/>
           <a:p>
-            <a:pPr indent="0" marL="0">
-              <a:buNone/>
-            </a:pPr>
-            <a:r>
-              <a:rPr lang="en-US" sz="1400" b="1" dirty="0">
+            <a:pPr marL="0" indent="0">
+              <a:buNone/>
+            </a:pPr>
+            <a:r>
+              <a:rPr lang="en-US" sz="1400" b="1">
                 <a:solidFill>
                   <a:srgbClr val="FFFFFF"/>
                 </a:solidFill>
@@ -3425,21 +3168,7 @@
                 <a:ea typeface="Calibri" pitchFamily="34" charset="-122"/>
                 <a:cs typeface="Calibri" pitchFamily="34" charset="-120"/>
               </a:rPr>
-              <a:t>EP04  </a:t>
-            </a:r>
-            <a:pPr indent="0" marL="0">
-              <a:buNone/>
-            </a:pPr>
-            <a:r>
-              <a:rPr lang="en-US" sz="1400" dirty="0">
-                <a:solidFill>
-                  <a:srgbClr val="FFFFFF"/>
-                </a:solidFill>
-                <a:latin typeface="Calibri" pitchFamily="34" charset="0"/>
-                <a:ea typeface="Calibri" pitchFamily="34" charset="-122"/>
-                <a:cs typeface="Calibri" pitchFamily="34" charset="-120"/>
-              </a:rPr>
-              <a:t>ConvLSTM</a:t>
+              <a:t>EP04  ConvLSTM</a:t>
             </a:r>
             <a:endParaRPr lang="en-US" sz="1400" dirty="0"/>
           </a:p>
@@ -3471,6 +3200,13 @@
             <a:prstDash val="solid"/>
           </a:ln>
         </p:spPr>
+        <p:txBody>
+          <a:bodyPr/>
+          <a:lstStyle/>
+          <a:p>
+            <a:endParaRPr lang="es-ES"/>
+          </a:p>
+        </p:txBody>
       </p:sp>
       <p:sp>
         <p:nvSpPr>
@@ -3493,11 +3229,11 @@
           <a:bodyPr wrap="square" lIns="0" tIns="0" rIns="0" bIns="0" rtlCol="0" anchor="ctr"/>
           <a:lstStyle/>
           <a:p>
-            <a:pPr indent="0" marL="0">
-              <a:buNone/>
-            </a:pPr>
-            <a:r>
-              <a:rPr lang="en-US" sz="1300" b="1" dirty="0">
+            <a:pPr marL="0" indent="0">
+              <a:buNone/>
+            </a:pPr>
+            <a:r>
+              <a:rPr lang="es-ES" sz="1300" b="1">
                 <a:solidFill>
                   <a:srgbClr val="E0483E"/>
                 </a:solidFill>
@@ -3505,21 +3241,7 @@
                 <a:ea typeface="Calibri" pitchFamily="34" charset="-122"/>
                 <a:cs typeface="Calibri" pitchFamily="34" charset="-120"/>
               </a:rPr>
-              <a:t>HU07 </a:t>
-            </a:r>
-            <a:pPr indent="0" marL="0">
-              <a:buNone/>
-            </a:pPr>
-            <a:r>
-              <a:rPr lang="en-US" sz="1300" dirty="0">
-                <a:solidFill>
-                  <a:srgbClr val="0F1B2D"/>
-                </a:solidFill>
-                <a:latin typeface="Calibri" pitchFamily="34" charset="0"/>
-                <a:ea typeface="Calibri" pitchFamily="34" charset="-122"/>
-                <a:cs typeface="Calibri" pitchFamily="34" charset="-120"/>
-              </a:rPr>
-              <a:t>Procesar el clip con ConvLSTM</a:t>
+              <a:t>HU07 Procesar el clip con ConvLSTM</a:t>
             </a:r>
             <a:endParaRPr lang="en-US" sz="1300" dirty="0"/>
           </a:p>
@@ -3551,6 +3273,13 @@
             <a:prstDash val="solid"/>
           </a:ln>
         </p:spPr>
+        <p:txBody>
+          <a:bodyPr/>
+          <a:lstStyle/>
+          <a:p>
+            <a:endParaRPr lang="es-ES"/>
+          </a:p>
+        </p:txBody>
       </p:sp>
       <p:sp>
         <p:nvSpPr>
@@ -3573,11 +3302,11 @@
           <a:bodyPr wrap="square" lIns="0" tIns="0" rIns="0" bIns="0" rtlCol="0" anchor="ctr"/>
           <a:lstStyle/>
           <a:p>
-            <a:pPr indent="0" marL="0">
-              <a:buNone/>
-            </a:pPr>
-            <a:r>
-              <a:rPr lang="en-US" sz="1300" b="1" dirty="0">
+            <a:pPr marL="0" indent="0">
+              <a:buNone/>
+            </a:pPr>
+            <a:r>
+              <a:rPr lang="en-US" sz="1300" b="1">
                 <a:solidFill>
                   <a:srgbClr val="E0483E"/>
                 </a:solidFill>
@@ -3585,21 +3314,7 @@
                 <a:ea typeface="Calibri" pitchFamily="34" charset="-122"/>
                 <a:cs typeface="Calibri" pitchFamily="34" charset="-120"/>
               </a:rPr>
-              <a:t>HU08 </a:t>
-            </a:r>
-            <a:pPr indent="0" marL="0">
-              <a:buNone/>
-            </a:pPr>
-            <a:r>
-              <a:rPr lang="en-US" sz="1300" dirty="0">
-                <a:solidFill>
-                  <a:srgbClr val="0F1B2D"/>
-                </a:solidFill>
-                <a:latin typeface="Calibri" pitchFamily="34" charset="0"/>
-                <a:ea typeface="Calibri" pitchFamily="34" charset="-122"/>
-                <a:cs typeface="Calibri" pitchFamily="34" charset="-120"/>
-              </a:rPr>
-              <a:t>Etiquetar la conducta: segura o insegura</a:t>
+              <a:t>HU08 Etiquetar la conducta: segura o insegura</a:t>
             </a:r>
             <a:endParaRPr lang="en-US" sz="1300" dirty="0"/>
           </a:p>
@@ -3631,6 +3346,13 @@
             <a:prstDash val="solid"/>
           </a:ln>
         </p:spPr>
+        <p:txBody>
+          <a:bodyPr/>
+          <a:lstStyle/>
+          <a:p>
+            <a:endParaRPr lang="es-ES"/>
+          </a:p>
+        </p:txBody>
       </p:sp>
       <p:sp>
         <p:nvSpPr>
@@ -3653,11 +3375,11 @@
           <a:bodyPr wrap="square" lIns="0" tIns="0" rIns="0" bIns="0" rtlCol="0" anchor="ctr"/>
           <a:lstStyle/>
           <a:p>
-            <a:pPr indent="0" marL="0">
-              <a:buNone/>
-            </a:pPr>
-            <a:r>
-              <a:rPr lang="en-US" sz="1400" b="1" dirty="0">
+            <a:pPr marL="0" indent="0">
+              <a:buNone/>
+            </a:pPr>
+            <a:r>
+              <a:rPr lang="en-US" sz="1400" b="1">
                 <a:solidFill>
                   <a:srgbClr val="FFFFFF"/>
                 </a:solidFill>
@@ -3665,21 +3387,7 @@
                 <a:ea typeface="Calibri" pitchFamily="34" charset="-122"/>
                 <a:cs typeface="Calibri" pitchFamily="34" charset="-120"/>
               </a:rPr>
-              <a:t>EP05  </a:t>
-            </a:r>
-            <a:pPr indent="0" marL="0">
-              <a:buNone/>
-            </a:pPr>
-            <a:r>
-              <a:rPr lang="en-US" sz="1400" dirty="0">
-                <a:solidFill>
-                  <a:srgbClr val="FFFFFF"/>
-                </a:solidFill>
-                <a:latin typeface="Calibri" pitchFamily="34" charset="0"/>
-                <a:ea typeface="Calibri" pitchFamily="34" charset="-122"/>
-                <a:cs typeface="Calibri" pitchFamily="34" charset="-120"/>
-              </a:rPr>
-              <a:t>Interfaz y registro</a:t>
+              <a:t>EP05  Interfaz y registro</a:t>
             </a:r>
             <a:endParaRPr lang="en-US" sz="1400" dirty="0"/>
           </a:p>
@@ -3711,6 +3419,13 @@
             <a:prstDash val="solid"/>
           </a:ln>
         </p:spPr>
+        <p:txBody>
+          <a:bodyPr/>
+          <a:lstStyle/>
+          <a:p>
+            <a:endParaRPr lang="es-ES"/>
+          </a:p>
+        </p:txBody>
       </p:sp>
       <p:sp>
         <p:nvSpPr>
@@ -3733,11 +3448,11 @@
           <a:bodyPr wrap="square" lIns="0" tIns="0" rIns="0" bIns="0" rtlCol="0" anchor="ctr"/>
           <a:lstStyle/>
           <a:p>
-            <a:pPr indent="0" marL="0">
-              <a:buNone/>
-            </a:pPr>
-            <a:r>
-              <a:rPr lang="en-US" sz="1300" b="1" dirty="0">
+            <a:pPr marL="0" indent="0">
+              <a:buNone/>
+            </a:pPr>
+            <a:r>
+              <a:rPr lang="es-ES" sz="1300" b="1">
                 <a:solidFill>
                   <a:srgbClr val="0F9D8A"/>
                 </a:solidFill>
@@ -3745,21 +3460,7 @@
                 <a:ea typeface="Calibri" pitchFamily="34" charset="-122"/>
                 <a:cs typeface="Calibri" pitchFamily="34" charset="-120"/>
               </a:rPr>
-              <a:t>HU09 </a:t>
-            </a:r>
-            <a:pPr indent="0" marL="0">
-              <a:buNone/>
-            </a:pPr>
-            <a:r>
-              <a:rPr lang="en-US" sz="1300" dirty="0">
-                <a:solidFill>
-                  <a:srgbClr val="0F1B2D"/>
-                </a:solidFill>
-                <a:latin typeface="Calibri" pitchFamily="34" charset="0"/>
-                <a:ea typeface="Calibri" pitchFamily="34" charset="-122"/>
-                <a:cs typeface="Calibri" pitchFamily="34" charset="-120"/>
-              </a:rPr>
-              <a:t>Ver el video con un recuadro de color según el riesgo</a:t>
+              <a:t>HU09 Ver el video con un recuadro de color según el riesgo</a:t>
             </a:r>
             <a:endParaRPr lang="en-US" sz="1300" dirty="0"/>
           </a:p>
@@ -3791,6 +3492,13 @@
             <a:prstDash val="solid"/>
           </a:ln>
         </p:spPr>
+        <p:txBody>
+          <a:bodyPr/>
+          <a:lstStyle/>
+          <a:p>
+            <a:endParaRPr lang="es-ES"/>
+          </a:p>
+        </p:txBody>
       </p:sp>
       <p:sp>
         <p:nvSpPr>
@@ -3813,11 +3521,11 @@
           <a:bodyPr wrap="square" lIns="0" tIns="0" rIns="0" bIns="0" rtlCol="0" anchor="ctr"/>
           <a:lstStyle/>
           <a:p>
-            <a:pPr indent="0" marL="0">
-              <a:buNone/>
-            </a:pPr>
-            <a:r>
-              <a:rPr lang="en-US" sz="1300" b="1" dirty="0">
+            <a:pPr marL="0" indent="0">
+              <a:buNone/>
+            </a:pPr>
+            <a:r>
+              <a:rPr lang="es-ES" sz="1300" b="1">
                 <a:solidFill>
                   <a:srgbClr val="0F9D8A"/>
                 </a:solidFill>
@@ -3825,21 +3533,7 @@
                 <a:ea typeface="Calibri" pitchFamily="34" charset="-122"/>
                 <a:cs typeface="Calibri" pitchFamily="34" charset="-120"/>
               </a:rPr>
-              <a:t>HU10 </a:t>
-            </a:r>
-            <a:pPr indent="0" marL="0">
-              <a:buNone/>
-            </a:pPr>
-            <a:r>
-              <a:rPr lang="en-US" sz="1300" dirty="0">
-                <a:solidFill>
-                  <a:srgbClr val="0F1B2D"/>
-                </a:solidFill>
-                <a:latin typeface="Calibri" pitchFamily="34" charset="0"/>
-                <a:ea typeface="Calibri" pitchFamily="34" charset="-122"/>
-                <a:cs typeface="Calibri" pitchFamily="34" charset="-120"/>
-              </a:rPr>
-              <a:t>Activar una alerta ante una conducta insegura</a:t>
+              <a:t>HU10 Activar una alerta ante una conducta insegura</a:t>
             </a:r>
             <a:endParaRPr lang="en-US" sz="1300" dirty="0"/>
           </a:p>
@@ -3871,6 +3565,13 @@
             <a:prstDash val="solid"/>
           </a:ln>
         </p:spPr>
+        <p:txBody>
+          <a:bodyPr/>
+          <a:lstStyle/>
+          <a:p>
+            <a:endParaRPr lang="es-ES"/>
+          </a:p>
+        </p:txBody>
       </p:sp>
       <p:sp>
         <p:nvSpPr>
@@ -3893,11 +3594,11 @@
           <a:bodyPr wrap="square" lIns="0" tIns="0" rIns="0" bIns="0" rtlCol="0" anchor="ctr"/>
           <a:lstStyle/>
           <a:p>
-            <a:pPr indent="0" marL="0">
-              <a:buNone/>
-            </a:pPr>
-            <a:r>
-              <a:rPr lang="en-US" sz="1400" b="1" dirty="0">
+            <a:pPr marL="0" indent="0">
+              <a:buNone/>
+            </a:pPr>
+            <a:r>
+              <a:rPr lang="en-US" sz="1400" b="1">
                 <a:solidFill>
                   <a:srgbClr val="FFFFFF"/>
                 </a:solidFill>
@@ -3905,21 +3606,7 @@
                 <a:ea typeface="Calibri" pitchFamily="34" charset="-122"/>
                 <a:cs typeface="Calibri" pitchFamily="34" charset="-120"/>
               </a:rPr>
-              <a:t>EP06  </a:t>
-            </a:r>
-            <a:pPr indent="0" marL="0">
-              <a:buNone/>
-            </a:pPr>
-            <a:r>
-              <a:rPr lang="en-US" sz="1400" dirty="0">
-                <a:solidFill>
-                  <a:srgbClr val="FFFFFF"/>
-                </a:solidFill>
-                <a:latin typeface="Calibri" pitchFamily="34" charset="0"/>
-                <a:ea typeface="Calibri" pitchFamily="34" charset="-122"/>
-                <a:cs typeface="Calibri" pitchFamily="34" charset="-120"/>
-              </a:rPr>
-              <a:t>Administración</a:t>
+              <a:t>EP06  Administración</a:t>
             </a:r>
             <a:endParaRPr lang="en-US" sz="1400" dirty="0"/>
           </a:p>
@@ -3951,6 +3638,13 @@
             <a:prstDash val="solid"/>
           </a:ln>
         </p:spPr>
+        <p:txBody>
+          <a:bodyPr/>
+          <a:lstStyle/>
+          <a:p>
+            <a:endParaRPr lang="es-ES"/>
+          </a:p>
+        </p:txBody>
       </p:sp>
       <p:sp>
         <p:nvSpPr>
@@ -3973,11 +3667,11 @@
           <a:bodyPr wrap="square" lIns="0" tIns="0" rIns="0" bIns="0" rtlCol="0" anchor="ctr"/>
           <a:lstStyle/>
           <a:p>
-            <a:pPr indent="0" marL="0">
-              <a:buNone/>
-            </a:pPr>
-            <a:r>
-              <a:rPr lang="en-US" sz="1300" b="1" dirty="0">
+            <a:pPr marL="0" indent="0">
+              <a:buNone/>
+            </a:pPr>
+            <a:r>
+              <a:rPr lang="en-US" sz="1300" b="1">
                 <a:solidFill>
                   <a:srgbClr val="B07A12"/>
                 </a:solidFill>
@@ -3985,21 +3679,7 @@
                 <a:ea typeface="Calibri" pitchFamily="34" charset="-122"/>
                 <a:cs typeface="Calibri" pitchFamily="34" charset="-120"/>
               </a:rPr>
-              <a:t>HU11 </a:t>
-            </a:r>
-            <a:pPr indent="0" marL="0">
-              <a:buNone/>
-            </a:pPr>
-            <a:r>
-              <a:rPr lang="en-US" sz="1300" dirty="0">
-                <a:solidFill>
-                  <a:srgbClr val="0F1B2D"/>
-                </a:solidFill>
-                <a:latin typeface="Calibri" pitchFamily="34" charset="0"/>
-                <a:ea typeface="Calibri" pitchFamily="34" charset="-122"/>
-                <a:cs typeface="Calibri" pitchFamily="34" charset="-120"/>
-              </a:rPr>
-              <a:t>Ajustar el umbral de confianza de YOLOv4</a:t>
+              <a:t>HU11 Ajustar umbrales de confianza e IoU de YOLOv8</a:t>
             </a:r>
             <a:endParaRPr lang="en-US" sz="1300" dirty="0"/>
           </a:p>
@@ -4031,6 +3711,13 @@
             <a:prstDash val="solid"/>
           </a:ln>
         </p:spPr>
+        <p:txBody>
+          <a:bodyPr/>
+          <a:lstStyle/>
+          <a:p>
+            <a:endParaRPr lang="es-ES"/>
+          </a:p>
+        </p:txBody>
       </p:sp>
       <p:sp>
         <p:nvSpPr>
@@ -4053,11 +3740,11 @@
           <a:bodyPr wrap="square" lIns="0" tIns="0" rIns="0" bIns="0" rtlCol="0" anchor="ctr"/>
           <a:lstStyle/>
           <a:p>
-            <a:pPr indent="0" marL="0">
-              <a:buNone/>
-            </a:pPr>
-            <a:r>
-              <a:rPr lang="en-US" sz="1300" b="1" dirty="0">
+            <a:pPr marL="0" indent="0">
+              <a:buNone/>
+            </a:pPr>
+            <a:r>
+              <a:rPr lang="es-ES" sz="1300" b="1">
                 <a:solidFill>
                   <a:srgbClr val="B07A12"/>
                 </a:solidFill>
@@ -4065,21 +3752,7 @@
                 <a:ea typeface="Calibri" pitchFamily="34" charset="-122"/>
                 <a:cs typeface="Calibri" pitchFamily="34" charset="-120"/>
               </a:rPr>
-              <a:t>HU12 </a:t>
-            </a:r>
-            <a:pPr indent="0" marL="0">
-              <a:buNone/>
-            </a:pPr>
-            <a:r>
-              <a:rPr lang="en-US" sz="1300" dirty="0">
-                <a:solidFill>
-                  <a:srgbClr val="0F1B2D"/>
-                </a:solidFill>
-                <a:latin typeface="Calibri" pitchFamily="34" charset="0"/>
-                <a:ea typeface="Calibri" pitchFamily="34" charset="-122"/>
-                <a:cs typeface="Calibri" pitchFamily="34" charset="-120"/>
-              </a:rPr>
-              <a:t>Ver el log de tiempos de procesamiento</a:t>
+              <a:t>HU12 Ver el log de tiempos de procesamiento</a:t>
             </a:r>
             <a:endParaRPr lang="en-US" sz="1300" dirty="0"/>
           </a:p>
@@ -4106,11 +3779,11 @@
           <a:bodyPr wrap="square" lIns="0" tIns="0" rIns="0" bIns="0" rtlCol="0" anchor="ctr"/>
           <a:lstStyle/>
           <a:p>
-            <a:pPr indent="0" marL="0">
-              <a:buNone/>
-            </a:pPr>
-            <a:r>
-              <a:rPr lang="en-US" sz="1300" b="1" dirty="0">
+            <a:pPr marL="0" indent="0">
+              <a:buNone/>
+            </a:pPr>
+            <a:r>
+              <a:rPr lang="es-ES" sz="1300" b="1">
                 <a:solidFill>
                   <a:srgbClr val="5B6B82"/>
                 </a:solidFill>
@@ -4118,21 +3791,7 @@
                 <a:ea typeface="Calibri" pitchFamily="34" charset="-122"/>
                 <a:cs typeface="Calibri" pitchFamily="34" charset="-120"/>
               </a:rPr>
-              <a:t>Formato: </a:t>
-            </a:r>
-            <a:pPr indent="0" marL="0">
-              <a:buNone/>
-            </a:pPr>
-            <a:r>
-              <a:rPr lang="en-US" sz="1300" dirty="0">
-                <a:solidFill>
-                  <a:srgbClr val="5B6B82"/>
-                </a:solidFill>
-                <a:latin typeface="Calibri" pitchFamily="34" charset="0"/>
-                <a:ea typeface="Calibri" pitchFamily="34" charset="-122"/>
-                <a:cs typeface="Calibri" pitchFamily="34" charset="-120"/>
-              </a:rPr>
-              <a:t>«Como [rol], quiero [funcionalidad], para [beneficio]». Son 12 historias iniciales; se priorizan en el Product Backlog y se reparten entre los 4 sprints.</a:t>
+              <a:t>Formato: «Como [rol], quiero [funcionalidad], para [beneficio]». Son 12 historias iniciales; se priorizan en el Product Backlog y se reparten entre los 4 sprints.</a:t>
             </a:r>
             <a:endParaRPr lang="en-US" sz="1300" dirty="0"/>
           </a:p>
@@ -4140,7 +3799,7 @@
       </p:sp>
       <p:sp>
         <p:nvSpPr>
-          <p:cNvPr id="25" name="Slide Number Placeholder 0"/>
+          <p:cNvPr id="40" name="Slide Number Placeholder 0"/>
           <p:cNvSpPr>
             <a:spLocks noGrp="1"/>
           </p:cNvSpPr>
@@ -4158,7 +3817,7 @@
           </a:prstGeom>
           <a:extLst>
             <a:ext uri="{C572A759-6A51-4108-AA02-DFA0A04FC94B}">
-              <ma14:wrappingTextBoxFlag xmlns:ma14="http://schemas.microsoft.com/office/mac/drawingml/2011/main" val="0"/>
+              <ma14:wrappingTextBoxFlag xmlns:ma14="http://schemas.microsoft.com/office/mac/drawingml/2011/main" xmlns="" val="0"/>
             </a:ext>
           </a:extLst>
         </p:spPr>
@@ -4178,10 +3837,10 @@
           </a:lstStyle>
           <a:p>
             <a:pPr algn="r"/>
-            <a:fld id="{F7021451-1387-4CA6-816F-3879F97B5CBC}" type="slidenum">
-              <a:rPr b="0" lang="en-US"/>
+            <a:r>
+              <a:rPr lang="en-US" b="0"/>
               <a:t>10</a:t>
-            </a:fld>
+            </a:r>
             <a:endParaRPr lang="en-US"/>
           </a:p>
         </p:txBody>
@@ -4214,9 +3873,11 @@
       <p:sp>
         <p:nvSpPr>
           <p:cNvPr id="2" name="Text 0"/>
-          <p:cNvSpPr/>
+          <p:cNvSpPr>
+            <a:spLocks noGrp="1"/>
+          </p:cNvSpPr>
           <p:nvPr>
-            <p:ph idx="100" type="title" hasCustomPrompt="1"/>
+            <p:ph type="title" idx="100" hasCustomPrompt="1"/>
           </p:nvPr>
         </p:nvSpPr>
         <p:spPr>
@@ -4234,11 +3895,11 @@
           <a:bodyPr wrap="square" lIns="0" tIns="0" rIns="0" bIns="0" rtlCol="0" anchor="ctr"/>
           <a:lstStyle/>
           <a:p>
-            <a:pPr algn="l" indent="0" marL="0">
-              <a:buNone/>
-            </a:pPr>
-            <a:r>
-              <a:rPr lang="en-US" sz="3200" b="1" dirty="0">
+            <a:pPr marL="0" indent="0" algn="l">
+              <a:buNone/>
+            </a:pPr>
+            <a:r>
+              <a:rPr lang="es-ES" sz="3200" b="1">
                 <a:solidFill>
                   <a:srgbClr val="0F1B2D"/>
                 </a:solidFill>
@@ -4273,11 +3934,11 @@
           <a:bodyPr wrap="square" lIns="0" tIns="0" rIns="0" bIns="0" rtlCol="0" anchor="ctr"/>
           <a:lstStyle/>
           <a:p>
-            <a:pPr indent="0" marL="0">
-              <a:buNone/>
-            </a:pPr>
-            <a:r>
-              <a:rPr lang="en-US" sz="6000" b="1" dirty="0">
+            <a:pPr marL="0" indent="0">
+              <a:buNone/>
+            </a:pPr>
+            <a:r>
+              <a:rPr lang="en-US" sz="6000" b="1">
                 <a:solidFill>
                   <a:srgbClr val="12233F"/>
                 </a:solidFill>
@@ -4312,11 +3973,11 @@
           <a:bodyPr wrap="square" lIns="0" tIns="0" rIns="0" bIns="0" rtlCol="0" anchor="ctr"/>
           <a:lstStyle/>
           <a:p>
-            <a:pPr indent="0" marL="0">
-              <a:buNone/>
-            </a:pPr>
-            <a:r>
-              <a:rPr lang="en-US" sz="1400" dirty="0">
+            <a:pPr marL="0" indent="0">
+              <a:buNone/>
+            </a:pPr>
+            <a:r>
+              <a:rPr lang="es-ES" sz="1400">
                 <a:solidFill>
                   <a:srgbClr val="5B6B82"/>
                 </a:solidFill>
@@ -4351,11 +4012,11 @@
           <a:bodyPr wrap="square" lIns="0" tIns="0" rIns="0" bIns="0" rtlCol="0" anchor="ctr"/>
           <a:lstStyle/>
           <a:p>
-            <a:pPr indent="0" marL="0">
-              <a:buNone/>
-            </a:pPr>
-            <a:r>
-              <a:rPr lang="en-US" sz="2200" b="1" dirty="0">
+            <a:pPr marL="0" indent="0">
+              <a:buNone/>
+            </a:pPr>
+            <a:r>
+              <a:rPr lang="en-US" sz="2200" b="1">
                 <a:solidFill>
                   <a:srgbClr val="F5A623"/>
                 </a:solidFill>
@@ -4390,11 +4051,11 @@
           <a:bodyPr wrap="square" lIns="0" tIns="0" rIns="0" bIns="0" rtlCol="0" anchor="ctr"/>
           <a:lstStyle/>
           <a:p>
-            <a:pPr indent="0" marL="0">
-              <a:buNone/>
-            </a:pPr>
-            <a:r>
-              <a:rPr lang="en-US" sz="1400" dirty="0">
+            <a:pPr marL="0" indent="0">
+              <a:buNone/>
+            </a:pPr>
+            <a:r>
+              <a:rPr lang="en-US" sz="1400">
                 <a:solidFill>
                   <a:srgbClr val="0F1B2D"/>
                 </a:solidFill>
@@ -4429,11 +4090,11 @@
           <a:bodyPr wrap="square" lIns="0" tIns="0" rIns="0" bIns="0" rtlCol="0" anchor="ctr"/>
           <a:lstStyle/>
           <a:p>
-            <a:pPr indent="0" marL="0">
-              <a:buNone/>
-            </a:pPr>
-            <a:r>
-              <a:rPr lang="en-US" sz="2200" b="1" dirty="0">
+            <a:pPr marL="0" indent="0">
+              <a:buNone/>
+            </a:pPr>
+            <a:r>
+              <a:rPr lang="en-US" sz="2200" b="1">
                 <a:solidFill>
                   <a:srgbClr val="0F9D8A"/>
                 </a:solidFill>
@@ -4468,11 +4129,11 @@
           <a:bodyPr wrap="square" lIns="0" tIns="0" rIns="0" bIns="0" rtlCol="0" anchor="ctr"/>
           <a:lstStyle/>
           <a:p>
-            <a:pPr indent="0" marL="0">
-              <a:buNone/>
-            </a:pPr>
-            <a:r>
-              <a:rPr lang="en-US" sz="1400" dirty="0">
+            <a:pPr marL="0" indent="0">
+              <a:buNone/>
+            </a:pPr>
+            <a:r>
+              <a:rPr lang="es-ES" sz="1400">
                 <a:solidFill>
                   <a:srgbClr val="0F1B2D"/>
                 </a:solidFill>
@@ -4507,11 +4168,11 @@
           <a:bodyPr wrap="square" lIns="0" tIns="0" rIns="0" bIns="0" rtlCol="0" anchor="ctr"/>
           <a:lstStyle/>
           <a:p>
-            <a:pPr indent="0" marL="0">
-              <a:buNone/>
-            </a:pPr>
-            <a:r>
-              <a:rPr lang="en-US" sz="2200" b="1" dirty="0">
+            <a:pPr marL="0" indent="0">
+              <a:buNone/>
+            </a:pPr>
+            <a:r>
+              <a:rPr lang="en-US" sz="2200" b="1">
                 <a:solidFill>
                   <a:srgbClr val="5B4BDB"/>
                 </a:solidFill>
@@ -4546,11 +4207,11 @@
           <a:bodyPr wrap="square" lIns="0" tIns="0" rIns="0" bIns="0" rtlCol="0" anchor="ctr"/>
           <a:lstStyle/>
           <a:p>
-            <a:pPr indent="0" marL="0">
-              <a:buNone/>
-            </a:pPr>
-            <a:r>
-              <a:rPr lang="en-US" sz="1400" dirty="0">
+            <a:pPr marL="0" indent="0">
+              <a:buNone/>
+            </a:pPr>
+            <a:r>
+              <a:rPr lang="en-US" sz="1400">
                 <a:solidFill>
                   <a:srgbClr val="0F1B2D"/>
                 </a:solidFill>
@@ -4590,13 +4251,20 @@
             <a:prstDash val="solid"/>
           </a:ln>
           <a:effectLst>
-            <a:outerShdw sx="100000" sy="100000" kx="0" ky="0" algn="bl" rotWithShape="0" blurRad="101600" dist="25400" dir="5400000">
+            <a:outerShdw blurRad="101600" dist="25400" dir="5400000" algn="bl" rotWithShape="0">
               <a:srgbClr val="0F1B2D">
                 <a:alpha val="8000"/>
               </a:srgbClr>
             </a:outerShdw>
           </a:effectLst>
         </p:spPr>
+        <p:txBody>
+          <a:bodyPr/>
+          <a:lstStyle/>
+          <a:p>
+            <a:endParaRPr lang="es-ES"/>
+          </a:p>
+        </p:txBody>
       </p:sp>
       <p:sp>
         <p:nvSpPr>
@@ -4619,11 +4287,11 @@
           <a:bodyPr wrap="square" lIns="0" tIns="0" rIns="0" bIns="0" rtlCol="0" anchor="ctr"/>
           <a:lstStyle/>
           <a:p>
-            <a:pPr indent="0" marL="0">
-              <a:buNone/>
-            </a:pPr>
-            <a:r>
-              <a:rPr lang="en-US" sz="2000" b="1" dirty="0">
+            <a:pPr marL="0" indent="0">
+              <a:buNone/>
+            </a:pPr>
+            <a:r>
+              <a:rPr lang="en-US" sz="2000" b="1">
                 <a:solidFill>
                   <a:srgbClr val="0F1B2D"/>
                 </a:solidFill>
@@ -4661,17 +4329,24 @@
             <a:prstDash val="solid"/>
           </a:ln>
         </p:spPr>
+        <p:txBody>
+          <a:bodyPr/>
+          <a:lstStyle/>
+          <a:p>
+            <a:endParaRPr lang="es-ES"/>
+          </a:p>
+        </p:txBody>
       </p:sp>
       <p:pic>
         <p:nvPicPr>
-          <p:cNvPr id="14" name="Image 0" descr="preencoded.png">    </p:cNvPr>
+          <p:cNvPr id="14" name="Image 0" descr="preencoded.png"/>
           <p:cNvPicPr>
             <a:picLocks noChangeAspect="1"/>
           </p:cNvPicPr>
           <p:nvPr/>
         </p:nvPicPr>
         <p:blipFill>
-          <a:blip r:embed="rId1"/>
+          <a:blip r:embed="rId3"/>
           <a:stretch>
             <a:fillRect/>
           </a:stretch>
@@ -4707,11 +4382,11 @@
           <a:bodyPr wrap="square" lIns="0" tIns="0" rIns="0" bIns="0" rtlCol="0" anchor="ctr"/>
           <a:lstStyle/>
           <a:p>
-            <a:pPr indent="0" marL="0">
-              <a:buNone/>
-            </a:pPr>
-            <a:r>
-              <a:rPr lang="en-US" sz="1400" dirty="0">
+            <a:pPr marL="0" indent="0">
+              <a:buNone/>
+            </a:pPr>
+            <a:r>
+              <a:rPr lang="en-US" sz="1400">
                 <a:solidFill>
                   <a:srgbClr val="0F1B2D"/>
                 </a:solidFill>
@@ -4749,17 +4424,24 @@
             <a:prstDash val="solid"/>
           </a:ln>
         </p:spPr>
+        <p:txBody>
+          <a:bodyPr/>
+          <a:lstStyle/>
+          <a:p>
+            <a:endParaRPr lang="es-ES"/>
+          </a:p>
+        </p:txBody>
       </p:sp>
       <p:pic>
         <p:nvPicPr>
-          <p:cNvPr id="17" name="Image 1" descr="preencoded.png">    </p:cNvPr>
+          <p:cNvPr id="17" name="Image 1" descr="preencoded.png"/>
           <p:cNvPicPr>
             <a:picLocks noChangeAspect="1"/>
           </p:cNvPicPr>
           <p:nvPr/>
         </p:nvPicPr>
         <p:blipFill>
-          <a:blip r:embed="rId2"/>
+          <a:blip r:embed="rId4"/>
           <a:stretch>
             <a:fillRect/>
           </a:stretch>
@@ -4795,11 +4477,11 @@
           <a:bodyPr wrap="square" lIns="0" tIns="0" rIns="0" bIns="0" rtlCol="0" anchor="ctr"/>
           <a:lstStyle/>
           <a:p>
-            <a:pPr indent="0" marL="0">
-              <a:buNone/>
-            </a:pPr>
-            <a:r>
-              <a:rPr lang="en-US" sz="1400" dirty="0">
+            <a:pPr marL="0" indent="0">
+              <a:buNone/>
+            </a:pPr>
+            <a:r>
+              <a:rPr lang="es-ES" sz="1400">
                 <a:solidFill>
                   <a:srgbClr val="0F1B2D"/>
                 </a:solidFill>
@@ -4837,17 +4519,24 @@
             <a:prstDash val="solid"/>
           </a:ln>
         </p:spPr>
+        <p:txBody>
+          <a:bodyPr/>
+          <a:lstStyle/>
+          <a:p>
+            <a:endParaRPr lang="es-ES"/>
+          </a:p>
+        </p:txBody>
       </p:sp>
       <p:pic>
         <p:nvPicPr>
-          <p:cNvPr id="20" name="Image 2" descr="preencoded.png">    </p:cNvPr>
+          <p:cNvPr id="20" name="Image 2" descr="preencoded.png"/>
           <p:cNvPicPr>
             <a:picLocks noChangeAspect="1"/>
           </p:cNvPicPr>
           <p:nvPr/>
         </p:nvPicPr>
         <p:blipFill>
-          <a:blip r:embed="rId3"/>
+          <a:blip r:embed="rId5"/>
           <a:stretch>
             <a:fillRect/>
           </a:stretch>
@@ -4883,11 +4572,11 @@
           <a:bodyPr wrap="square" lIns="0" tIns="0" rIns="0" bIns="0" rtlCol="0" anchor="ctr"/>
           <a:lstStyle/>
           <a:p>
-            <a:pPr indent="0" marL="0">
-              <a:buNone/>
-            </a:pPr>
-            <a:r>
-              <a:rPr lang="en-US" sz="1400" dirty="0">
+            <a:pPr marL="0" indent="0">
+              <a:buNone/>
+            </a:pPr>
+            <a:r>
+              <a:rPr lang="es-ES" sz="1400">
                 <a:solidFill>
                   <a:srgbClr val="0F1B2D"/>
                 </a:solidFill>
@@ -4925,17 +4614,24 @@
             <a:prstDash val="solid"/>
           </a:ln>
         </p:spPr>
+        <p:txBody>
+          <a:bodyPr/>
+          <a:lstStyle/>
+          <a:p>
+            <a:endParaRPr lang="es-ES"/>
+          </a:p>
+        </p:txBody>
       </p:sp>
       <p:pic>
         <p:nvPicPr>
-          <p:cNvPr id="23" name="Image 3" descr="preencoded.png">    </p:cNvPr>
+          <p:cNvPr id="23" name="Image 3" descr="preencoded.png"/>
           <p:cNvPicPr>
             <a:picLocks noChangeAspect="1"/>
           </p:cNvPicPr>
           <p:nvPr/>
         </p:nvPicPr>
         <p:blipFill>
-          <a:blip r:embed="rId4"/>
+          <a:blip r:embed="rId6"/>
           <a:stretch>
             <a:fillRect/>
           </a:stretch>
@@ -4971,11 +4667,11 @@
           <a:bodyPr wrap="square" lIns="0" tIns="0" rIns="0" bIns="0" rtlCol="0" anchor="ctr"/>
           <a:lstStyle/>
           <a:p>
-            <a:pPr indent="0" marL="0">
-              <a:buNone/>
-            </a:pPr>
-            <a:r>
-              <a:rPr lang="en-US" sz="1400" dirty="0">
+            <a:pPr marL="0" indent="0">
+              <a:buNone/>
+            </a:pPr>
+            <a:r>
+              <a:rPr lang="es-ES" sz="1400">
                 <a:solidFill>
                   <a:srgbClr val="0F1B2D"/>
                 </a:solidFill>
@@ -5009,7 +4705,7 @@
           </a:prstGeom>
           <a:extLst>
             <a:ext uri="{C572A759-6A51-4108-AA02-DFA0A04FC94B}">
-              <ma14:wrappingTextBoxFlag xmlns:ma14="http://schemas.microsoft.com/office/mac/drawingml/2011/main" val="0"/>
+              <ma14:wrappingTextBoxFlag xmlns:ma14="http://schemas.microsoft.com/office/mac/drawingml/2011/main" xmlns="" val="0"/>
             </a:ext>
           </a:extLst>
         </p:spPr>
@@ -5029,10 +4725,10 @@
           </a:lstStyle>
           <a:p>
             <a:pPr algn="r"/>
-            <a:fld id="{F7021451-1387-4CA6-816F-3879F97B5CBC}" type="slidenum">
-              <a:rPr b="0" lang="en-US"/>
+            <a:r>
+              <a:rPr lang="en-US" b="0"/>
               <a:t>11</a:t>
-            </a:fld>
+            </a:r>
             <a:endParaRPr lang="en-US"/>
           </a:p>
         </p:txBody>
@@ -5086,6 +4782,13 @@
             <a:prstDash val="solid"/>
           </a:ln>
         </p:spPr>
+        <p:txBody>
+          <a:bodyPr/>
+          <a:lstStyle/>
+          <a:p>
+            <a:endParaRPr lang="es-ES"/>
+          </a:p>
+        </p:txBody>
       </p:sp>
       <p:sp>
         <p:nvSpPr>
@@ -5108,11 +4811,11 @@
           <a:bodyPr wrap="square" lIns="0" tIns="0" rIns="0" bIns="0" rtlCol="0" anchor="ctr"/>
           <a:lstStyle/>
           <a:p>
-            <a:pPr indent="0" marL="0">
-              <a:buNone/>
-            </a:pPr>
-            <a:r>
-              <a:rPr lang="en-US" sz="3400" b="1" dirty="0">
+            <a:pPr marL="0" indent="0">
+              <a:buNone/>
+            </a:pPr>
+            <a:r>
+              <a:rPr lang="es-ES" sz="3400" b="1">
                 <a:solidFill>
                   <a:srgbClr val="FFFFFF"/>
                 </a:solidFill>
@@ -5150,17 +4853,24 @@
             <a:prstDash val="solid"/>
           </a:ln>
         </p:spPr>
+        <p:txBody>
+          <a:bodyPr/>
+          <a:lstStyle/>
+          <a:p>
+            <a:endParaRPr lang="es-ES"/>
+          </a:p>
+        </p:txBody>
       </p:sp>
       <p:pic>
         <p:nvPicPr>
-          <p:cNvPr id="5" name="Image 0" descr="preencoded.png">    </p:cNvPr>
+          <p:cNvPr id="5" name="Image 0" descr="preencoded.png"/>
           <p:cNvPicPr>
             <a:picLocks noChangeAspect="1"/>
           </p:cNvPicPr>
           <p:nvPr/>
         </p:nvPicPr>
         <p:blipFill>
-          <a:blip r:embed="rId1"/>
+          <a:blip r:embed="rId3"/>
           <a:stretch>
             <a:fillRect/>
           </a:stretch>
@@ -5196,11 +4906,11 @@
           <a:bodyPr wrap="square" lIns="0" tIns="0" rIns="0" bIns="0" rtlCol="0" anchor="ctr"/>
           <a:lstStyle/>
           <a:p>
-            <a:pPr indent="0" marL="0">
-              <a:buNone/>
-            </a:pPr>
-            <a:r>
-              <a:rPr lang="en-US" sz="1800" b="1" dirty="0">
+            <a:pPr marL="0" indent="0">
+              <a:buNone/>
+            </a:pPr>
+            <a:r>
+              <a:rPr lang="en-US" sz="1800" b="1">
                 <a:solidFill>
                   <a:srgbClr val="FFFFFF"/>
                 </a:solidFill>
@@ -5235,11 +4945,11 @@
           <a:bodyPr wrap="square" lIns="0" tIns="0" rIns="0" bIns="0" rtlCol="0" anchor="ctr"/>
           <a:lstStyle/>
           <a:p>
-            <a:pPr indent="0" marL="0">
-              <a:buNone/>
-            </a:pPr>
-            <a:r>
-              <a:rPr lang="en-US" sz="1400" dirty="0">
+            <a:pPr marL="0" indent="0">
+              <a:buNone/>
+            </a:pPr>
+            <a:r>
+              <a:rPr lang="en-US" sz="1400">
                 <a:solidFill>
                   <a:srgbClr val="C9D6EA"/>
                 </a:solidFill>
@@ -5277,17 +4987,24 @@
             <a:prstDash val="solid"/>
           </a:ln>
         </p:spPr>
+        <p:txBody>
+          <a:bodyPr/>
+          <a:lstStyle/>
+          <a:p>
+            <a:endParaRPr lang="es-ES"/>
+          </a:p>
+        </p:txBody>
       </p:sp>
       <p:pic>
         <p:nvPicPr>
-          <p:cNvPr id="9" name="Image 1" descr="preencoded.png">    </p:cNvPr>
+          <p:cNvPr id="9" name="Image 1" descr="preencoded.png"/>
           <p:cNvPicPr>
             <a:picLocks noChangeAspect="1"/>
           </p:cNvPicPr>
           <p:nvPr/>
         </p:nvPicPr>
         <p:blipFill>
-          <a:blip r:embed="rId2"/>
+          <a:blip r:embed="rId4"/>
           <a:stretch>
             <a:fillRect/>
           </a:stretch>
@@ -5323,11 +5040,11 @@
           <a:bodyPr wrap="square" lIns="0" tIns="0" rIns="0" bIns="0" rtlCol="0" anchor="ctr"/>
           <a:lstStyle/>
           <a:p>
-            <a:pPr indent="0" marL="0">
-              <a:buNone/>
-            </a:pPr>
-            <a:r>
-              <a:rPr lang="en-US" sz="1800" b="1" dirty="0">
+            <a:pPr marL="0" indent="0">
+              <a:buNone/>
+            </a:pPr>
+            <a:r>
+              <a:rPr lang="en-US" sz="1800" b="1">
                 <a:solidFill>
                   <a:srgbClr val="FFFFFF"/>
                 </a:solidFill>
@@ -5362,11 +5079,11 @@
           <a:bodyPr wrap="square" lIns="0" tIns="0" rIns="0" bIns="0" rtlCol="0" anchor="ctr"/>
           <a:lstStyle/>
           <a:p>
-            <a:pPr indent="0" marL="0">
-              <a:buNone/>
-            </a:pPr>
-            <a:r>
-              <a:rPr lang="en-US" sz="1400" dirty="0">
+            <a:pPr marL="0" indent="0">
+              <a:buNone/>
+            </a:pPr>
+            <a:r>
+              <a:rPr lang="en-US" sz="1400">
                 <a:solidFill>
                   <a:srgbClr val="C9D6EA"/>
                 </a:solidFill>
@@ -5404,17 +5121,24 @@
             <a:prstDash val="solid"/>
           </a:ln>
         </p:spPr>
+        <p:txBody>
+          <a:bodyPr/>
+          <a:lstStyle/>
+          <a:p>
+            <a:endParaRPr lang="es-ES"/>
+          </a:p>
+        </p:txBody>
       </p:sp>
       <p:pic>
         <p:nvPicPr>
-          <p:cNvPr id="13" name="Image 2" descr="preencoded.png">    </p:cNvPr>
+          <p:cNvPr id="13" name="Image 2" descr="preencoded.png"/>
           <p:cNvPicPr>
             <a:picLocks noChangeAspect="1"/>
           </p:cNvPicPr>
           <p:nvPr/>
         </p:nvPicPr>
         <p:blipFill>
-          <a:blip r:embed="rId3"/>
+          <a:blip r:embed="rId5"/>
           <a:stretch>
             <a:fillRect/>
           </a:stretch>
@@ -5450,11 +5174,11 @@
           <a:bodyPr wrap="square" lIns="0" tIns="0" rIns="0" bIns="0" rtlCol="0" anchor="ctr"/>
           <a:lstStyle/>
           <a:p>
-            <a:pPr indent="0" marL="0">
-              <a:buNone/>
-            </a:pPr>
-            <a:r>
-              <a:rPr lang="en-US" sz="1800" b="1" dirty="0">
+            <a:pPr marL="0" indent="0">
+              <a:buNone/>
+            </a:pPr>
+            <a:r>
+              <a:rPr lang="en-US" sz="1800" b="1">
                 <a:solidFill>
                   <a:srgbClr val="FFFFFF"/>
                 </a:solidFill>
@@ -5489,11 +5213,11 @@
           <a:bodyPr wrap="square" lIns="0" tIns="0" rIns="0" bIns="0" rtlCol="0" anchor="ctr"/>
           <a:lstStyle/>
           <a:p>
-            <a:pPr indent="0" marL="0">
-              <a:buNone/>
-            </a:pPr>
-            <a:r>
-              <a:rPr lang="en-US" sz="1400" dirty="0">
+            <a:pPr marL="0" indent="0">
+              <a:buNone/>
+            </a:pPr>
+            <a:r>
+              <a:rPr lang="en-US" sz="1400">
                 <a:solidFill>
                   <a:srgbClr val="C9D6EA"/>
                 </a:solidFill>
@@ -5531,17 +5255,24 @@
             <a:prstDash val="solid"/>
           </a:ln>
         </p:spPr>
+        <p:txBody>
+          <a:bodyPr/>
+          <a:lstStyle/>
+          <a:p>
+            <a:endParaRPr lang="es-ES"/>
+          </a:p>
+        </p:txBody>
       </p:sp>
       <p:pic>
         <p:nvPicPr>
-          <p:cNvPr id="17" name="Image 3" descr="preencoded.png">    </p:cNvPr>
+          <p:cNvPr id="17" name="Image 3" descr="preencoded.png"/>
           <p:cNvPicPr>
             <a:picLocks noChangeAspect="1"/>
           </p:cNvPicPr>
           <p:nvPr/>
         </p:nvPicPr>
         <p:blipFill>
-          <a:blip r:embed="rId4"/>
+          <a:blip r:embed="rId6"/>
           <a:stretch>
             <a:fillRect/>
           </a:stretch>
@@ -5577,11 +5308,11 @@
           <a:bodyPr wrap="square" lIns="0" tIns="0" rIns="0" bIns="0" rtlCol="0" anchor="ctr"/>
           <a:lstStyle/>
           <a:p>
-            <a:pPr indent="0" marL="0">
-              <a:buNone/>
-            </a:pPr>
-            <a:r>
-              <a:rPr lang="en-US" sz="1800" b="1" dirty="0">
+            <a:pPr marL="0" indent="0">
+              <a:buNone/>
+            </a:pPr>
+            <a:r>
+              <a:rPr lang="en-US" sz="1800" b="1">
                 <a:solidFill>
                   <a:srgbClr val="FFFFFF"/>
                 </a:solidFill>
@@ -5616,11 +5347,11 @@
           <a:bodyPr wrap="square" lIns="0" tIns="0" rIns="0" bIns="0" rtlCol="0" anchor="ctr"/>
           <a:lstStyle/>
           <a:p>
-            <a:pPr indent="0" marL="0">
-              <a:buNone/>
-            </a:pPr>
-            <a:r>
-              <a:rPr lang="en-US" sz="1400" dirty="0">
+            <a:pPr marL="0" indent="0">
+              <a:buNone/>
+            </a:pPr>
+            <a:r>
+              <a:rPr lang="en-US" sz="1400">
                 <a:solidFill>
                   <a:srgbClr val="C9D6EA"/>
                 </a:solidFill>
@@ -5655,11 +5386,11 @@
           <a:bodyPr wrap="square" lIns="0" tIns="0" rIns="0" bIns="0" rtlCol="0" anchor="ctr"/>
           <a:lstStyle/>
           <a:p>
-            <a:pPr algn="r" indent="0" marL="0">
-              <a:buNone/>
-            </a:pPr>
-            <a:r>
-              <a:rPr lang="en-US" sz="5400" b="1" dirty="0">
+            <a:pPr marL="0" indent="0" algn="r">
+              <a:buNone/>
+            </a:pPr>
+            <a:r>
+              <a:rPr lang="en-US" sz="5400" b="1">
                 <a:solidFill>
                   <a:srgbClr val="F5A623"/>
                 </a:solidFill>
@@ -5694,11 +5425,11 @@
           <a:bodyPr wrap="square" lIns="0" tIns="0" rIns="0" bIns="0" rtlCol="0" anchor="ctr"/>
           <a:lstStyle/>
           <a:p>
-            <a:pPr algn="r" indent="0" marL="0">
-              <a:buNone/>
-            </a:pPr>
-            <a:r>
-              <a:rPr lang="en-US" sz="2400" dirty="0">
+            <a:pPr marL="0" indent="0" algn="r">
+              <a:buNone/>
+            </a:pPr>
+            <a:r>
+              <a:rPr lang="en-US" sz="2400">
                 <a:solidFill>
                   <a:srgbClr val="FFFFFF"/>
                 </a:solidFill>
@@ -5740,9 +5471,11 @@
       <p:sp>
         <p:nvSpPr>
           <p:cNvPr id="2" name="Text 0"/>
-          <p:cNvSpPr/>
+          <p:cNvSpPr>
+            <a:spLocks noGrp="1"/>
+          </p:cNvSpPr>
           <p:nvPr>
-            <p:ph idx="100" type="title" hasCustomPrompt="1"/>
+            <p:ph type="title" idx="100" hasCustomPrompt="1"/>
           </p:nvPr>
         </p:nvSpPr>
         <p:spPr>
@@ -5760,11 +5493,11 @@
           <a:bodyPr wrap="square" lIns="0" tIns="0" rIns="0" bIns="0" rtlCol="0" anchor="ctr"/>
           <a:lstStyle/>
           <a:p>
-            <a:pPr algn="l" indent="0" marL="0">
-              <a:buNone/>
-            </a:pPr>
-            <a:r>
-              <a:rPr lang="en-US" sz="3200" b="1" dirty="0">
+            <a:pPr marL="0" indent="0" algn="l">
+              <a:buNone/>
+            </a:pPr>
+            <a:r>
+              <a:rPr lang="es-ES" sz="3200" b="1">
                 <a:solidFill>
                   <a:srgbClr val="0F1B2D"/>
                 </a:solidFill>
@@ -5802,17 +5535,24 @@
             <a:prstDash val="solid"/>
           </a:ln>
         </p:spPr>
+        <p:txBody>
+          <a:bodyPr/>
+          <a:lstStyle/>
+          <a:p>
+            <a:endParaRPr lang="es-ES"/>
+          </a:p>
+        </p:txBody>
       </p:sp>
       <p:pic>
         <p:nvPicPr>
-          <p:cNvPr id="4" name="Image 0" descr="preencoded.png">    </p:cNvPr>
+          <p:cNvPr id="4" name="Image 0" descr="preencoded.png"/>
           <p:cNvPicPr>
             <a:picLocks noChangeAspect="1"/>
           </p:cNvPicPr>
           <p:nvPr/>
         </p:nvPicPr>
         <p:blipFill>
-          <a:blip r:embed="rId1"/>
+          <a:blip r:embed="rId3"/>
           <a:stretch>
             <a:fillRect/>
           </a:stretch>
@@ -5848,11 +5588,11 @@
           <a:bodyPr wrap="square" lIns="0" tIns="0" rIns="0" bIns="0" rtlCol="0" anchor="ctr"/>
           <a:lstStyle/>
           <a:p>
-            <a:pPr indent="0" marL="0">
-              <a:buNone/>
-            </a:pPr>
-            <a:r>
-              <a:rPr lang="en-US" sz="2000" b="1" dirty="0">
+            <a:pPr marL="0" indent="0">
+              <a:buNone/>
+            </a:pPr>
+            <a:r>
+              <a:rPr lang="en-US" sz="2000" b="1">
                 <a:solidFill>
                   <a:srgbClr val="0F1B2D"/>
                 </a:solidFill>
@@ -5887,11 +5627,11 @@
           <a:bodyPr wrap="square" lIns="0" tIns="0" rIns="0" bIns="0" rtlCol="0" anchor="ctr"/>
           <a:lstStyle/>
           <a:p>
-            <a:pPr indent="0" marL="0">
-              <a:buNone/>
-            </a:pPr>
-            <a:r>
-              <a:rPr lang="en-US" sz="1500" dirty="0">
+            <a:pPr marL="0" indent="0">
+              <a:buNone/>
+            </a:pPr>
+            <a:r>
+              <a:rPr lang="es-ES" sz="1500">
                 <a:solidFill>
                   <a:srgbClr val="5B6B82"/>
                 </a:solidFill>
@@ -5929,17 +5669,24 @@
             <a:prstDash val="solid"/>
           </a:ln>
         </p:spPr>
+        <p:txBody>
+          <a:bodyPr/>
+          <a:lstStyle/>
+          <a:p>
+            <a:endParaRPr lang="es-ES"/>
+          </a:p>
+        </p:txBody>
       </p:sp>
       <p:pic>
         <p:nvPicPr>
-          <p:cNvPr id="8" name="Image 1" descr="preencoded.png">    </p:cNvPr>
+          <p:cNvPr id="8" name="Image 1" descr="preencoded.png"/>
           <p:cNvPicPr>
             <a:picLocks noChangeAspect="1"/>
           </p:cNvPicPr>
           <p:nvPr/>
         </p:nvPicPr>
         <p:blipFill>
-          <a:blip r:embed="rId2"/>
+          <a:blip r:embed="rId4"/>
           <a:stretch>
             <a:fillRect/>
           </a:stretch>
@@ -5975,11 +5722,11 @@
           <a:bodyPr wrap="square" lIns="0" tIns="0" rIns="0" bIns="0" rtlCol="0" anchor="ctr"/>
           <a:lstStyle/>
           <a:p>
-            <a:pPr indent="0" marL="0">
-              <a:buNone/>
-            </a:pPr>
-            <a:r>
-              <a:rPr lang="en-US" sz="2000" b="1" dirty="0">
+            <a:pPr marL="0" indent="0">
+              <a:buNone/>
+            </a:pPr>
+            <a:r>
+              <a:rPr lang="es-ES" sz="2000" b="1">
                 <a:solidFill>
                   <a:srgbClr val="0F1B2D"/>
                 </a:solidFill>
@@ -6014,11 +5761,11 @@
           <a:bodyPr wrap="square" lIns="0" tIns="0" rIns="0" bIns="0" rtlCol="0" anchor="ctr"/>
           <a:lstStyle/>
           <a:p>
-            <a:pPr indent="0" marL="0">
-              <a:buNone/>
-            </a:pPr>
-            <a:r>
-              <a:rPr lang="en-US" sz="1500" dirty="0">
+            <a:pPr marL="0" indent="0">
+              <a:buNone/>
+            </a:pPr>
+            <a:r>
+              <a:rPr lang="es-ES" sz="1500">
                 <a:solidFill>
                   <a:srgbClr val="5B6B82"/>
                 </a:solidFill>
@@ -6056,17 +5803,24 @@
             <a:prstDash val="solid"/>
           </a:ln>
         </p:spPr>
+        <p:txBody>
+          <a:bodyPr/>
+          <a:lstStyle/>
+          <a:p>
+            <a:endParaRPr lang="es-ES"/>
+          </a:p>
+        </p:txBody>
       </p:sp>
       <p:pic>
         <p:nvPicPr>
-          <p:cNvPr id="12" name="Image 2" descr="preencoded.png">    </p:cNvPr>
+          <p:cNvPr id="12" name="Image 2" descr="preencoded.png"/>
           <p:cNvPicPr>
             <a:picLocks noChangeAspect="1"/>
           </p:cNvPicPr>
           <p:nvPr/>
         </p:nvPicPr>
         <p:blipFill>
-          <a:blip r:embed="rId3"/>
+          <a:blip r:embed="rId5"/>
           <a:stretch>
             <a:fillRect/>
           </a:stretch>
@@ -6102,11 +5856,11 @@
           <a:bodyPr wrap="square" lIns="0" tIns="0" rIns="0" bIns="0" rtlCol="0" anchor="ctr"/>
           <a:lstStyle/>
           <a:p>
-            <a:pPr indent="0" marL="0">
-              <a:buNone/>
-            </a:pPr>
-            <a:r>
-              <a:rPr lang="en-US" sz="2000" b="1" dirty="0">
+            <a:pPr marL="0" indent="0">
+              <a:buNone/>
+            </a:pPr>
+            <a:r>
+              <a:rPr lang="es-ES" sz="2000" b="1">
                 <a:solidFill>
                   <a:srgbClr val="0F1B2D"/>
                 </a:solidFill>
@@ -6141,11 +5895,11 @@
           <a:bodyPr wrap="square" lIns="0" tIns="0" rIns="0" bIns="0" rtlCol="0" anchor="ctr"/>
           <a:lstStyle/>
           <a:p>
-            <a:pPr indent="0" marL="0">
-              <a:buNone/>
-            </a:pPr>
-            <a:r>
-              <a:rPr lang="en-US" sz="1500" dirty="0">
+            <a:pPr marL="0" indent="0">
+              <a:buNone/>
+            </a:pPr>
+            <a:r>
+              <a:rPr lang="es-ES" sz="1500">
                 <a:solidFill>
                   <a:srgbClr val="5B6B82"/>
                 </a:solidFill>
@@ -6185,6 +5939,13 @@
             <a:prstDash val="solid"/>
           </a:ln>
         </p:spPr>
+        <p:txBody>
+          <a:bodyPr/>
+          <a:lstStyle/>
+          <a:p>
+            <a:endParaRPr lang="es-ES"/>
+          </a:p>
+        </p:txBody>
       </p:sp>
       <p:sp>
         <p:nvSpPr>
@@ -6207,11 +5968,11 @@
           <a:bodyPr wrap="square" lIns="0" tIns="0" rIns="0" bIns="0" rtlCol="0" anchor="ctr"/>
           <a:lstStyle/>
           <a:p>
-            <a:pPr indent="0" marL="0">
-              <a:buNone/>
-            </a:pPr>
-            <a:r>
-              <a:rPr lang="en-US" sz="7200" b="1" dirty="0">
+            <a:pPr marL="0" indent="0">
+              <a:buNone/>
+            </a:pPr>
+            <a:r>
+              <a:rPr lang="en-US" sz="7200" b="1">
                 <a:solidFill>
                   <a:srgbClr val="F5A623"/>
                 </a:solidFill>
@@ -6246,11 +6007,11 @@
           <a:bodyPr wrap="square" lIns="0" tIns="0" rIns="0" bIns="0" rtlCol="0" anchor="ctr"/>
           <a:lstStyle/>
           <a:p>
-            <a:pPr indent="0" marL="0">
-              <a:buNone/>
-            </a:pPr>
-            <a:r>
-              <a:rPr lang="en-US" sz="2400" b="1" dirty="0">
+            <a:pPr marL="0" indent="0">
+              <a:buNone/>
+            </a:pPr>
+            <a:r>
+              <a:rPr lang="es-ES" sz="2400" b="1">
                 <a:solidFill>
                   <a:srgbClr val="FFFFFF"/>
                 </a:solidFill>
@@ -6285,11 +6046,11 @@
           <a:bodyPr wrap="square" lIns="0" tIns="0" rIns="0" bIns="0" rtlCol="0" anchor="ctr"/>
           <a:lstStyle/>
           <a:p>
-            <a:pPr indent="0" marL="0">
-              <a:buNone/>
-            </a:pPr>
-            <a:r>
-              <a:rPr lang="en-US" sz="1400" dirty="0">
+            <a:pPr marL="0" indent="0">
+              <a:buNone/>
+            </a:pPr>
+            <a:r>
+              <a:rPr lang="es-ES" sz="1400">
                 <a:solidFill>
                   <a:srgbClr val="C9D6EA"/>
                 </a:solidFill>
@@ -6323,7 +6084,7 @@
           </a:prstGeom>
           <a:extLst>
             <a:ext uri="{C572A759-6A51-4108-AA02-DFA0A04FC94B}">
-              <ma14:wrappingTextBoxFlag xmlns:ma14="http://schemas.microsoft.com/office/mac/drawingml/2011/main" val="0"/>
+              <ma14:wrappingTextBoxFlag xmlns:ma14="http://schemas.microsoft.com/office/mac/drawingml/2011/main" xmlns="" val="0"/>
             </a:ext>
           </a:extLst>
         </p:spPr>
@@ -6343,10 +6104,10 @@
           </a:lstStyle>
           <a:p>
             <a:pPr algn="r"/>
-            <a:fld id="{F7021451-1387-4CA6-816F-3879F97B5CBC}" type="slidenum">
-              <a:rPr b="0" lang="en-US"/>
+            <a:r>
+              <a:rPr lang="en-US" b="0"/>
               <a:t>2</a:t>
-            </a:fld>
+            </a:r>
             <a:endParaRPr lang="en-US"/>
           </a:p>
         </p:txBody>
@@ -6379,9 +6140,11 @@
       <p:sp>
         <p:nvSpPr>
           <p:cNvPr id="2" name="Text 0"/>
-          <p:cNvSpPr/>
+          <p:cNvSpPr>
+            <a:spLocks noGrp="1"/>
+          </p:cNvSpPr>
           <p:nvPr>
-            <p:ph idx="100" type="title" hasCustomPrompt="1"/>
+            <p:ph type="title" idx="100" hasCustomPrompt="1"/>
           </p:nvPr>
         </p:nvSpPr>
         <p:spPr>
@@ -6399,11 +6162,11 @@
           <a:bodyPr wrap="square" lIns="0" tIns="0" rIns="0" bIns="0" rtlCol="0" anchor="ctr"/>
           <a:lstStyle/>
           <a:p>
-            <a:pPr algn="l" indent="0" marL="0">
-              <a:buNone/>
-            </a:pPr>
-            <a:r>
-              <a:rPr lang="en-US" sz="3200" b="1" dirty="0">
+            <a:pPr marL="0" indent="0" algn="l">
+              <a:buNone/>
+            </a:pPr>
+            <a:r>
+              <a:rPr lang="es-ES" sz="3200" b="1">
                 <a:solidFill>
                   <a:srgbClr val="0F1B2D"/>
                 </a:solidFill>
@@ -6443,13 +6206,20 @@
             <a:prstDash val="solid"/>
           </a:ln>
           <a:effectLst>
-            <a:outerShdw sx="100000" sy="100000" kx="0" ky="0" algn="bl" rotWithShape="0" blurRad="101600" dist="25400" dir="5400000">
+            <a:outerShdw blurRad="101600" dist="25400" dir="5400000" algn="bl" rotWithShape="0">
               <a:srgbClr val="0F1B2D">
                 <a:alpha val="8000"/>
               </a:srgbClr>
             </a:outerShdw>
           </a:effectLst>
         </p:spPr>
+        <p:txBody>
+          <a:bodyPr/>
+          <a:lstStyle/>
+          <a:p>
+            <a:endParaRPr lang="es-ES"/>
+          </a:p>
+        </p:txBody>
       </p:sp>
       <p:sp>
         <p:nvSpPr>
@@ -6475,17 +6245,24 @@
             <a:prstDash val="solid"/>
           </a:ln>
         </p:spPr>
+        <p:txBody>
+          <a:bodyPr/>
+          <a:lstStyle/>
+          <a:p>
+            <a:endParaRPr lang="es-ES"/>
+          </a:p>
+        </p:txBody>
       </p:sp>
       <p:pic>
         <p:nvPicPr>
-          <p:cNvPr id="5" name="Image 0" descr="preencoded.png">    </p:cNvPr>
+          <p:cNvPr id="5" name="Image 0" descr="preencoded.png"/>
           <p:cNvPicPr>
             <a:picLocks noChangeAspect="1"/>
           </p:cNvPicPr>
           <p:nvPr/>
         </p:nvPicPr>
         <p:blipFill>
-          <a:blip r:embed="rId1"/>
+          <a:blip r:embed="rId3"/>
           <a:stretch>
             <a:fillRect/>
           </a:stretch>
@@ -6521,11 +6298,11 @@
           <a:bodyPr wrap="square" lIns="0" tIns="0" rIns="0" bIns="0" rtlCol="0" anchor="ctr"/>
           <a:lstStyle/>
           <a:p>
-            <a:pPr indent="0" marL="0">
-              <a:buNone/>
-            </a:pPr>
-            <a:r>
-              <a:rPr lang="en-US" sz="2600" b="1" dirty="0">
+            <a:pPr marL="0" indent="0">
+              <a:buNone/>
+            </a:pPr>
+            <a:r>
+              <a:rPr lang="en-US" sz="2600" b="1">
                 <a:solidFill>
                   <a:srgbClr val="0F1B2D"/>
                 </a:solidFill>
@@ -6560,11 +6337,11 @@
           <a:bodyPr wrap="square" lIns="0" tIns="0" rIns="0" bIns="0" rtlCol="0" anchor="t"/>
           <a:lstStyle/>
           <a:p>
-            <a:pPr indent="0" marL="0">
-              <a:buNone/>
-            </a:pPr>
-            <a:r>
-              <a:rPr lang="en-US" sz="1600" dirty="0">
+            <a:pPr marL="0" indent="0">
+              <a:buNone/>
+            </a:pPr>
+            <a:r>
+              <a:rPr lang="es-ES" sz="1600">
                 <a:solidFill>
                   <a:srgbClr val="5B6B82"/>
                 </a:solidFill>
@@ -6572,7 +6349,7 @@
                 <a:ea typeface="Calibri" pitchFamily="34" charset="-122"/>
                 <a:cs typeface="Calibri" pitchFamily="34" charset="-120"/>
               </a:rPr>
-              <a:t>Reconoce la conducta, no solo el objeto: detección con YOLOv4 y análisis de la secuencia con ConvLSTM.</a:t>
+              <a:t>Reconoce la conducta, no solo el objeto: detección con YOLOv8 y análisis de la secuencia con ConvLSTM.</a:t>
             </a:r>
             <a:endParaRPr lang="en-US" sz="1600" dirty="0"/>
           </a:p>
@@ -6604,13 +6381,20 @@
             <a:prstDash val="solid"/>
           </a:ln>
           <a:effectLst>
-            <a:outerShdw sx="100000" sy="100000" kx="0" ky="0" algn="bl" rotWithShape="0" blurRad="101600" dist="25400" dir="5400000">
+            <a:outerShdw blurRad="101600" dist="25400" dir="5400000" algn="bl" rotWithShape="0">
               <a:srgbClr val="0F1B2D">
                 <a:alpha val="8000"/>
               </a:srgbClr>
             </a:outerShdw>
           </a:effectLst>
         </p:spPr>
+        <p:txBody>
+          <a:bodyPr/>
+          <a:lstStyle/>
+          <a:p>
+            <a:endParaRPr lang="es-ES"/>
+          </a:p>
+        </p:txBody>
       </p:sp>
       <p:sp>
         <p:nvSpPr>
@@ -6636,17 +6420,24 @@
             <a:prstDash val="solid"/>
           </a:ln>
         </p:spPr>
+        <p:txBody>
+          <a:bodyPr/>
+          <a:lstStyle/>
+          <a:p>
+            <a:endParaRPr lang="es-ES"/>
+          </a:p>
+        </p:txBody>
       </p:sp>
       <p:pic>
         <p:nvPicPr>
-          <p:cNvPr id="10" name="Image 1" descr="preencoded.png">    </p:cNvPr>
+          <p:cNvPr id="10" name="Image 1" descr="preencoded.png"/>
           <p:cNvPicPr>
             <a:picLocks noChangeAspect="1"/>
           </p:cNvPicPr>
           <p:nvPr/>
         </p:nvPicPr>
         <p:blipFill>
-          <a:blip r:embed="rId2"/>
+          <a:blip r:embed="rId4"/>
           <a:stretch>
             <a:fillRect/>
           </a:stretch>
@@ -6682,11 +6473,11 @@
           <a:bodyPr wrap="square" lIns="0" tIns="0" rIns="0" bIns="0" rtlCol="0" anchor="ctr"/>
           <a:lstStyle/>
           <a:p>
-            <a:pPr indent="0" marL="0">
-              <a:buNone/>
-            </a:pPr>
-            <a:r>
-              <a:rPr lang="en-US" sz="2600" b="1" dirty="0">
+            <a:pPr marL="0" indent="0">
+              <a:buNone/>
+            </a:pPr>
+            <a:r>
+              <a:rPr lang="en-US" sz="2600" b="1">
                 <a:solidFill>
                   <a:srgbClr val="0F1B2D"/>
                 </a:solidFill>
@@ -6721,11 +6512,11 @@
           <a:bodyPr wrap="square" lIns="0" tIns="0" rIns="0" bIns="0" rtlCol="0" anchor="t"/>
           <a:lstStyle/>
           <a:p>
-            <a:pPr indent="0" marL="0">
-              <a:buNone/>
-            </a:pPr>
-            <a:r>
-              <a:rPr lang="en-US" sz="1600" dirty="0">
+            <a:pPr marL="0" indent="0">
+              <a:buNone/>
+            </a:pPr>
+            <a:r>
+              <a:rPr lang="es-ES" sz="1600">
                 <a:solidFill>
                   <a:srgbClr val="5B6B82"/>
                 </a:solidFill>
@@ -6765,13 +6556,20 @@
             <a:prstDash val="solid"/>
           </a:ln>
           <a:effectLst>
-            <a:outerShdw sx="100000" sy="100000" kx="0" ky="0" algn="bl" rotWithShape="0" blurRad="101600" dist="25400" dir="5400000">
+            <a:outerShdw blurRad="101600" dist="25400" dir="5400000" algn="bl" rotWithShape="0">
               <a:srgbClr val="0F1B2D">
                 <a:alpha val="8000"/>
               </a:srgbClr>
             </a:outerShdw>
           </a:effectLst>
         </p:spPr>
+        <p:txBody>
+          <a:bodyPr/>
+          <a:lstStyle/>
+          <a:p>
+            <a:endParaRPr lang="es-ES"/>
+          </a:p>
+        </p:txBody>
       </p:sp>
       <p:sp>
         <p:nvSpPr>
@@ -6797,17 +6595,24 @@
             <a:prstDash val="solid"/>
           </a:ln>
         </p:spPr>
+        <p:txBody>
+          <a:bodyPr/>
+          <a:lstStyle/>
+          <a:p>
+            <a:endParaRPr lang="es-ES"/>
+          </a:p>
+        </p:txBody>
       </p:sp>
       <p:pic>
         <p:nvPicPr>
-          <p:cNvPr id="15" name="Image 2" descr="preencoded.png">    </p:cNvPr>
+          <p:cNvPr id="15" name="Image 2" descr="preencoded.png"/>
           <p:cNvPicPr>
             <a:picLocks noChangeAspect="1"/>
           </p:cNvPicPr>
           <p:nvPr/>
         </p:nvPicPr>
         <p:blipFill>
-          <a:blip r:embed="rId3"/>
+          <a:blip r:embed="rId5"/>
           <a:stretch>
             <a:fillRect/>
           </a:stretch>
@@ -6843,11 +6648,11 @@
           <a:bodyPr wrap="square" lIns="0" tIns="0" rIns="0" bIns="0" rtlCol="0" anchor="ctr"/>
           <a:lstStyle/>
           <a:p>
-            <a:pPr indent="0" marL="0">
-              <a:buNone/>
-            </a:pPr>
-            <a:r>
-              <a:rPr lang="en-US" sz="2600" b="1" dirty="0">
+            <a:pPr marL="0" indent="0">
+              <a:buNone/>
+            </a:pPr>
+            <a:r>
+              <a:rPr lang="en-US" sz="2600" b="1">
                 <a:solidFill>
                   <a:srgbClr val="0F1B2D"/>
                 </a:solidFill>
@@ -6882,11 +6687,11 @@
           <a:bodyPr wrap="square" lIns="0" tIns="0" rIns="0" bIns="0" rtlCol="0" anchor="t"/>
           <a:lstStyle/>
           <a:p>
-            <a:pPr indent="0" marL="0">
-              <a:buNone/>
-            </a:pPr>
-            <a:r>
-              <a:rPr lang="en-US" sz="1600" dirty="0">
+            <a:pPr marL="0" indent="0">
+              <a:buNone/>
+            </a:pPr>
+            <a:r>
+              <a:rPr lang="es-ES" sz="1600">
                 <a:solidFill>
                   <a:srgbClr val="5B6B82"/>
                 </a:solidFill>
@@ -6920,7 +6725,7 @@
           </a:prstGeom>
           <a:extLst>
             <a:ext uri="{C572A759-6A51-4108-AA02-DFA0A04FC94B}">
-              <ma14:wrappingTextBoxFlag xmlns:ma14="http://schemas.microsoft.com/office/mac/drawingml/2011/main" val="0"/>
+              <ma14:wrappingTextBoxFlag xmlns:ma14="http://schemas.microsoft.com/office/mac/drawingml/2011/main" xmlns="" val="0"/>
             </a:ext>
           </a:extLst>
         </p:spPr>
@@ -6940,10 +6745,10 @@
           </a:lstStyle>
           <a:p>
             <a:pPr algn="r"/>
-            <a:fld id="{F7021451-1387-4CA6-816F-3879F97B5CBC}" type="slidenum">
-              <a:rPr b="0" lang="en-US"/>
+            <a:r>
+              <a:rPr lang="en-US" b="0"/>
               <a:t>3</a:t>
-            </a:fld>
+            </a:r>
             <a:endParaRPr lang="en-US"/>
           </a:p>
         </p:txBody>
@@ -6976,9 +6781,11 @@
       <p:sp>
         <p:nvSpPr>
           <p:cNvPr id="2" name="Text 0"/>
-          <p:cNvSpPr/>
+          <p:cNvSpPr>
+            <a:spLocks noGrp="1"/>
+          </p:cNvSpPr>
           <p:nvPr>
-            <p:ph idx="100" type="title" hasCustomPrompt="1"/>
+            <p:ph type="title" idx="100" hasCustomPrompt="1"/>
           </p:nvPr>
         </p:nvSpPr>
         <p:spPr>
@@ -6996,11 +6803,11 @@
           <a:bodyPr wrap="square" lIns="0" tIns="0" rIns="0" bIns="0" rtlCol="0" anchor="ctr"/>
           <a:lstStyle/>
           <a:p>
-            <a:pPr algn="l" indent="0" marL="0">
-              <a:buNone/>
-            </a:pPr>
-            <a:r>
-              <a:rPr lang="en-US" sz="3200" b="1" dirty="0">
+            <a:pPr marL="0" indent="0" algn="l">
+              <a:buNone/>
+            </a:pPr>
+            <a:r>
+              <a:rPr lang="es-ES" sz="3200" b="1">
                 <a:solidFill>
                   <a:srgbClr val="0F1B2D"/>
                 </a:solidFill>
@@ -7040,13 +6847,20 @@
             <a:prstDash val="solid"/>
           </a:ln>
           <a:effectLst>
-            <a:outerShdw sx="100000" sy="100000" kx="0" ky="0" algn="bl" rotWithShape="0" blurRad="101600" dist="25400" dir="5400000">
+            <a:outerShdw blurRad="101600" dist="25400" dir="5400000" algn="bl" rotWithShape="0">
               <a:srgbClr val="0F1B2D">
                 <a:alpha val="8000"/>
               </a:srgbClr>
             </a:outerShdw>
           </a:effectLst>
         </p:spPr>
+        <p:txBody>
+          <a:bodyPr/>
+          <a:lstStyle/>
+          <a:p>
+            <a:endParaRPr lang="es-ES"/>
+          </a:p>
+        </p:txBody>
       </p:sp>
       <p:sp>
         <p:nvSpPr>
@@ -7069,11 +6883,11 @@
           <a:bodyPr wrap="square" lIns="0" tIns="0" rIns="0" bIns="0" rtlCol="0" anchor="ctr"/>
           <a:lstStyle/>
           <a:p>
-            <a:pPr indent="0" marL="0">
-              <a:buNone/>
-            </a:pPr>
-            <a:r>
-              <a:rPr lang="en-US" sz="1100" b="1" dirty="0">
+            <a:pPr marL="0" indent="0">
+              <a:buNone/>
+            </a:pPr>
+            <a:r>
+              <a:rPr lang="en-US" sz="1100" b="1">
                 <a:solidFill>
                   <a:srgbClr val="5B6B82"/>
                 </a:solidFill>
@@ -7111,17 +6925,24 @@
             <a:prstDash val="solid"/>
           </a:ln>
         </p:spPr>
+        <p:txBody>
+          <a:bodyPr/>
+          <a:lstStyle/>
+          <a:p>
+            <a:endParaRPr lang="es-ES"/>
+          </a:p>
+        </p:txBody>
       </p:sp>
       <p:pic>
         <p:nvPicPr>
-          <p:cNvPr id="6" name="Image 0" descr="preencoded.png">    </p:cNvPr>
+          <p:cNvPr id="6" name="Image 0" descr="preencoded.png"/>
           <p:cNvPicPr>
             <a:picLocks noChangeAspect="1"/>
           </p:cNvPicPr>
           <p:nvPr/>
         </p:nvPicPr>
         <p:blipFill>
-          <a:blip r:embed="rId1"/>
+          <a:blip r:embed="rId3"/>
           <a:stretch>
             <a:fillRect/>
           </a:stretch>
@@ -7157,11 +6978,11 @@
           <a:bodyPr wrap="square" lIns="0" tIns="0" rIns="0" bIns="0" rtlCol="0" anchor="t"/>
           <a:lstStyle/>
           <a:p>
-            <a:pPr algn="ctr" indent="0" marL="0">
-              <a:buNone/>
-            </a:pPr>
-            <a:r>
-              <a:rPr lang="en-US" sz="1400" b="1" dirty="0">
+            <a:pPr marL="0" indent="0" algn="ctr">
+              <a:buNone/>
+            </a:pPr>
+            <a:r>
+              <a:rPr lang="en-US" sz="1400" b="1">
                 <a:solidFill>
                   <a:srgbClr val="0F1B2D"/>
                 </a:solidFill>
@@ -7196,11 +7017,11 @@
           <a:bodyPr wrap="square" lIns="0" tIns="0" rIns="0" bIns="0" rtlCol="0" anchor="t"/>
           <a:lstStyle/>
           <a:p>
-            <a:pPr algn="ctr" indent="0" marL="0">
-              <a:buNone/>
-            </a:pPr>
-            <a:r>
-              <a:rPr lang="en-US" sz="1200" dirty="0">
+            <a:pPr marL="0" indent="0" algn="ctr">
+              <a:buNone/>
+            </a:pPr>
+            <a:r>
+              <a:rPr lang="es-ES" sz="1200">
                 <a:solidFill>
                   <a:srgbClr val="5B6B82"/>
                 </a:solidFill>
@@ -7240,6 +7061,13 @@
             <a:prstDash val="solid"/>
           </a:ln>
         </p:spPr>
+        <p:txBody>
+          <a:bodyPr/>
+          <a:lstStyle/>
+          <a:p>
+            <a:endParaRPr lang="es-ES"/>
+          </a:p>
+        </p:txBody>
       </p:sp>
       <p:sp>
         <p:nvSpPr>
@@ -7262,11 +7090,11 @@
           <a:bodyPr wrap="square" lIns="0" tIns="0" rIns="0" bIns="0" rtlCol="0" anchor="ctr"/>
           <a:lstStyle/>
           <a:p>
-            <a:pPr algn="ctr" indent="0" marL="0">
-              <a:buNone/>
-            </a:pPr>
-            <a:r>
-              <a:rPr lang="en-US" sz="1000" b="1" dirty="0">
+            <a:pPr marL="0" indent="0" algn="ctr">
+              <a:buNone/>
+            </a:pPr>
+            <a:r>
+              <a:rPr lang="en-US" sz="1000" b="1">
                 <a:solidFill>
                   <a:srgbClr val="12233F"/>
                 </a:solidFill>
@@ -7304,6 +7132,13 @@
             <a:prstDash val="solid"/>
           </a:ln>
         </p:spPr>
+        <p:txBody>
+          <a:bodyPr/>
+          <a:lstStyle/>
+          <a:p>
+            <a:endParaRPr lang="es-ES"/>
+          </a:p>
+        </p:txBody>
       </p:sp>
       <p:sp>
         <p:nvSpPr>
@@ -7331,13 +7166,20 @@
             <a:prstDash val="solid"/>
           </a:ln>
           <a:effectLst>
-            <a:outerShdw sx="100000" sy="100000" kx="0" ky="0" algn="bl" rotWithShape="0" blurRad="101600" dist="25400" dir="5400000">
+            <a:outerShdw blurRad="101600" dist="25400" dir="5400000" algn="bl" rotWithShape="0">
               <a:srgbClr val="0F1B2D">
                 <a:alpha val="8000"/>
               </a:srgbClr>
             </a:outerShdw>
           </a:effectLst>
         </p:spPr>
+        <p:txBody>
+          <a:bodyPr/>
+          <a:lstStyle/>
+          <a:p>
+            <a:endParaRPr lang="es-ES"/>
+          </a:p>
+        </p:txBody>
       </p:sp>
       <p:sp>
         <p:nvSpPr>
@@ -7360,11 +7202,11 @@
           <a:bodyPr wrap="square" lIns="0" tIns="0" rIns="0" bIns="0" rtlCol="0" anchor="ctr"/>
           <a:lstStyle/>
           <a:p>
-            <a:pPr indent="0" marL="0">
-              <a:buNone/>
-            </a:pPr>
-            <a:r>
-              <a:rPr lang="en-US" sz="1100" b="1" dirty="0">
+            <a:pPr marL="0" indent="0">
+              <a:buNone/>
+            </a:pPr>
+            <a:r>
+              <a:rPr lang="en-US" sz="1100" b="1">
                 <a:solidFill>
                   <a:srgbClr val="5B6B82"/>
                 </a:solidFill>
@@ -7402,17 +7244,24 @@
             <a:prstDash val="solid"/>
           </a:ln>
         </p:spPr>
+        <p:txBody>
+          <a:bodyPr/>
+          <a:lstStyle/>
+          <a:p>
+            <a:endParaRPr lang="es-ES"/>
+          </a:p>
+        </p:txBody>
       </p:sp>
       <p:pic>
         <p:nvPicPr>
-          <p:cNvPr id="15" name="Image 1" descr="preencoded.png">    </p:cNvPr>
+          <p:cNvPr id="15" name="Image 1" descr="preencoded.png"/>
           <p:cNvPicPr>
             <a:picLocks noChangeAspect="1"/>
           </p:cNvPicPr>
           <p:nvPr/>
         </p:nvPicPr>
         <p:blipFill>
-          <a:blip r:embed="rId2"/>
+          <a:blip r:embed="rId4"/>
           <a:stretch>
             <a:fillRect/>
           </a:stretch>
@@ -7448,11 +7297,11 @@
           <a:bodyPr wrap="square" lIns="0" tIns="0" rIns="0" bIns="0" rtlCol="0" anchor="t"/>
           <a:lstStyle/>
           <a:p>
-            <a:pPr algn="ctr" indent="0" marL="0">
-              <a:buNone/>
-            </a:pPr>
-            <a:r>
-              <a:rPr lang="en-US" sz="1400" b="1" dirty="0">
+            <a:pPr marL="0" indent="0" algn="ctr">
+              <a:buNone/>
+            </a:pPr>
+            <a:r>
+              <a:rPr lang="en-US" sz="1400" b="1">
                 <a:solidFill>
                   <a:srgbClr val="0F1B2D"/>
                 </a:solidFill>
@@ -7460,7 +7309,7 @@
                 <a:ea typeface="Calibri" pitchFamily="34" charset="-122"/>
                 <a:cs typeface="Calibri" pitchFamily="34" charset="-120"/>
               </a:rPr>
-              <a:t>Detección YOLOv4</a:t>
+              <a:t>Detección YOLOv8</a:t>
             </a:r>
             <a:endParaRPr lang="en-US" sz="1400" dirty="0"/>
           </a:p>
@@ -7487,11 +7336,11 @@
           <a:bodyPr wrap="square" lIns="0" tIns="0" rIns="0" bIns="0" rtlCol="0" anchor="t"/>
           <a:lstStyle/>
           <a:p>
-            <a:pPr algn="ctr" indent="0" marL="0">
-              <a:buNone/>
-            </a:pPr>
-            <a:r>
-              <a:rPr lang="en-US" sz="1200" dirty="0">
+            <a:pPr marL="0" indent="0" algn="ctr">
+              <a:buNone/>
+            </a:pPr>
+            <a:r>
+              <a:rPr lang="en-US" sz="1200">
                 <a:solidFill>
                   <a:srgbClr val="5B6B82"/>
                 </a:solidFill>
@@ -7531,6 +7380,13 @@
             <a:prstDash val="solid"/>
           </a:ln>
         </p:spPr>
+        <p:txBody>
+          <a:bodyPr/>
+          <a:lstStyle/>
+          <a:p>
+            <a:endParaRPr lang="es-ES"/>
+          </a:p>
+        </p:txBody>
       </p:sp>
       <p:sp>
         <p:nvSpPr>
@@ -7553,11 +7409,11 @@
           <a:bodyPr wrap="square" lIns="0" tIns="0" rIns="0" bIns="0" rtlCol="0" anchor="ctr"/>
           <a:lstStyle/>
           <a:p>
-            <a:pPr algn="ctr" indent="0" marL="0">
-              <a:buNone/>
-            </a:pPr>
-            <a:r>
-              <a:rPr lang="en-US" sz="1000" b="1" dirty="0">
+            <a:pPr marL="0" indent="0" algn="ctr">
+              <a:buNone/>
+            </a:pPr>
+            <a:r>
+              <a:rPr lang="en-US" sz="1000" b="1">
                 <a:solidFill>
                   <a:srgbClr val="12233F"/>
                 </a:solidFill>
@@ -7595,6 +7451,13 @@
             <a:prstDash val="solid"/>
           </a:ln>
         </p:spPr>
+        <p:txBody>
+          <a:bodyPr/>
+          <a:lstStyle/>
+          <a:p>
+            <a:endParaRPr lang="es-ES"/>
+          </a:p>
+        </p:txBody>
       </p:sp>
       <p:sp>
         <p:nvSpPr>
@@ -7622,13 +7485,20 @@
             <a:prstDash val="solid"/>
           </a:ln>
           <a:effectLst>
-            <a:outerShdw sx="100000" sy="100000" kx="0" ky="0" algn="bl" rotWithShape="0" blurRad="101600" dist="25400" dir="5400000">
+            <a:outerShdw blurRad="101600" dist="25400" dir="5400000" algn="bl" rotWithShape="0">
               <a:srgbClr val="0F1B2D">
                 <a:alpha val="8000"/>
               </a:srgbClr>
             </a:outerShdw>
           </a:effectLst>
         </p:spPr>
+        <p:txBody>
+          <a:bodyPr/>
+          <a:lstStyle/>
+          <a:p>
+            <a:endParaRPr lang="es-ES"/>
+          </a:p>
+        </p:txBody>
       </p:sp>
       <p:sp>
         <p:nvSpPr>
@@ -7651,11 +7521,11 @@
           <a:bodyPr wrap="square" lIns="0" tIns="0" rIns="0" bIns="0" rtlCol="0" anchor="ctr"/>
           <a:lstStyle/>
           <a:p>
-            <a:pPr indent="0" marL="0">
-              <a:buNone/>
-            </a:pPr>
-            <a:r>
-              <a:rPr lang="en-US" sz="1100" b="1" dirty="0">
+            <a:pPr marL="0" indent="0">
+              <a:buNone/>
+            </a:pPr>
+            <a:r>
+              <a:rPr lang="en-US" sz="1100" b="1">
                 <a:solidFill>
                   <a:srgbClr val="5B6B82"/>
                 </a:solidFill>
@@ -7693,17 +7563,24 @@
             <a:prstDash val="solid"/>
           </a:ln>
         </p:spPr>
+        <p:txBody>
+          <a:bodyPr/>
+          <a:lstStyle/>
+          <a:p>
+            <a:endParaRPr lang="es-ES"/>
+          </a:p>
+        </p:txBody>
       </p:sp>
       <p:pic>
         <p:nvPicPr>
-          <p:cNvPr id="24" name="Image 2" descr="preencoded.png">    </p:cNvPr>
+          <p:cNvPr id="24" name="Image 2" descr="preencoded.png"/>
           <p:cNvPicPr>
             <a:picLocks noChangeAspect="1"/>
           </p:cNvPicPr>
           <p:nvPr/>
         </p:nvPicPr>
         <p:blipFill>
-          <a:blip r:embed="rId3"/>
+          <a:blip r:embed="rId5"/>
           <a:stretch>
             <a:fillRect/>
           </a:stretch>
@@ -7739,11 +7616,11 @@
           <a:bodyPr wrap="square" lIns="0" tIns="0" rIns="0" bIns="0" rtlCol="0" anchor="t"/>
           <a:lstStyle/>
           <a:p>
-            <a:pPr algn="ctr" indent="0" marL="0">
-              <a:buNone/>
-            </a:pPr>
-            <a:r>
-              <a:rPr lang="en-US" sz="1400" b="1" dirty="0">
+            <a:pPr marL="0" indent="0" algn="ctr">
+              <a:buNone/>
+            </a:pPr>
+            <a:r>
+              <a:rPr lang="en-US" sz="1400" b="1">
                 <a:solidFill>
                   <a:srgbClr val="0F1B2D"/>
                 </a:solidFill>
@@ -7778,11 +7655,11 @@
           <a:bodyPr wrap="square" lIns="0" tIns="0" rIns="0" bIns="0" rtlCol="0" anchor="t"/>
           <a:lstStyle/>
           <a:p>
-            <a:pPr algn="ctr" indent="0" marL="0">
-              <a:buNone/>
-            </a:pPr>
-            <a:r>
-              <a:rPr lang="en-US" sz="1200" dirty="0">
+            <a:pPr marL="0" indent="0" algn="ctr">
+              <a:buNone/>
+            </a:pPr>
+            <a:r>
+              <a:rPr lang="en-US" sz="1200">
                 <a:solidFill>
                   <a:srgbClr val="5B6B82"/>
                 </a:solidFill>
@@ -7822,6 +7699,13 @@
             <a:prstDash val="solid"/>
           </a:ln>
         </p:spPr>
+        <p:txBody>
+          <a:bodyPr/>
+          <a:lstStyle/>
+          <a:p>
+            <a:endParaRPr lang="es-ES"/>
+          </a:p>
+        </p:txBody>
       </p:sp>
       <p:sp>
         <p:nvSpPr>
@@ -7844,11 +7728,11 @@
           <a:bodyPr wrap="square" lIns="0" tIns="0" rIns="0" bIns="0" rtlCol="0" anchor="ctr"/>
           <a:lstStyle/>
           <a:p>
-            <a:pPr algn="ctr" indent="0" marL="0">
-              <a:buNone/>
-            </a:pPr>
-            <a:r>
-              <a:rPr lang="en-US" sz="1000" b="1" dirty="0">
+            <a:pPr marL="0" indent="0" algn="ctr">
+              <a:buNone/>
+            </a:pPr>
+            <a:r>
+              <a:rPr lang="en-US" sz="1000" b="1">
                 <a:solidFill>
                   <a:srgbClr val="12233F"/>
                 </a:solidFill>
@@ -7886,6 +7770,13 @@
             <a:prstDash val="solid"/>
           </a:ln>
         </p:spPr>
+        <p:txBody>
+          <a:bodyPr/>
+          <a:lstStyle/>
+          <a:p>
+            <a:endParaRPr lang="es-ES"/>
+          </a:p>
+        </p:txBody>
       </p:sp>
       <p:sp>
         <p:nvSpPr>
@@ -7913,13 +7804,20 @@
             <a:prstDash val="solid"/>
           </a:ln>
           <a:effectLst>
-            <a:outerShdw sx="100000" sy="100000" kx="0" ky="0" algn="bl" rotWithShape="0" blurRad="101600" dist="25400" dir="5400000">
+            <a:outerShdw blurRad="101600" dist="25400" dir="5400000" algn="bl" rotWithShape="0">
               <a:srgbClr val="0F1B2D">
                 <a:alpha val="8000"/>
               </a:srgbClr>
             </a:outerShdw>
           </a:effectLst>
         </p:spPr>
+        <p:txBody>
+          <a:bodyPr/>
+          <a:lstStyle/>
+          <a:p>
+            <a:endParaRPr lang="es-ES"/>
+          </a:p>
+        </p:txBody>
       </p:sp>
       <p:sp>
         <p:nvSpPr>
@@ -7942,11 +7840,11 @@
           <a:bodyPr wrap="square" lIns="0" tIns="0" rIns="0" bIns="0" rtlCol="0" anchor="ctr"/>
           <a:lstStyle/>
           <a:p>
-            <a:pPr indent="0" marL="0">
-              <a:buNone/>
-            </a:pPr>
-            <a:r>
-              <a:rPr lang="en-US" sz="1100" b="1" dirty="0">
+            <a:pPr marL="0" indent="0">
+              <a:buNone/>
+            </a:pPr>
+            <a:r>
+              <a:rPr lang="en-US" sz="1100" b="1">
                 <a:solidFill>
                   <a:srgbClr val="5B6B82"/>
                 </a:solidFill>
@@ -7984,17 +7882,24 @@
             <a:prstDash val="solid"/>
           </a:ln>
         </p:spPr>
+        <p:txBody>
+          <a:bodyPr/>
+          <a:lstStyle/>
+          <a:p>
+            <a:endParaRPr lang="es-ES"/>
+          </a:p>
+        </p:txBody>
       </p:sp>
       <p:pic>
         <p:nvPicPr>
-          <p:cNvPr id="33" name="Image 3" descr="preencoded.png">    </p:cNvPr>
+          <p:cNvPr id="33" name="Image 3" descr="preencoded.png"/>
           <p:cNvPicPr>
             <a:picLocks noChangeAspect="1"/>
           </p:cNvPicPr>
           <p:nvPr/>
         </p:nvPicPr>
         <p:blipFill>
-          <a:blip r:embed="rId4"/>
+          <a:blip r:embed="rId6"/>
           <a:stretch>
             <a:fillRect/>
           </a:stretch>
@@ -8030,11 +7935,11 @@
           <a:bodyPr wrap="square" lIns="0" tIns="0" rIns="0" bIns="0" rtlCol="0" anchor="t"/>
           <a:lstStyle/>
           <a:p>
-            <a:pPr algn="ctr" indent="0" marL="0">
-              <a:buNone/>
-            </a:pPr>
-            <a:r>
-              <a:rPr lang="en-US" sz="1400" b="1" dirty="0">
+            <a:pPr marL="0" indent="0" algn="ctr">
+              <a:buNone/>
+            </a:pPr>
+            <a:r>
+              <a:rPr lang="en-US" sz="1400" b="1">
                 <a:solidFill>
                   <a:srgbClr val="0F1B2D"/>
                 </a:solidFill>
@@ -8069,11 +7974,11 @@
           <a:bodyPr wrap="square" lIns="0" tIns="0" rIns="0" bIns="0" rtlCol="0" anchor="t"/>
           <a:lstStyle/>
           <a:p>
-            <a:pPr algn="ctr" indent="0" marL="0">
-              <a:buNone/>
-            </a:pPr>
-            <a:r>
-              <a:rPr lang="en-US" sz="1200" dirty="0">
+            <a:pPr marL="0" indent="0" algn="ctr">
+              <a:buNone/>
+            </a:pPr>
+            <a:r>
+              <a:rPr lang="en-US" sz="1200">
                 <a:solidFill>
                   <a:srgbClr val="5B6B82"/>
                 </a:solidFill>
@@ -8113,6 +8018,13 @@
             <a:prstDash val="solid"/>
           </a:ln>
         </p:spPr>
+        <p:txBody>
+          <a:bodyPr/>
+          <a:lstStyle/>
+          <a:p>
+            <a:endParaRPr lang="es-ES"/>
+          </a:p>
+        </p:txBody>
       </p:sp>
       <p:sp>
         <p:nvSpPr>
@@ -8135,11 +8047,11 @@
           <a:bodyPr wrap="square" lIns="0" tIns="0" rIns="0" bIns="0" rtlCol="0" anchor="ctr"/>
           <a:lstStyle/>
           <a:p>
-            <a:pPr algn="ctr" indent="0" marL="0">
-              <a:buNone/>
-            </a:pPr>
-            <a:r>
-              <a:rPr lang="en-US" sz="1000" b="1" dirty="0">
+            <a:pPr marL="0" indent="0" algn="ctr">
+              <a:buNone/>
+            </a:pPr>
+            <a:r>
+              <a:rPr lang="en-US" sz="1000" b="1">
                 <a:solidFill>
                   <a:srgbClr val="12233F"/>
                 </a:solidFill>
@@ -8177,6 +8089,13 @@
             <a:prstDash val="solid"/>
           </a:ln>
         </p:spPr>
+        <p:txBody>
+          <a:bodyPr/>
+          <a:lstStyle/>
+          <a:p>
+            <a:endParaRPr lang="es-ES"/>
+          </a:p>
+        </p:txBody>
       </p:sp>
       <p:sp>
         <p:nvSpPr>
@@ -8204,13 +8123,20 @@
             <a:prstDash val="solid"/>
           </a:ln>
           <a:effectLst>
-            <a:outerShdw sx="100000" sy="100000" kx="0" ky="0" algn="bl" rotWithShape="0" blurRad="101600" dist="25400" dir="5400000">
+            <a:outerShdw blurRad="101600" dist="25400" dir="5400000" algn="bl" rotWithShape="0">
               <a:srgbClr val="0F1B2D">
                 <a:alpha val="8000"/>
               </a:srgbClr>
             </a:outerShdw>
           </a:effectLst>
         </p:spPr>
+        <p:txBody>
+          <a:bodyPr/>
+          <a:lstStyle/>
+          <a:p>
+            <a:endParaRPr lang="es-ES"/>
+          </a:p>
+        </p:txBody>
       </p:sp>
       <p:sp>
         <p:nvSpPr>
@@ -8233,11 +8159,11 @@
           <a:bodyPr wrap="square" lIns="0" tIns="0" rIns="0" bIns="0" rtlCol="0" anchor="ctr"/>
           <a:lstStyle/>
           <a:p>
-            <a:pPr indent="0" marL="0">
-              <a:buNone/>
-            </a:pPr>
-            <a:r>
-              <a:rPr lang="en-US" sz="1100" b="1" dirty="0">
+            <a:pPr marL="0" indent="0">
+              <a:buNone/>
+            </a:pPr>
+            <a:r>
+              <a:rPr lang="en-US" sz="1100" b="1">
                 <a:solidFill>
                   <a:srgbClr val="5B6B82"/>
                 </a:solidFill>
@@ -8275,17 +8201,24 @@
             <a:prstDash val="solid"/>
           </a:ln>
         </p:spPr>
+        <p:txBody>
+          <a:bodyPr/>
+          <a:lstStyle/>
+          <a:p>
+            <a:endParaRPr lang="es-ES"/>
+          </a:p>
+        </p:txBody>
       </p:sp>
       <p:pic>
         <p:nvPicPr>
-          <p:cNvPr id="42" name="Image 4" descr="preencoded.png">    </p:cNvPr>
+          <p:cNvPr id="42" name="Image 4" descr="preencoded.png"/>
           <p:cNvPicPr>
             <a:picLocks noChangeAspect="1"/>
           </p:cNvPicPr>
           <p:nvPr/>
         </p:nvPicPr>
         <p:blipFill>
-          <a:blip r:embed="rId5"/>
+          <a:blip r:embed="rId7"/>
           <a:stretch>
             <a:fillRect/>
           </a:stretch>
@@ -8321,11 +8254,11 @@
           <a:bodyPr wrap="square" lIns="0" tIns="0" rIns="0" bIns="0" rtlCol="0" anchor="t"/>
           <a:lstStyle/>
           <a:p>
-            <a:pPr algn="ctr" indent="0" marL="0">
-              <a:buNone/>
-            </a:pPr>
-            <a:r>
-              <a:rPr lang="en-US" sz="1400" b="1" dirty="0">
+            <a:pPr marL="0" indent="0" algn="ctr">
+              <a:buNone/>
+            </a:pPr>
+            <a:r>
+              <a:rPr lang="en-US" sz="1400" b="1">
                 <a:solidFill>
                   <a:srgbClr val="0F1B2D"/>
                 </a:solidFill>
@@ -8360,11 +8293,11 @@
           <a:bodyPr wrap="square" lIns="0" tIns="0" rIns="0" bIns="0" rtlCol="0" anchor="t"/>
           <a:lstStyle/>
           <a:p>
-            <a:pPr algn="ctr" indent="0" marL="0">
-              <a:buNone/>
-            </a:pPr>
-            <a:r>
-              <a:rPr lang="en-US" sz="1200" dirty="0">
+            <a:pPr marL="0" indent="0" algn="ctr">
+              <a:buNone/>
+            </a:pPr>
+            <a:r>
+              <a:rPr lang="en-US" sz="1200">
                 <a:solidFill>
                   <a:srgbClr val="5B6B82"/>
                 </a:solidFill>
@@ -8404,6 +8337,13 @@
             <a:prstDash val="solid"/>
           </a:ln>
         </p:spPr>
+        <p:txBody>
+          <a:bodyPr/>
+          <a:lstStyle/>
+          <a:p>
+            <a:endParaRPr lang="es-ES"/>
+          </a:p>
+        </p:txBody>
       </p:sp>
       <p:sp>
         <p:nvSpPr>
@@ -8426,11 +8366,11 @@
           <a:bodyPr wrap="square" lIns="0" tIns="0" rIns="0" bIns="0" rtlCol="0" anchor="ctr"/>
           <a:lstStyle/>
           <a:p>
-            <a:pPr algn="ctr" indent="0" marL="0">
-              <a:buNone/>
-            </a:pPr>
-            <a:r>
-              <a:rPr lang="en-US" sz="1000" b="1" dirty="0">
+            <a:pPr marL="0" indent="0" algn="ctr">
+              <a:buNone/>
+            </a:pPr>
+            <a:r>
+              <a:rPr lang="en-US" sz="1000" b="1">
                 <a:solidFill>
                   <a:srgbClr val="12233F"/>
                 </a:solidFill>
@@ -8468,6 +8408,13 @@
             <a:prstDash val="solid"/>
           </a:ln>
         </p:spPr>
+        <p:txBody>
+          <a:bodyPr/>
+          <a:lstStyle/>
+          <a:p>
+            <a:endParaRPr lang="es-ES"/>
+          </a:p>
+        </p:txBody>
       </p:sp>
       <p:sp>
         <p:nvSpPr>
@@ -8495,13 +8442,20 @@
             <a:prstDash val="solid"/>
           </a:ln>
           <a:effectLst>
-            <a:outerShdw sx="100000" sy="100000" kx="0" ky="0" algn="bl" rotWithShape="0" blurRad="101600" dist="25400" dir="5400000">
+            <a:outerShdw blurRad="101600" dist="25400" dir="5400000" algn="bl" rotWithShape="0">
               <a:srgbClr val="0F1B2D">
                 <a:alpha val="8000"/>
               </a:srgbClr>
             </a:outerShdw>
           </a:effectLst>
         </p:spPr>
+        <p:txBody>
+          <a:bodyPr/>
+          <a:lstStyle/>
+          <a:p>
+            <a:endParaRPr lang="es-ES"/>
+          </a:p>
+        </p:txBody>
       </p:sp>
       <p:sp>
         <p:nvSpPr>
@@ -8524,11 +8478,11 @@
           <a:bodyPr wrap="square" lIns="0" tIns="0" rIns="0" bIns="0" rtlCol="0" anchor="ctr"/>
           <a:lstStyle/>
           <a:p>
-            <a:pPr indent="0" marL="0">
-              <a:buNone/>
-            </a:pPr>
-            <a:r>
-              <a:rPr lang="en-US" sz="1100" b="1" dirty="0">
+            <a:pPr marL="0" indent="0">
+              <a:buNone/>
+            </a:pPr>
+            <a:r>
+              <a:rPr lang="en-US" sz="1100" b="1">
                 <a:solidFill>
                   <a:srgbClr val="5B6B82"/>
                 </a:solidFill>
@@ -8566,17 +8520,24 @@
             <a:prstDash val="solid"/>
           </a:ln>
         </p:spPr>
+        <p:txBody>
+          <a:bodyPr/>
+          <a:lstStyle/>
+          <a:p>
+            <a:endParaRPr lang="es-ES"/>
+          </a:p>
+        </p:txBody>
       </p:sp>
       <p:pic>
         <p:nvPicPr>
-          <p:cNvPr id="51" name="Image 5" descr="preencoded.png">    </p:cNvPr>
+          <p:cNvPr id="51" name="Image 5" descr="preencoded.png"/>
           <p:cNvPicPr>
             <a:picLocks noChangeAspect="1"/>
           </p:cNvPicPr>
           <p:nvPr/>
         </p:nvPicPr>
         <p:blipFill>
-          <a:blip r:embed="rId6"/>
+          <a:blip r:embed="rId8"/>
           <a:stretch>
             <a:fillRect/>
           </a:stretch>
@@ -8612,11 +8573,11 @@
           <a:bodyPr wrap="square" lIns="0" tIns="0" rIns="0" bIns="0" rtlCol="0" anchor="t"/>
           <a:lstStyle/>
           <a:p>
-            <a:pPr algn="ctr" indent="0" marL="0">
-              <a:buNone/>
-            </a:pPr>
-            <a:r>
-              <a:rPr lang="en-US" sz="1400" b="1" dirty="0">
+            <a:pPr marL="0" indent="0" algn="ctr">
+              <a:buNone/>
+            </a:pPr>
+            <a:r>
+              <a:rPr lang="en-US" sz="1400" b="1">
                 <a:solidFill>
                   <a:srgbClr val="0F1B2D"/>
                 </a:solidFill>
@@ -8651,11 +8612,11 @@
           <a:bodyPr wrap="square" lIns="0" tIns="0" rIns="0" bIns="0" rtlCol="0" anchor="t"/>
           <a:lstStyle/>
           <a:p>
-            <a:pPr algn="ctr" indent="0" marL="0">
-              <a:buNone/>
-            </a:pPr>
-            <a:r>
-              <a:rPr lang="en-US" sz="1200" dirty="0">
+            <a:pPr marL="0" indent="0" algn="ctr">
+              <a:buNone/>
+            </a:pPr>
+            <a:r>
+              <a:rPr lang="es-ES" sz="1200">
                 <a:solidFill>
                   <a:srgbClr val="5B6B82"/>
                 </a:solidFill>
@@ -8695,6 +8656,13 @@
             <a:prstDash val="solid"/>
           </a:ln>
         </p:spPr>
+        <p:txBody>
+          <a:bodyPr/>
+          <a:lstStyle/>
+          <a:p>
+            <a:endParaRPr lang="es-ES"/>
+          </a:p>
+        </p:txBody>
       </p:sp>
       <p:sp>
         <p:nvSpPr>
@@ -8717,11 +8685,11 @@
           <a:bodyPr wrap="square" lIns="0" tIns="0" rIns="0" bIns="0" rtlCol="0" anchor="ctr"/>
           <a:lstStyle/>
           <a:p>
-            <a:pPr algn="ctr" indent="0" marL="0">
-              <a:buNone/>
-            </a:pPr>
-            <a:r>
-              <a:rPr lang="en-US" sz="1000" b="1" dirty="0">
+            <a:pPr marL="0" indent="0" algn="ctr">
+              <a:buNone/>
+            </a:pPr>
+            <a:r>
+              <a:rPr lang="en-US" sz="1000" b="1">
                 <a:solidFill>
                   <a:srgbClr val="12233F"/>
                 </a:solidFill>
@@ -8759,6 +8727,13 @@
             <a:prstDash val="solid"/>
           </a:ln>
         </p:spPr>
+        <p:txBody>
+          <a:bodyPr/>
+          <a:lstStyle/>
+          <a:p>
+            <a:endParaRPr lang="es-ES"/>
+          </a:p>
+        </p:txBody>
       </p:sp>
       <p:sp>
         <p:nvSpPr>
@@ -8786,13 +8761,20 @@
             <a:prstDash val="solid"/>
           </a:ln>
           <a:effectLst>
-            <a:outerShdw sx="100000" sy="100000" kx="0" ky="0" algn="bl" rotWithShape="0" blurRad="101600" dist="25400" dir="5400000">
+            <a:outerShdw blurRad="101600" dist="25400" dir="5400000" algn="bl" rotWithShape="0">
               <a:srgbClr val="0F1B2D">
                 <a:alpha val="8000"/>
               </a:srgbClr>
             </a:outerShdw>
           </a:effectLst>
         </p:spPr>
+        <p:txBody>
+          <a:bodyPr/>
+          <a:lstStyle/>
+          <a:p>
+            <a:endParaRPr lang="es-ES"/>
+          </a:p>
+        </p:txBody>
       </p:sp>
       <p:sp>
         <p:nvSpPr>
@@ -8815,11 +8797,11 @@
           <a:bodyPr wrap="square" lIns="0" tIns="0" rIns="0" bIns="0" rtlCol="0" anchor="ctr"/>
           <a:lstStyle/>
           <a:p>
-            <a:pPr indent="0" marL="0">
-              <a:buNone/>
-            </a:pPr>
-            <a:r>
-              <a:rPr lang="en-US" sz="1100" b="1" dirty="0">
+            <a:pPr marL="0" indent="0">
+              <a:buNone/>
+            </a:pPr>
+            <a:r>
+              <a:rPr lang="en-US" sz="1100" b="1">
                 <a:solidFill>
                   <a:srgbClr val="5B6B82"/>
                 </a:solidFill>
@@ -8857,17 +8839,24 @@
             <a:prstDash val="solid"/>
           </a:ln>
         </p:spPr>
+        <p:txBody>
+          <a:bodyPr/>
+          <a:lstStyle/>
+          <a:p>
+            <a:endParaRPr lang="es-ES"/>
+          </a:p>
+        </p:txBody>
       </p:sp>
       <p:pic>
         <p:nvPicPr>
-          <p:cNvPr id="60" name="Image 6" descr="preencoded.png">    </p:cNvPr>
+          <p:cNvPr id="60" name="Image 6" descr="preencoded.png"/>
           <p:cNvPicPr>
             <a:picLocks noChangeAspect="1"/>
           </p:cNvPicPr>
           <p:nvPr/>
         </p:nvPicPr>
         <p:blipFill>
-          <a:blip r:embed="rId7"/>
+          <a:blip r:embed="rId9"/>
           <a:stretch>
             <a:fillRect/>
           </a:stretch>
@@ -8903,11 +8892,11 @@
           <a:bodyPr wrap="square" lIns="0" tIns="0" rIns="0" bIns="0" rtlCol="0" anchor="t"/>
           <a:lstStyle/>
           <a:p>
-            <a:pPr algn="ctr" indent="0" marL="0">
-              <a:buNone/>
-            </a:pPr>
-            <a:r>
-              <a:rPr lang="en-US" sz="1400" b="1" dirty="0">
+            <a:pPr marL="0" indent="0" algn="ctr">
+              <a:buNone/>
+            </a:pPr>
+            <a:r>
+              <a:rPr lang="en-US" sz="1400" b="1">
                 <a:solidFill>
                   <a:srgbClr val="0F1B2D"/>
                 </a:solidFill>
@@ -8942,11 +8931,11 @@
           <a:bodyPr wrap="square" lIns="0" tIns="0" rIns="0" bIns="0" rtlCol="0" anchor="t"/>
           <a:lstStyle/>
           <a:p>
-            <a:pPr algn="ctr" indent="0" marL="0">
-              <a:buNone/>
-            </a:pPr>
-            <a:r>
-              <a:rPr lang="en-US" sz="1200" dirty="0">
+            <a:pPr marL="0" indent="0" algn="ctr">
+              <a:buNone/>
+            </a:pPr>
+            <a:r>
+              <a:rPr lang="en-US" sz="1200">
                 <a:solidFill>
                   <a:srgbClr val="5B6B82"/>
                 </a:solidFill>
@@ -8986,6 +8975,13 @@
             <a:prstDash val="solid"/>
           </a:ln>
         </p:spPr>
+        <p:txBody>
+          <a:bodyPr/>
+          <a:lstStyle/>
+          <a:p>
+            <a:endParaRPr lang="es-ES"/>
+          </a:p>
+        </p:txBody>
       </p:sp>
       <p:sp>
         <p:nvSpPr>
@@ -9008,11 +9004,11 @@
           <a:bodyPr wrap="square" lIns="0" tIns="0" rIns="0" bIns="0" rtlCol="0" anchor="ctr"/>
           <a:lstStyle/>
           <a:p>
-            <a:pPr algn="ctr" indent="0" marL="0">
-              <a:buNone/>
-            </a:pPr>
-            <a:r>
-              <a:rPr lang="en-US" sz="1000" b="1" dirty="0">
+            <a:pPr marL="0" indent="0" algn="ctr">
+              <a:buNone/>
+            </a:pPr>
+            <a:r>
+              <a:rPr lang="en-US" sz="1000" b="1">
                 <a:solidFill>
                   <a:srgbClr val="12233F"/>
                 </a:solidFill>
@@ -9052,17 +9048,24 @@
             <a:prstDash val="dash"/>
           </a:ln>
         </p:spPr>
+        <p:txBody>
+          <a:bodyPr/>
+          <a:lstStyle/>
+          <a:p>
+            <a:endParaRPr lang="es-ES"/>
+          </a:p>
+        </p:txBody>
       </p:sp>
       <p:pic>
         <p:nvPicPr>
-          <p:cNvPr id="66" name="Image 7" descr="preencoded.png">    </p:cNvPr>
+          <p:cNvPr id="66" name="Image 7" descr="preencoded.png"/>
           <p:cNvPicPr>
             <a:picLocks noChangeAspect="1"/>
           </p:cNvPicPr>
           <p:nvPr/>
         </p:nvPicPr>
         <p:blipFill>
-          <a:blip r:embed="rId8"/>
+          <a:blip r:embed="rId10"/>
           <a:stretch>
             <a:fillRect/>
           </a:stretch>
@@ -9098,11 +9101,11 @@
           <a:bodyPr wrap="square" lIns="0" tIns="0" rIns="0" bIns="0" rtlCol="0" anchor="ctr"/>
           <a:lstStyle/>
           <a:p>
-            <a:pPr indent="0" marL="0">
-              <a:buNone/>
-            </a:pPr>
-            <a:r>
-              <a:rPr lang="en-US" sz="1500" b="1" dirty="0">
+            <a:pPr marL="0" indent="0">
+              <a:buNone/>
+            </a:pPr>
+            <a:r>
+              <a:rPr lang="es-ES" sz="1500" b="1">
                 <a:solidFill>
                   <a:srgbClr val="5A4310"/>
                 </a:solidFill>
@@ -9110,21 +9113,7 @@
                 <a:ea typeface="Calibri" pitchFamily="34" charset="-122"/>
                 <a:cs typeface="Calibri" pitchFamily="34" charset="-120"/>
               </a:rPr>
-              <a:t>Modelos entrenados y versionados </a:t>
-            </a:r>
-            <a:pPr indent="0" marL="0">
-              <a:buNone/>
-            </a:pPr>
-            <a:r>
-              <a:rPr lang="en-US" sz="1500" dirty="0">
-                <a:solidFill>
-                  <a:srgbClr val="5A4310"/>
-                </a:solidFill>
-                <a:latin typeface="Calibri" pitchFamily="34" charset="0"/>
-                <a:ea typeface="Calibri" pitchFamily="34" charset="-122"/>
-                <a:cs typeface="Calibri" pitchFamily="34" charset="-120"/>
-              </a:rPr>
-              <a:t>alimentan las etapas 2 (YOLOv4) y 5 (ConvLSTM). La detección dice qué hay en cada frame; el modelo temporal entiende qué está pasando.</a:t>
+              <a:t>Modelos entrenados y versionados alimentan las etapas 2 (YOLOv8) y 5 (ConvLSTM). La detección dice qué hay en cada frame; el modelo temporal entiende qué está pasando.</a:t>
             </a:r>
             <a:endParaRPr lang="en-US" sz="1500" dirty="0"/>
           </a:p>
@@ -9132,7 +9121,7 @@
       </p:sp>
       <p:sp>
         <p:nvSpPr>
-          <p:cNvPr id="25" name="Slide Number Placeholder 0"/>
+          <p:cNvPr id="68" name="Slide Number Placeholder 0"/>
           <p:cNvSpPr>
             <a:spLocks noGrp="1"/>
           </p:cNvSpPr>
@@ -9150,7 +9139,7 @@
           </a:prstGeom>
           <a:extLst>
             <a:ext uri="{C572A759-6A51-4108-AA02-DFA0A04FC94B}">
-              <ma14:wrappingTextBoxFlag xmlns:ma14="http://schemas.microsoft.com/office/mac/drawingml/2011/main" val="0"/>
+              <ma14:wrappingTextBoxFlag xmlns:ma14="http://schemas.microsoft.com/office/mac/drawingml/2011/main" xmlns="" val="0"/>
             </a:ext>
           </a:extLst>
         </p:spPr>
@@ -9170,10 +9159,10 @@
           </a:lstStyle>
           <a:p>
             <a:pPr algn="r"/>
-            <a:fld id="{F7021451-1387-4CA6-816F-3879F97B5CBC}" type="slidenum">
-              <a:rPr b="0" lang="en-US"/>
+            <a:r>
+              <a:rPr lang="en-US" b="0"/>
               <a:t>4</a:t>
-            </a:fld>
+            </a:r>
             <a:endParaRPr lang="en-US"/>
           </a:p>
         </p:txBody>
@@ -9206,9 +9195,11 @@
       <p:sp>
         <p:nvSpPr>
           <p:cNvPr id="2" name="Text 0"/>
-          <p:cNvSpPr/>
+          <p:cNvSpPr>
+            <a:spLocks noGrp="1"/>
+          </p:cNvSpPr>
           <p:nvPr>
-            <p:ph idx="100" type="title" hasCustomPrompt="1"/>
+            <p:ph type="title" idx="100" hasCustomPrompt="1"/>
           </p:nvPr>
         </p:nvSpPr>
         <p:spPr>
@@ -9226,11 +9217,11 @@
           <a:bodyPr wrap="square" lIns="0" tIns="0" rIns="0" bIns="0" rtlCol="0" anchor="ctr"/>
           <a:lstStyle/>
           <a:p>
-            <a:pPr algn="l" indent="0" marL="0">
-              <a:buNone/>
-            </a:pPr>
-            <a:r>
-              <a:rPr lang="en-US" sz="3200" b="1" dirty="0">
+            <a:pPr marL="0" indent="0" algn="l">
+              <a:buNone/>
+            </a:pPr>
+            <a:r>
+              <a:rPr lang="es-ES" sz="3200" b="1">
                 <a:solidFill>
                   <a:srgbClr val="0F1B2D"/>
                 </a:solidFill>
@@ -9270,13 +9261,20 @@
             <a:prstDash val="solid"/>
           </a:ln>
           <a:effectLst>
-            <a:outerShdw sx="100000" sy="100000" kx="0" ky="0" algn="bl" rotWithShape="0" blurRad="101600" dist="25400" dir="5400000">
+            <a:outerShdw blurRad="101600" dist="25400" dir="5400000" algn="bl" rotWithShape="0">
               <a:srgbClr val="0F1B2D">
                 <a:alpha val="8000"/>
               </a:srgbClr>
             </a:outerShdw>
           </a:effectLst>
         </p:spPr>
+        <p:txBody>
+          <a:bodyPr/>
+          <a:lstStyle/>
+          <a:p>
+            <a:endParaRPr lang="es-ES"/>
+          </a:p>
+        </p:txBody>
       </p:sp>
       <p:sp>
         <p:nvSpPr>
@@ -9302,17 +9300,24 @@
             <a:prstDash val="solid"/>
           </a:ln>
         </p:spPr>
+        <p:txBody>
+          <a:bodyPr/>
+          <a:lstStyle/>
+          <a:p>
+            <a:endParaRPr lang="es-ES"/>
+          </a:p>
+        </p:txBody>
       </p:sp>
       <p:pic>
         <p:nvPicPr>
-          <p:cNvPr id="5" name="Image 0" descr="preencoded.png">    </p:cNvPr>
+          <p:cNvPr id="5" name="Image 0" descr="preencoded.png"/>
           <p:cNvPicPr>
             <a:picLocks noChangeAspect="1"/>
           </p:cNvPicPr>
           <p:nvPr/>
         </p:nvPicPr>
         <p:blipFill>
-          <a:blip r:embed="rId1"/>
+          <a:blip r:embed="rId3"/>
           <a:stretch>
             <a:fillRect/>
           </a:stretch>
@@ -9353,6 +9358,13 @@
             <a:prstDash val="solid"/>
           </a:ln>
         </p:spPr>
+        <p:txBody>
+          <a:bodyPr/>
+          <a:lstStyle/>
+          <a:p>
+            <a:endParaRPr lang="es-ES"/>
+          </a:p>
+        </p:txBody>
       </p:sp>
       <p:sp>
         <p:nvSpPr>
@@ -9375,11 +9387,11 @@
           <a:bodyPr wrap="square" lIns="0" tIns="0" rIns="0" bIns="0" rtlCol="0" anchor="ctr"/>
           <a:lstStyle/>
           <a:p>
-            <a:pPr algn="ctr" indent="0" marL="0">
-              <a:buNone/>
-            </a:pPr>
-            <a:r>
-              <a:rPr lang="en-US" sz="1100" b="1" dirty="0">
+            <a:pPr marL="0" indent="0" algn="ctr">
+              <a:buNone/>
+            </a:pPr>
+            <a:r>
+              <a:rPr lang="en-US" sz="1100" b="1">
                 <a:solidFill>
                   <a:srgbClr val="E0483E"/>
                 </a:solidFill>
@@ -9414,11 +9426,11 @@
           <a:bodyPr wrap="square" lIns="0" tIns="0" rIns="0" bIns="0" rtlCol="0" anchor="t"/>
           <a:lstStyle/>
           <a:p>
-            <a:pPr indent="0" marL="0">
-              <a:buNone/>
-            </a:pPr>
-            <a:r>
-              <a:rPr lang="en-US" sz="1900" b="1" dirty="0">
+            <a:pPr marL="0" indent="0">
+              <a:buNone/>
+            </a:pPr>
+            <a:r>
+              <a:rPr lang="es-ES" sz="1900" b="1">
                 <a:solidFill>
                   <a:srgbClr val="0F1B2D"/>
                 </a:solidFill>
@@ -9453,11 +9465,11 @@
           <a:bodyPr wrap="square" lIns="0" tIns="0" rIns="0" bIns="0" rtlCol="0" anchor="t"/>
           <a:lstStyle/>
           <a:p>
-            <a:pPr indent="0" marL="0">
-              <a:buNone/>
-            </a:pPr>
-            <a:r>
-              <a:rPr lang="en-US" sz="1400" dirty="0">
+            <a:pPr marL="0" indent="0">
+              <a:buNone/>
+            </a:pPr>
+            <a:r>
+              <a:rPr lang="es-ES" sz="1400">
                 <a:solidFill>
                   <a:srgbClr val="5B6B82"/>
                 </a:solidFill>
@@ -9497,13 +9509,20 @@
             <a:prstDash val="solid"/>
           </a:ln>
           <a:effectLst>
-            <a:outerShdw sx="100000" sy="100000" kx="0" ky="0" algn="bl" rotWithShape="0" blurRad="101600" dist="25400" dir="5400000">
+            <a:outerShdw blurRad="101600" dist="25400" dir="5400000" algn="bl" rotWithShape="0">
               <a:srgbClr val="0F1B2D">
                 <a:alpha val="8000"/>
               </a:srgbClr>
             </a:outerShdw>
           </a:effectLst>
         </p:spPr>
+        <p:txBody>
+          <a:bodyPr/>
+          <a:lstStyle/>
+          <a:p>
+            <a:endParaRPr lang="es-ES"/>
+          </a:p>
+        </p:txBody>
       </p:sp>
       <p:sp>
         <p:nvSpPr>
@@ -9529,17 +9548,24 @@
             <a:prstDash val="solid"/>
           </a:ln>
         </p:spPr>
+        <p:txBody>
+          <a:bodyPr/>
+          <a:lstStyle/>
+          <a:p>
+            <a:endParaRPr lang="es-ES"/>
+          </a:p>
+        </p:txBody>
       </p:sp>
       <p:pic>
         <p:nvPicPr>
-          <p:cNvPr id="12" name="Image 1" descr="preencoded.png">    </p:cNvPr>
+          <p:cNvPr id="12" name="Image 1" descr="preencoded.png"/>
           <p:cNvPicPr>
             <a:picLocks noChangeAspect="1"/>
           </p:cNvPicPr>
           <p:nvPr/>
         </p:nvPicPr>
         <p:blipFill>
-          <a:blip r:embed="rId2"/>
+          <a:blip r:embed="rId4"/>
           <a:stretch>
             <a:fillRect/>
           </a:stretch>
@@ -9580,6 +9606,13 @@
             <a:prstDash val="solid"/>
           </a:ln>
         </p:spPr>
+        <p:txBody>
+          <a:bodyPr/>
+          <a:lstStyle/>
+          <a:p>
+            <a:endParaRPr lang="es-ES"/>
+          </a:p>
+        </p:txBody>
       </p:sp>
       <p:sp>
         <p:nvSpPr>
@@ -9602,11 +9635,11 @@
           <a:bodyPr wrap="square" lIns="0" tIns="0" rIns="0" bIns="0" rtlCol="0" anchor="ctr"/>
           <a:lstStyle/>
           <a:p>
-            <a:pPr algn="ctr" indent="0" marL="0">
-              <a:buNone/>
-            </a:pPr>
-            <a:r>
-              <a:rPr lang="en-US" sz="1100" b="1" dirty="0">
+            <a:pPr marL="0" indent="0" algn="ctr">
+              <a:buNone/>
+            </a:pPr>
+            <a:r>
+              <a:rPr lang="en-US" sz="1100" b="1">
                 <a:solidFill>
                   <a:srgbClr val="E0483E"/>
                 </a:solidFill>
@@ -9641,11 +9674,11 @@
           <a:bodyPr wrap="square" lIns="0" tIns="0" rIns="0" bIns="0" rtlCol="0" anchor="t"/>
           <a:lstStyle/>
           <a:p>
-            <a:pPr indent="0" marL="0">
-              <a:buNone/>
-            </a:pPr>
-            <a:r>
-              <a:rPr lang="en-US" sz="1900" b="1" dirty="0">
+            <a:pPr marL="0" indent="0">
+              <a:buNone/>
+            </a:pPr>
+            <a:r>
+              <a:rPr lang="en-US" sz="1900" b="1">
                 <a:solidFill>
                   <a:srgbClr val="0F1B2D"/>
                 </a:solidFill>
@@ -9680,11 +9713,11 @@
           <a:bodyPr wrap="square" lIns="0" tIns="0" rIns="0" bIns="0" rtlCol="0" anchor="t"/>
           <a:lstStyle/>
           <a:p>
-            <a:pPr indent="0" marL="0">
-              <a:buNone/>
-            </a:pPr>
-            <a:r>
-              <a:rPr lang="en-US" sz="1400" dirty="0">
+            <a:pPr marL="0" indent="0">
+              <a:buNone/>
+            </a:pPr>
+            <a:r>
+              <a:rPr lang="es-ES" sz="1400">
                 <a:solidFill>
                   <a:srgbClr val="5B6B82"/>
                 </a:solidFill>
@@ -9724,17 +9757,24 @@
             <a:prstDash val="solid"/>
           </a:ln>
         </p:spPr>
+        <p:txBody>
+          <a:bodyPr/>
+          <a:lstStyle/>
+          <a:p>
+            <a:endParaRPr lang="es-ES"/>
+          </a:p>
+        </p:txBody>
       </p:sp>
       <p:pic>
         <p:nvPicPr>
-          <p:cNvPr id="18" name="Image 2" descr="preencoded.png">    </p:cNvPr>
+          <p:cNvPr id="18" name="Image 2" descr="preencoded.png"/>
           <p:cNvPicPr>
             <a:picLocks noChangeAspect="1"/>
           </p:cNvPicPr>
           <p:nvPr/>
         </p:nvPicPr>
         <p:blipFill>
-          <a:blip r:embed="rId3"/>
+          <a:blip r:embed="rId5"/>
           <a:stretch>
             <a:fillRect/>
           </a:stretch>
@@ -9770,11 +9810,11 @@
           <a:bodyPr wrap="square" lIns="0" tIns="0" rIns="0" bIns="0" rtlCol="0" anchor="ctr"/>
           <a:lstStyle/>
           <a:p>
-            <a:pPr indent="0" marL="0">
-              <a:buNone/>
-            </a:pPr>
-            <a:r>
-              <a:rPr lang="en-US" sz="1900" b="1" dirty="0">
+            <a:pPr marL="0" indent="0">
+              <a:buNone/>
+            </a:pPr>
+            <a:r>
+              <a:rPr lang="en-US" sz="1900" b="1">
                 <a:solidFill>
                   <a:srgbClr val="0B6E61"/>
                 </a:solidFill>
@@ -9809,11 +9849,11 @@
           <a:bodyPr wrap="square" lIns="0" tIns="0" rIns="0" bIns="0" rtlCol="0" anchor="t"/>
           <a:lstStyle/>
           <a:p>
-            <a:pPr indent="0" marL="0">
-              <a:buNone/>
-            </a:pPr>
-            <a:r>
-              <a:rPr lang="en-US" sz="1400" dirty="0">
+            <a:pPr marL="0" indent="0">
+              <a:buNone/>
+            </a:pPr>
+            <a:r>
+              <a:rPr lang="es-ES" sz="1400">
                 <a:solidFill>
                   <a:srgbClr val="245F57"/>
                 </a:solidFill>
@@ -9848,11 +9888,11 @@
           <a:bodyPr wrap="square" lIns="0" tIns="0" rIns="0" bIns="0" rtlCol="0" anchor="ctr"/>
           <a:lstStyle/>
           <a:p>
-            <a:pPr indent="0" marL="0">
-              <a:buNone/>
-            </a:pPr>
-            <a:r>
-              <a:rPr lang="en-US" sz="1500" i="1" dirty="0">
+            <a:pPr marL="0" indent="0">
+              <a:buNone/>
+            </a:pPr>
+            <a:r>
+              <a:rPr lang="es-ES" sz="1500" i="1">
                 <a:solidFill>
                   <a:srgbClr val="5B6B82"/>
                 </a:solidFill>
@@ -9886,7 +9926,7 @@
           </a:prstGeom>
           <a:extLst>
             <a:ext uri="{C572A759-6A51-4108-AA02-DFA0A04FC94B}">
-              <ma14:wrappingTextBoxFlag xmlns:ma14="http://schemas.microsoft.com/office/mac/drawingml/2011/main" val="0"/>
+              <ma14:wrappingTextBoxFlag xmlns:ma14="http://schemas.microsoft.com/office/mac/drawingml/2011/main" xmlns="" val="0"/>
             </a:ext>
           </a:extLst>
         </p:spPr>
@@ -9906,10 +9946,10 @@
           </a:lstStyle>
           <a:p>
             <a:pPr algn="r"/>
-            <a:fld id="{F7021451-1387-4CA6-816F-3879F97B5CBC}" type="slidenum">
-              <a:rPr b="0" lang="en-US"/>
+            <a:r>
+              <a:rPr lang="en-US" b="0"/>
               <a:t>5</a:t>
-            </a:fld>
+            </a:r>
             <a:endParaRPr lang="en-US"/>
           </a:p>
         </p:txBody>
@@ -9942,9 +9982,11 @@
       <p:sp>
         <p:nvSpPr>
           <p:cNvPr id="2" name="Text 0"/>
-          <p:cNvSpPr/>
+          <p:cNvSpPr>
+            <a:spLocks noGrp="1"/>
+          </p:cNvSpPr>
           <p:nvPr>
-            <p:ph idx="100" type="title" hasCustomPrompt="1"/>
+            <p:ph type="title" idx="100" hasCustomPrompt="1"/>
           </p:nvPr>
         </p:nvSpPr>
         <p:spPr>
@@ -9962,11 +10004,11 @@
           <a:bodyPr wrap="square" lIns="0" tIns="0" rIns="0" bIns="0" rtlCol="0" anchor="ctr"/>
           <a:lstStyle/>
           <a:p>
-            <a:pPr algn="l" indent="0" marL="0">
-              <a:buNone/>
-            </a:pPr>
-            <a:r>
-              <a:rPr lang="en-US" sz="3200" b="1" dirty="0">
+            <a:pPr marL="0" indent="0" algn="l">
+              <a:buNone/>
+            </a:pPr>
+            <a:r>
+              <a:rPr lang="en-US" sz="3200" b="1">
                 <a:solidFill>
                   <a:srgbClr val="0F1B2D"/>
                 </a:solidFill>
@@ -10002,6 +10044,13 @@
             <a:prstDash val="solid"/>
           </a:ln>
         </p:spPr>
+        <p:txBody>
+          <a:bodyPr/>
+          <a:lstStyle/>
+          <a:p>
+            <a:endParaRPr lang="es-ES"/>
+          </a:p>
+        </p:txBody>
       </p:sp>
       <p:sp>
         <p:nvSpPr>
@@ -10027,17 +10076,24 @@
             <a:prstDash val="solid"/>
           </a:ln>
         </p:spPr>
+        <p:txBody>
+          <a:bodyPr/>
+          <a:lstStyle/>
+          <a:p>
+            <a:endParaRPr lang="es-ES"/>
+          </a:p>
+        </p:txBody>
       </p:sp>
       <p:pic>
         <p:nvPicPr>
-          <p:cNvPr id="5" name="Image 0" descr="preencoded.png">    </p:cNvPr>
+          <p:cNvPr id="5" name="Image 0" descr="preencoded.png"/>
           <p:cNvPicPr>
             <a:picLocks noChangeAspect="1"/>
           </p:cNvPicPr>
           <p:nvPr/>
         </p:nvPicPr>
         <p:blipFill>
-          <a:blip r:embed="rId1"/>
+          <a:blip r:embed="rId3"/>
           <a:stretch>
             <a:fillRect/>
           </a:stretch>
@@ -10073,11 +10129,11 @@
           <a:bodyPr wrap="square" lIns="0" tIns="0" rIns="0" bIns="0" rtlCol="0" anchor="t"/>
           <a:lstStyle/>
           <a:p>
-            <a:pPr algn="ctr" indent="0" marL="0">
-              <a:buNone/>
-            </a:pPr>
-            <a:r>
-              <a:rPr lang="en-US" sz="1600" b="1" dirty="0">
+            <a:pPr marL="0" indent="0" algn="ctr">
+              <a:buNone/>
+            </a:pPr>
+            <a:r>
+              <a:rPr lang="en-US" sz="1600" b="1">
                 <a:solidFill>
                   <a:srgbClr val="0F1B2D"/>
                 </a:solidFill>
@@ -10112,11 +10168,11 @@
           <a:bodyPr wrap="square" lIns="0" tIns="0" rIns="0" bIns="0" rtlCol="0" anchor="t"/>
           <a:lstStyle/>
           <a:p>
-            <a:pPr algn="ctr" indent="0" marL="0">
-              <a:buNone/>
-            </a:pPr>
-            <a:r>
-              <a:rPr lang="en-US" sz="1300" dirty="0">
+            <a:pPr marL="0" indent="0" algn="ctr">
+              <a:buNone/>
+            </a:pPr>
+            <a:r>
+              <a:rPr lang="en-US" sz="1300">
                 <a:solidFill>
                   <a:srgbClr val="5B6B82"/>
                 </a:solidFill>
@@ -10154,17 +10210,24 @@
             <a:prstDash val="solid"/>
           </a:ln>
         </p:spPr>
+        <p:txBody>
+          <a:bodyPr/>
+          <a:lstStyle/>
+          <a:p>
+            <a:endParaRPr lang="es-ES"/>
+          </a:p>
+        </p:txBody>
       </p:sp>
       <p:pic>
         <p:nvPicPr>
-          <p:cNvPr id="9" name="Image 1" descr="preencoded.png">    </p:cNvPr>
+          <p:cNvPr id="9" name="Image 1" descr="preencoded.png"/>
           <p:cNvPicPr>
             <a:picLocks noChangeAspect="1"/>
           </p:cNvPicPr>
           <p:nvPr/>
         </p:nvPicPr>
         <p:blipFill>
-          <a:blip r:embed="rId2"/>
+          <a:blip r:embed="rId4"/>
           <a:stretch>
             <a:fillRect/>
           </a:stretch>
@@ -10200,11 +10263,11 @@
           <a:bodyPr wrap="square" lIns="0" tIns="0" rIns="0" bIns="0" rtlCol="0" anchor="t"/>
           <a:lstStyle/>
           <a:p>
-            <a:pPr algn="ctr" indent="0" marL="0">
-              <a:buNone/>
-            </a:pPr>
-            <a:r>
-              <a:rPr lang="en-US" sz="1600" b="1" dirty="0">
+            <a:pPr marL="0" indent="0" algn="ctr">
+              <a:buNone/>
+            </a:pPr>
+            <a:r>
+              <a:rPr lang="en-US" sz="1600" b="1">
                 <a:solidFill>
                   <a:srgbClr val="0F1B2D"/>
                 </a:solidFill>
@@ -10239,11 +10302,11 @@
           <a:bodyPr wrap="square" lIns="0" tIns="0" rIns="0" bIns="0" rtlCol="0" anchor="t"/>
           <a:lstStyle/>
           <a:p>
-            <a:pPr algn="ctr" indent="0" marL="0">
-              <a:buNone/>
-            </a:pPr>
-            <a:r>
-              <a:rPr lang="en-US" sz="1300" dirty="0">
+            <a:pPr marL="0" indent="0" algn="ctr">
+              <a:buNone/>
+            </a:pPr>
+            <a:r>
+              <a:rPr lang="en-US" sz="1300">
                 <a:solidFill>
                   <a:srgbClr val="5B6B82"/>
                 </a:solidFill>
@@ -10281,17 +10344,24 @@
             <a:prstDash val="solid"/>
           </a:ln>
         </p:spPr>
+        <p:txBody>
+          <a:bodyPr/>
+          <a:lstStyle/>
+          <a:p>
+            <a:endParaRPr lang="es-ES"/>
+          </a:p>
+        </p:txBody>
       </p:sp>
       <p:pic>
         <p:nvPicPr>
-          <p:cNvPr id="13" name="Image 2" descr="preencoded.png">    </p:cNvPr>
+          <p:cNvPr id="13" name="Image 2" descr="preencoded.png"/>
           <p:cNvPicPr>
             <a:picLocks noChangeAspect="1"/>
           </p:cNvPicPr>
           <p:nvPr/>
         </p:nvPicPr>
         <p:blipFill>
-          <a:blip r:embed="rId3"/>
+          <a:blip r:embed="rId5"/>
           <a:stretch>
             <a:fillRect/>
           </a:stretch>
@@ -10327,11 +10397,11 @@
           <a:bodyPr wrap="square" lIns="0" tIns="0" rIns="0" bIns="0" rtlCol="0" anchor="t"/>
           <a:lstStyle/>
           <a:p>
-            <a:pPr algn="ctr" indent="0" marL="0">
-              <a:buNone/>
-            </a:pPr>
-            <a:r>
-              <a:rPr lang="en-US" sz="1600" b="1" dirty="0">
+            <a:pPr marL="0" indent="0" algn="ctr">
+              <a:buNone/>
+            </a:pPr>
+            <a:r>
+              <a:rPr lang="en-US" sz="1600" b="1">
                 <a:solidFill>
                   <a:srgbClr val="0F1B2D"/>
                 </a:solidFill>
@@ -10339,7 +10409,7 @@
                 <a:ea typeface="Calibri" pitchFamily="34" charset="-122"/>
                 <a:cs typeface="Calibri" pitchFamily="34" charset="-120"/>
               </a:rPr>
-              <a:t>Entrenar YOLOv4</a:t>
+              <a:t>Entrenar YOLOv8</a:t>
             </a:r>
             <a:endParaRPr lang="en-US" sz="1600" dirty="0"/>
           </a:p>
@@ -10366,11 +10436,11 @@
           <a:bodyPr wrap="square" lIns="0" tIns="0" rIns="0" bIns="0" rtlCol="0" anchor="t"/>
           <a:lstStyle/>
           <a:p>
-            <a:pPr algn="ctr" indent="0" marL="0">
-              <a:buNone/>
-            </a:pPr>
-            <a:r>
-              <a:rPr lang="en-US" sz="1300" dirty="0">
+            <a:pPr marL="0" indent="0" algn="ctr">
+              <a:buNone/>
+            </a:pPr>
+            <a:r>
+              <a:rPr lang="es-ES" sz="1300">
                 <a:solidFill>
                   <a:srgbClr val="5B6B82"/>
                 </a:solidFill>
@@ -10408,17 +10478,24 @@
             <a:prstDash val="solid"/>
           </a:ln>
         </p:spPr>
+        <p:txBody>
+          <a:bodyPr/>
+          <a:lstStyle/>
+          <a:p>
+            <a:endParaRPr lang="es-ES"/>
+          </a:p>
+        </p:txBody>
       </p:sp>
       <p:pic>
         <p:nvPicPr>
-          <p:cNvPr id="17" name="Image 3" descr="preencoded.png">    </p:cNvPr>
+          <p:cNvPr id="17" name="Image 3" descr="preencoded.png"/>
           <p:cNvPicPr>
             <a:picLocks noChangeAspect="1"/>
           </p:cNvPicPr>
           <p:nvPr/>
         </p:nvPicPr>
         <p:blipFill>
-          <a:blip r:embed="rId4"/>
+          <a:blip r:embed="rId6"/>
           <a:stretch>
             <a:fillRect/>
           </a:stretch>
@@ -10454,11 +10531,11 @@
           <a:bodyPr wrap="square" lIns="0" tIns="0" rIns="0" bIns="0" rtlCol="0" anchor="t"/>
           <a:lstStyle/>
           <a:p>
-            <a:pPr algn="ctr" indent="0" marL="0">
-              <a:buNone/>
-            </a:pPr>
-            <a:r>
-              <a:rPr lang="en-US" sz="1600" b="1" dirty="0">
+            <a:pPr marL="0" indent="0" algn="ctr">
+              <a:buNone/>
+            </a:pPr>
+            <a:r>
+              <a:rPr lang="en-US" sz="1600" b="1">
                 <a:solidFill>
                   <a:srgbClr val="0F1B2D"/>
                 </a:solidFill>
@@ -10493,11 +10570,11 @@
           <a:bodyPr wrap="square" lIns="0" tIns="0" rIns="0" bIns="0" rtlCol="0" anchor="t"/>
           <a:lstStyle/>
           <a:p>
-            <a:pPr algn="ctr" indent="0" marL="0">
-              <a:buNone/>
-            </a:pPr>
-            <a:r>
-              <a:rPr lang="en-US" sz="1300" dirty="0">
+            <a:pPr marL="0" indent="0" algn="ctr">
+              <a:buNone/>
+            </a:pPr>
+            <a:r>
+              <a:rPr lang="es-ES" sz="1300">
                 <a:solidFill>
                   <a:srgbClr val="5B6B82"/>
                 </a:solidFill>
@@ -10535,17 +10612,24 @@
             <a:prstDash val="solid"/>
           </a:ln>
         </p:spPr>
+        <p:txBody>
+          <a:bodyPr/>
+          <a:lstStyle/>
+          <a:p>
+            <a:endParaRPr lang="es-ES"/>
+          </a:p>
+        </p:txBody>
       </p:sp>
       <p:pic>
         <p:nvPicPr>
-          <p:cNvPr id="21" name="Image 4" descr="preencoded.png">    </p:cNvPr>
+          <p:cNvPr id="21" name="Image 4" descr="preencoded.png"/>
           <p:cNvPicPr>
             <a:picLocks noChangeAspect="1"/>
           </p:cNvPicPr>
           <p:nvPr/>
         </p:nvPicPr>
         <p:blipFill>
-          <a:blip r:embed="rId5"/>
+          <a:blip r:embed="rId7"/>
           <a:stretch>
             <a:fillRect/>
           </a:stretch>
@@ -10581,11 +10665,11 @@
           <a:bodyPr wrap="square" lIns="0" tIns="0" rIns="0" bIns="0" rtlCol="0" anchor="t"/>
           <a:lstStyle/>
           <a:p>
-            <a:pPr algn="ctr" indent="0" marL="0">
-              <a:buNone/>
-            </a:pPr>
-            <a:r>
-              <a:rPr lang="en-US" sz="1600" b="1" dirty="0">
+            <a:pPr marL="0" indent="0" algn="ctr">
+              <a:buNone/>
+            </a:pPr>
+            <a:r>
+              <a:rPr lang="en-US" sz="1600" b="1">
                 <a:solidFill>
                   <a:srgbClr val="0F1B2D"/>
                 </a:solidFill>
@@ -10620,11 +10704,11 @@
           <a:bodyPr wrap="square" lIns="0" tIns="0" rIns="0" bIns="0" rtlCol="0" anchor="t"/>
           <a:lstStyle/>
           <a:p>
-            <a:pPr algn="ctr" indent="0" marL="0">
-              <a:buNone/>
-            </a:pPr>
-            <a:r>
-              <a:rPr lang="en-US" sz="1300" dirty="0">
+            <a:pPr marL="0" indent="0" algn="ctr">
+              <a:buNone/>
+            </a:pPr>
+            <a:r>
+              <a:rPr lang="es-ES" sz="1300">
                 <a:solidFill>
                   <a:srgbClr val="5B6B82"/>
                 </a:solidFill>
@@ -10662,17 +10746,24 @@
             <a:prstDash val="solid"/>
           </a:ln>
         </p:spPr>
+        <p:txBody>
+          <a:bodyPr/>
+          <a:lstStyle/>
+          <a:p>
+            <a:endParaRPr lang="es-ES"/>
+          </a:p>
+        </p:txBody>
       </p:sp>
       <p:pic>
         <p:nvPicPr>
-          <p:cNvPr id="25" name="Image 5" descr="preencoded.png">    </p:cNvPr>
+          <p:cNvPr id="25" name="Image 5" descr="preencoded.png"/>
           <p:cNvPicPr>
             <a:picLocks noChangeAspect="1"/>
           </p:cNvPicPr>
           <p:nvPr/>
         </p:nvPicPr>
         <p:blipFill>
-          <a:blip r:embed="rId6"/>
+          <a:blip r:embed="rId8"/>
           <a:stretch>
             <a:fillRect/>
           </a:stretch>
@@ -10708,11 +10799,11 @@
           <a:bodyPr wrap="square" lIns="0" tIns="0" rIns="0" bIns="0" rtlCol="0" anchor="t"/>
           <a:lstStyle/>
           <a:p>
-            <a:pPr algn="ctr" indent="0" marL="0">
-              <a:buNone/>
-            </a:pPr>
-            <a:r>
-              <a:rPr lang="en-US" sz="1600" b="1" dirty="0">
+            <a:pPr marL="0" indent="0" algn="ctr">
+              <a:buNone/>
+            </a:pPr>
+            <a:r>
+              <a:rPr lang="en-US" sz="1600" b="1">
                 <a:solidFill>
                   <a:srgbClr val="0F1B2D"/>
                 </a:solidFill>
@@ -10747,11 +10838,11 @@
           <a:bodyPr wrap="square" lIns="0" tIns="0" rIns="0" bIns="0" rtlCol="0" anchor="t"/>
           <a:lstStyle/>
           <a:p>
-            <a:pPr algn="ctr" indent="0" marL="0">
-              <a:buNone/>
-            </a:pPr>
-            <a:r>
-              <a:rPr lang="en-US" sz="1300" dirty="0">
+            <a:pPr marL="0" indent="0" algn="ctr">
+              <a:buNone/>
+            </a:pPr>
+            <a:r>
+              <a:rPr lang="en-US" sz="1300">
                 <a:solidFill>
                   <a:srgbClr val="5B6B82"/>
                 </a:solidFill>
@@ -10791,6 +10882,13 @@
             <a:prstDash val="solid"/>
           </a:ln>
         </p:spPr>
+        <p:txBody>
+          <a:bodyPr/>
+          <a:lstStyle/>
+          <a:p>
+            <a:endParaRPr lang="es-ES"/>
+          </a:p>
+        </p:txBody>
       </p:sp>
       <p:sp>
         <p:nvSpPr>
@@ -10813,11 +10911,11 @@
           <a:bodyPr wrap="square" lIns="0" tIns="0" rIns="0" bIns="0" rtlCol="0" anchor="ctr"/>
           <a:lstStyle/>
           <a:p>
-            <a:pPr indent="0" marL="0">
-              <a:buNone/>
-            </a:pPr>
-            <a:r>
-              <a:rPr lang="en-US" sz="1500" b="1" dirty="0">
+            <a:pPr marL="0" indent="0">
+              <a:buNone/>
+            </a:pPr>
+            <a:r>
+              <a:rPr lang="es-ES" sz="1500" b="1">
                 <a:solidFill>
                   <a:srgbClr val="0F1B2D"/>
                 </a:solidFill>
@@ -10825,21 +10923,7 @@
                 <a:ea typeface="Calibri" pitchFamily="34" charset="-122"/>
                 <a:cs typeface="Calibri" pitchFamily="34" charset="-120"/>
               </a:rPr>
-              <a:t>Reproducible: </a:t>
-            </a:r>
-            <a:pPr indent="0" marL="0">
-              <a:buNone/>
-            </a:pPr>
-            <a:r>
-              <a:rPr lang="en-US" sz="1500" dirty="0">
-                <a:solidFill>
-                  <a:srgbClr val="0F1B2D"/>
-                </a:solidFill>
-                <a:latin typeface="Calibri" pitchFamily="34" charset="0"/>
-                <a:ea typeface="Calibri" pitchFamily="34" charset="-122"/>
-                <a:cs typeface="Calibri" pitchFamily="34" charset="-120"/>
-              </a:rPr>
-              <a:t>división oficial entre entrenamiento y prueba, configuración versionada y métricas por clase. Las metas de desempeño se fijan con la línea base del Sprint 3.</a:t>
+              <a:t>Reproducible: división oficial entre entrenamiento y prueba, configuración versionada y métricas por clase. Las metas de desempeño se fijan con la línea base del Sprint 3.</a:t>
             </a:r>
             <a:endParaRPr lang="en-US" sz="1500" dirty="0"/>
           </a:p>
@@ -10847,7 +10931,7 @@
       </p:sp>
       <p:sp>
         <p:nvSpPr>
-          <p:cNvPr id="25" name="Slide Number Placeholder 0"/>
+          <p:cNvPr id="30" name="Slide Number Placeholder 0"/>
           <p:cNvSpPr>
             <a:spLocks noGrp="1"/>
           </p:cNvSpPr>
@@ -10865,7 +10949,7 @@
           </a:prstGeom>
           <a:extLst>
             <a:ext uri="{C572A759-6A51-4108-AA02-DFA0A04FC94B}">
-              <ma14:wrappingTextBoxFlag xmlns:ma14="http://schemas.microsoft.com/office/mac/drawingml/2011/main" val="0"/>
+              <ma14:wrappingTextBoxFlag xmlns:ma14="http://schemas.microsoft.com/office/mac/drawingml/2011/main" xmlns="" val="0"/>
             </a:ext>
           </a:extLst>
         </p:spPr>
@@ -10885,10 +10969,10 @@
           </a:lstStyle>
           <a:p>
             <a:pPr algn="r"/>
-            <a:fld id="{F7021451-1387-4CA6-816F-3879F97B5CBC}" type="slidenum">
-              <a:rPr b="0" lang="en-US"/>
+            <a:r>
+              <a:rPr lang="en-US" b="0"/>
               <a:t>6</a:t>
-            </a:fld>
+            </a:r>
             <a:endParaRPr lang="en-US"/>
           </a:p>
         </p:txBody>
@@ -10921,9 +11005,11 @@
       <p:sp>
         <p:nvSpPr>
           <p:cNvPr id="2" name="Text 0"/>
-          <p:cNvSpPr/>
+          <p:cNvSpPr>
+            <a:spLocks noGrp="1"/>
+          </p:cNvSpPr>
           <p:nvPr>
-            <p:ph idx="100" type="title" hasCustomPrompt="1"/>
+            <p:ph type="title" idx="100" hasCustomPrompt="1"/>
           </p:nvPr>
         </p:nvSpPr>
         <p:spPr>
@@ -10941,11 +11027,11 @@
           <a:bodyPr wrap="square" lIns="0" tIns="0" rIns="0" bIns="0" rtlCol="0" anchor="ctr"/>
           <a:lstStyle/>
           <a:p>
-            <a:pPr algn="l" indent="0" marL="0">
-              <a:buNone/>
-            </a:pPr>
-            <a:r>
-              <a:rPr lang="en-US" sz="3200" b="1" dirty="0">
+            <a:pPr marL="0" indent="0" algn="l">
+              <a:buNone/>
+            </a:pPr>
+            <a:r>
+              <a:rPr lang="es-ES" sz="3200" b="1">
                 <a:solidFill>
                   <a:srgbClr val="0F1B2D"/>
                 </a:solidFill>
@@ -10985,13 +11071,20 @@
             <a:prstDash val="solid"/>
           </a:ln>
           <a:effectLst>
-            <a:outerShdw sx="100000" sy="100000" kx="0" ky="0" algn="bl" rotWithShape="0" blurRad="101600" dist="25400" dir="5400000">
+            <a:outerShdw blurRad="101600" dist="25400" dir="5400000" algn="bl" rotWithShape="0">
               <a:srgbClr val="0F1B2D">
                 <a:alpha val="8000"/>
               </a:srgbClr>
             </a:outerShdw>
           </a:effectLst>
         </p:spPr>
+        <p:txBody>
+          <a:bodyPr/>
+          <a:lstStyle/>
+          <a:p>
+            <a:endParaRPr lang="es-ES"/>
+          </a:p>
+        </p:txBody>
       </p:sp>
       <p:sp>
         <p:nvSpPr>
@@ -11017,6 +11110,13 @@
             <a:prstDash val="solid"/>
           </a:ln>
         </p:spPr>
+        <p:txBody>
+          <a:bodyPr/>
+          <a:lstStyle/>
+          <a:p>
+            <a:endParaRPr lang="es-ES"/>
+          </a:p>
+        </p:txBody>
       </p:sp>
       <p:sp>
         <p:nvSpPr>
@@ -11039,11 +11139,11 @@
           <a:bodyPr wrap="square" lIns="0" tIns="0" rIns="0" bIns="0" rtlCol="0" anchor="ctr"/>
           <a:lstStyle/>
           <a:p>
-            <a:pPr algn="ctr" indent="0" marL="0">
-              <a:buNone/>
-            </a:pPr>
-            <a:r>
-              <a:rPr lang="en-US" sz="2200" b="1" dirty="0">
+            <a:pPr marL="0" indent="0" algn="ctr">
+              <a:buNone/>
+            </a:pPr>
+            <a:r>
+              <a:rPr lang="en-US" sz="2200" b="1">
                 <a:solidFill>
                   <a:srgbClr val="FFFFFF"/>
                 </a:solidFill>
@@ -11078,11 +11178,11 @@
           <a:bodyPr wrap="square" lIns="0" tIns="0" rIns="0" bIns="0" rtlCol="0" anchor="t"/>
           <a:lstStyle/>
           <a:p>
-            <a:pPr algn="ctr" indent="0" marL="0">
-              <a:buNone/>
-            </a:pPr>
-            <a:r>
-              <a:rPr lang="en-US" sz="1600" b="1" dirty="0">
+            <a:pPr marL="0" indent="0" algn="ctr">
+              <a:buNone/>
+            </a:pPr>
+            <a:r>
+              <a:rPr lang="en-US" sz="1600" b="1">
                 <a:solidFill>
                   <a:srgbClr val="0F1B2D"/>
                 </a:solidFill>
@@ -11117,11 +11217,11 @@
           <a:bodyPr wrap="square" lIns="0" tIns="0" rIns="0" bIns="0" rtlCol="0" anchor="ctr"/>
           <a:lstStyle/>
           <a:p>
-            <a:pPr algn="ctr" indent="0" marL="0">
-              <a:buNone/>
-            </a:pPr>
-            <a:r>
-              <a:rPr lang="en-US" sz="1200" b="1" dirty="0">
+            <a:pPr marL="0" indent="0" algn="ctr">
+              <a:buNone/>
+            </a:pPr>
+            <a:r>
+              <a:rPr lang="en-US" sz="1200" b="1">
                 <a:solidFill>
                   <a:srgbClr val="0F9D8A"/>
                 </a:solidFill>
@@ -11156,11 +11256,11 @@
           <a:bodyPr wrap="square" lIns="0" tIns="0" rIns="0" bIns="0" rtlCol="0" anchor="t"/>
           <a:lstStyle/>
           <a:p>
-            <a:pPr algn="ctr" indent="0" marL="0">
-              <a:buNone/>
-            </a:pPr>
-            <a:r>
-              <a:rPr lang="en-US" sz="1300" dirty="0">
+            <a:pPr marL="0" indent="0" algn="ctr">
+              <a:buNone/>
+            </a:pPr>
+            <a:r>
+              <a:rPr lang="es-ES" sz="1300">
                 <a:solidFill>
                   <a:srgbClr val="5B6B82"/>
                 </a:solidFill>
@@ -11200,13 +11300,20 @@
             <a:prstDash val="solid"/>
           </a:ln>
           <a:effectLst>
-            <a:outerShdw sx="100000" sy="100000" kx="0" ky="0" algn="bl" rotWithShape="0" blurRad="101600" dist="25400" dir="5400000">
+            <a:outerShdw blurRad="101600" dist="25400" dir="5400000" algn="bl" rotWithShape="0">
               <a:srgbClr val="0F1B2D">
                 <a:alpha val="8000"/>
               </a:srgbClr>
             </a:outerShdw>
           </a:effectLst>
         </p:spPr>
+        <p:txBody>
+          <a:bodyPr/>
+          <a:lstStyle/>
+          <a:p>
+            <a:endParaRPr lang="es-ES"/>
+          </a:p>
+        </p:txBody>
       </p:sp>
       <p:sp>
         <p:nvSpPr>
@@ -11232,6 +11339,13 @@
             <a:prstDash val="solid"/>
           </a:ln>
         </p:spPr>
+        <p:txBody>
+          <a:bodyPr/>
+          <a:lstStyle/>
+          <a:p>
+            <a:endParaRPr lang="es-ES"/>
+          </a:p>
+        </p:txBody>
       </p:sp>
       <p:sp>
         <p:nvSpPr>
@@ -11254,11 +11368,11 @@
           <a:bodyPr wrap="square" lIns="0" tIns="0" rIns="0" bIns="0" rtlCol="0" anchor="ctr"/>
           <a:lstStyle/>
           <a:p>
-            <a:pPr algn="ctr" indent="0" marL="0">
-              <a:buNone/>
-            </a:pPr>
-            <a:r>
-              <a:rPr lang="en-US" sz="2200" b="1" dirty="0">
+            <a:pPr marL="0" indent="0" algn="ctr">
+              <a:buNone/>
+            </a:pPr>
+            <a:r>
+              <a:rPr lang="en-US" sz="2200" b="1">
                 <a:solidFill>
                   <a:srgbClr val="FFFFFF"/>
                 </a:solidFill>
@@ -11293,11 +11407,11 @@
           <a:bodyPr wrap="square" lIns="0" tIns="0" rIns="0" bIns="0" rtlCol="0" anchor="t"/>
           <a:lstStyle/>
           <a:p>
-            <a:pPr algn="ctr" indent="0" marL="0">
-              <a:buNone/>
-            </a:pPr>
-            <a:r>
-              <a:rPr lang="en-US" sz="1600" b="1" dirty="0">
+            <a:pPr marL="0" indent="0" algn="ctr">
+              <a:buNone/>
+            </a:pPr>
+            <a:r>
+              <a:rPr lang="en-US" sz="1600" b="1">
                 <a:solidFill>
                   <a:srgbClr val="0F1B2D"/>
                 </a:solidFill>
@@ -11332,11 +11446,11 @@
           <a:bodyPr wrap="square" lIns="0" tIns="0" rIns="0" bIns="0" rtlCol="0" anchor="ctr"/>
           <a:lstStyle/>
           <a:p>
-            <a:pPr algn="ctr" indent="0" marL="0">
-              <a:buNone/>
-            </a:pPr>
-            <a:r>
-              <a:rPr lang="en-US" sz="1200" b="1" dirty="0">
+            <a:pPr marL="0" indent="0" algn="ctr">
+              <a:buNone/>
+            </a:pPr>
+            <a:r>
+              <a:rPr lang="en-US" sz="1200" b="1">
                 <a:solidFill>
                   <a:srgbClr val="0F9D8A"/>
                 </a:solidFill>
@@ -11371,11 +11485,11 @@
           <a:bodyPr wrap="square" lIns="0" tIns="0" rIns="0" bIns="0" rtlCol="0" anchor="t"/>
           <a:lstStyle/>
           <a:p>
-            <a:pPr algn="ctr" indent="0" marL="0">
-              <a:buNone/>
-            </a:pPr>
-            <a:r>
-              <a:rPr lang="en-US" sz="1300" dirty="0">
+            <a:pPr marL="0" indent="0" algn="ctr">
+              <a:buNone/>
+            </a:pPr>
+            <a:r>
+              <a:rPr lang="es-ES" sz="1300">
                 <a:solidFill>
                   <a:srgbClr val="5B6B82"/>
                 </a:solidFill>
@@ -11415,13 +11529,20 @@
             <a:prstDash val="solid"/>
           </a:ln>
           <a:effectLst>
-            <a:outerShdw sx="100000" sy="100000" kx="0" ky="0" algn="bl" rotWithShape="0" blurRad="101600" dist="25400" dir="5400000">
+            <a:outerShdw blurRad="101600" dist="25400" dir="5400000" algn="bl" rotWithShape="0">
               <a:srgbClr val="0F1B2D">
                 <a:alpha val="8000"/>
               </a:srgbClr>
             </a:outerShdw>
           </a:effectLst>
         </p:spPr>
+        <p:txBody>
+          <a:bodyPr/>
+          <a:lstStyle/>
+          <a:p>
+            <a:endParaRPr lang="es-ES"/>
+          </a:p>
+        </p:txBody>
       </p:sp>
       <p:sp>
         <p:nvSpPr>
@@ -11447,6 +11568,13 @@
             <a:prstDash val="solid"/>
           </a:ln>
         </p:spPr>
+        <p:txBody>
+          <a:bodyPr/>
+          <a:lstStyle/>
+          <a:p>
+            <a:endParaRPr lang="es-ES"/>
+          </a:p>
+        </p:txBody>
       </p:sp>
       <p:sp>
         <p:nvSpPr>
@@ -11469,11 +11597,11 @@
           <a:bodyPr wrap="square" lIns="0" tIns="0" rIns="0" bIns="0" rtlCol="0" anchor="ctr"/>
           <a:lstStyle/>
           <a:p>
-            <a:pPr algn="ctr" indent="0" marL="0">
-              <a:buNone/>
-            </a:pPr>
-            <a:r>
-              <a:rPr lang="en-US" sz="2200" b="1" dirty="0">
+            <a:pPr marL="0" indent="0" algn="ctr">
+              <a:buNone/>
+            </a:pPr>
+            <a:r>
+              <a:rPr lang="en-US" sz="2200" b="1">
                 <a:solidFill>
                   <a:srgbClr val="12233F"/>
                 </a:solidFill>
@@ -11508,11 +11636,11 @@
           <a:bodyPr wrap="square" lIns="0" tIns="0" rIns="0" bIns="0" rtlCol="0" anchor="t"/>
           <a:lstStyle/>
           <a:p>
-            <a:pPr algn="ctr" indent="0" marL="0">
-              <a:buNone/>
-            </a:pPr>
-            <a:r>
-              <a:rPr lang="en-US" sz="1600" b="1" dirty="0">
+            <a:pPr marL="0" indent="0" algn="ctr">
+              <a:buNone/>
+            </a:pPr>
+            <a:r>
+              <a:rPr lang="en-US" sz="1600" b="1">
                 <a:solidFill>
                   <a:srgbClr val="0F1B2D"/>
                 </a:solidFill>
@@ -11547,11 +11675,11 @@
           <a:bodyPr wrap="square" lIns="0" tIns="0" rIns="0" bIns="0" rtlCol="0" anchor="ctr"/>
           <a:lstStyle/>
           <a:p>
-            <a:pPr algn="ctr" indent="0" marL="0">
-              <a:buNone/>
-            </a:pPr>
-            <a:r>
-              <a:rPr lang="en-US" sz="1200" b="1" dirty="0">
+            <a:pPr marL="0" indent="0" algn="ctr">
+              <a:buNone/>
+            </a:pPr>
+            <a:r>
+              <a:rPr lang="en-US" sz="1200" b="1">
                 <a:solidFill>
                   <a:srgbClr val="0F9D8A"/>
                 </a:solidFill>
@@ -11586,11 +11714,11 @@
           <a:bodyPr wrap="square" lIns="0" tIns="0" rIns="0" bIns="0" rtlCol="0" anchor="t"/>
           <a:lstStyle/>
           <a:p>
-            <a:pPr algn="ctr" indent="0" marL="0">
-              <a:buNone/>
-            </a:pPr>
-            <a:r>
-              <a:rPr lang="en-US" sz="1300" dirty="0">
+            <a:pPr marL="0" indent="0" algn="ctr">
+              <a:buNone/>
+            </a:pPr>
+            <a:r>
+              <a:rPr lang="es-ES" sz="1300">
                 <a:solidFill>
                   <a:srgbClr val="5B6B82"/>
                 </a:solidFill>
@@ -11630,13 +11758,20 @@
             <a:prstDash val="solid"/>
           </a:ln>
           <a:effectLst>
-            <a:outerShdw sx="100000" sy="100000" kx="0" ky="0" algn="bl" rotWithShape="0" blurRad="101600" dist="25400" dir="5400000">
+            <a:outerShdw blurRad="101600" dist="25400" dir="5400000" algn="bl" rotWithShape="0">
               <a:srgbClr val="0F1B2D">
                 <a:alpha val="8000"/>
               </a:srgbClr>
             </a:outerShdw>
           </a:effectLst>
         </p:spPr>
+        <p:txBody>
+          <a:bodyPr/>
+          <a:lstStyle/>
+          <a:p>
+            <a:endParaRPr lang="es-ES"/>
+          </a:p>
+        </p:txBody>
       </p:sp>
       <p:sp>
         <p:nvSpPr>
@@ -11662,6 +11797,13 @@
             <a:prstDash val="solid"/>
           </a:ln>
         </p:spPr>
+        <p:txBody>
+          <a:bodyPr/>
+          <a:lstStyle/>
+          <a:p>
+            <a:endParaRPr lang="es-ES"/>
+          </a:p>
+        </p:txBody>
       </p:sp>
       <p:sp>
         <p:nvSpPr>
@@ -11684,11 +11826,11 @@
           <a:bodyPr wrap="square" lIns="0" tIns="0" rIns="0" bIns="0" rtlCol="0" anchor="ctr"/>
           <a:lstStyle/>
           <a:p>
-            <a:pPr algn="ctr" indent="0" marL="0">
-              <a:buNone/>
-            </a:pPr>
-            <a:r>
-              <a:rPr lang="en-US" sz="2200" b="1" dirty="0">
+            <a:pPr marL="0" indent="0" algn="ctr">
+              <a:buNone/>
+            </a:pPr>
+            <a:r>
+              <a:rPr lang="en-US" sz="2200" b="1">
                 <a:solidFill>
                   <a:srgbClr val="FFFFFF"/>
                 </a:solidFill>
@@ -11723,11 +11865,11 @@
           <a:bodyPr wrap="square" lIns="0" tIns="0" rIns="0" bIns="0" rtlCol="0" anchor="t"/>
           <a:lstStyle/>
           <a:p>
-            <a:pPr algn="ctr" indent="0" marL="0">
-              <a:buNone/>
-            </a:pPr>
-            <a:r>
-              <a:rPr lang="en-US" sz="1600" b="1" dirty="0">
+            <a:pPr marL="0" indent="0" algn="ctr">
+              <a:buNone/>
+            </a:pPr>
+            <a:r>
+              <a:rPr lang="en-US" sz="1600" b="1">
                 <a:solidFill>
                   <a:srgbClr val="0F1B2D"/>
                 </a:solidFill>
@@ -11762,11 +11904,11 @@
           <a:bodyPr wrap="square" lIns="0" tIns="0" rIns="0" bIns="0" rtlCol="0" anchor="ctr"/>
           <a:lstStyle/>
           <a:p>
-            <a:pPr algn="ctr" indent="0" marL="0">
-              <a:buNone/>
-            </a:pPr>
-            <a:r>
-              <a:rPr lang="en-US" sz="1200" b="1" dirty="0">
+            <a:pPr marL="0" indent="0" algn="ctr">
+              <a:buNone/>
+            </a:pPr>
+            <a:r>
+              <a:rPr lang="en-US" sz="1200" b="1">
                 <a:solidFill>
                   <a:srgbClr val="0F9D8A"/>
                 </a:solidFill>
@@ -11801,11 +11943,11 @@
           <a:bodyPr wrap="square" lIns="0" tIns="0" rIns="0" bIns="0" rtlCol="0" anchor="t"/>
           <a:lstStyle/>
           <a:p>
-            <a:pPr algn="ctr" indent="0" marL="0">
-              <a:buNone/>
-            </a:pPr>
-            <a:r>
-              <a:rPr lang="en-US" sz="1300" dirty="0">
+            <a:pPr marL="0" indent="0" algn="ctr">
+              <a:buNone/>
+            </a:pPr>
+            <a:r>
+              <a:rPr lang="es-ES" sz="1300">
                 <a:solidFill>
                   <a:srgbClr val="5B6B82"/>
                 </a:solidFill>
@@ -11845,13 +11987,20 @@
             <a:prstDash val="solid"/>
           </a:ln>
           <a:effectLst>
-            <a:outerShdw sx="100000" sy="100000" kx="0" ky="0" algn="bl" rotWithShape="0" blurRad="101600" dist="25400" dir="5400000">
+            <a:outerShdw blurRad="101600" dist="25400" dir="5400000" algn="bl" rotWithShape="0">
               <a:srgbClr val="0F1B2D">
                 <a:alpha val="8000"/>
               </a:srgbClr>
             </a:outerShdw>
           </a:effectLst>
         </p:spPr>
+        <p:txBody>
+          <a:bodyPr/>
+          <a:lstStyle/>
+          <a:p>
+            <a:endParaRPr lang="es-ES"/>
+          </a:p>
+        </p:txBody>
       </p:sp>
       <p:sp>
         <p:nvSpPr>
@@ -11877,6 +12026,13 @@
             <a:prstDash val="solid"/>
           </a:ln>
         </p:spPr>
+        <p:txBody>
+          <a:bodyPr/>
+          <a:lstStyle/>
+          <a:p>
+            <a:endParaRPr lang="es-ES"/>
+          </a:p>
+        </p:txBody>
       </p:sp>
       <p:sp>
         <p:nvSpPr>
@@ -11899,11 +12055,11 @@
           <a:bodyPr wrap="square" lIns="0" tIns="0" rIns="0" bIns="0" rtlCol="0" anchor="ctr"/>
           <a:lstStyle/>
           <a:p>
-            <a:pPr algn="ctr" indent="0" marL="0">
-              <a:buNone/>
-            </a:pPr>
-            <a:r>
-              <a:rPr lang="en-US" sz="2200" b="1" dirty="0">
+            <a:pPr marL="0" indent="0" algn="ctr">
+              <a:buNone/>
+            </a:pPr>
+            <a:r>
+              <a:rPr lang="en-US" sz="2200" b="1">
                 <a:solidFill>
                   <a:srgbClr val="FFFFFF"/>
                 </a:solidFill>
@@ -11938,11 +12094,11 @@
           <a:bodyPr wrap="square" lIns="0" tIns="0" rIns="0" bIns="0" rtlCol="0" anchor="t"/>
           <a:lstStyle/>
           <a:p>
-            <a:pPr algn="ctr" indent="0" marL="0">
-              <a:buNone/>
-            </a:pPr>
-            <a:r>
-              <a:rPr lang="en-US" sz="1600" b="1" dirty="0">
+            <a:pPr marL="0" indent="0" algn="ctr">
+              <a:buNone/>
+            </a:pPr>
+            <a:r>
+              <a:rPr lang="en-US" sz="1600" b="1">
                 <a:solidFill>
                   <a:srgbClr val="0F1B2D"/>
                 </a:solidFill>
@@ -11977,11 +12133,11 @@
           <a:bodyPr wrap="square" lIns="0" tIns="0" rIns="0" bIns="0" rtlCol="0" anchor="ctr"/>
           <a:lstStyle/>
           <a:p>
-            <a:pPr algn="ctr" indent="0" marL="0">
-              <a:buNone/>
-            </a:pPr>
-            <a:r>
-              <a:rPr lang="en-US" sz="1200" b="1" dirty="0">
+            <a:pPr marL="0" indent="0" algn="ctr">
+              <a:buNone/>
+            </a:pPr>
+            <a:r>
+              <a:rPr lang="en-US" sz="1200" b="1">
                 <a:solidFill>
                   <a:srgbClr val="0F9D8A"/>
                 </a:solidFill>
@@ -12016,11 +12172,11 @@
           <a:bodyPr wrap="square" lIns="0" tIns="0" rIns="0" bIns="0" rtlCol="0" anchor="t"/>
           <a:lstStyle/>
           <a:p>
-            <a:pPr algn="ctr" indent="0" marL="0">
-              <a:buNone/>
-            </a:pPr>
-            <a:r>
-              <a:rPr lang="en-US" sz="1300" dirty="0">
+            <a:pPr marL="0" indent="0" algn="ctr">
+              <a:buNone/>
+            </a:pPr>
+            <a:r>
+              <a:rPr lang="es-ES" sz="1300">
                 <a:solidFill>
                   <a:srgbClr val="5B6B82"/>
                 </a:solidFill>
@@ -12055,11 +12211,11 @@
           <a:bodyPr wrap="square" lIns="0" tIns="0" rIns="0" bIns="0" rtlCol="0" anchor="ctr"/>
           <a:lstStyle/>
           <a:p>
-            <a:pPr indent="0" marL="0">
-              <a:buNone/>
-            </a:pPr>
-            <a:r>
-              <a:rPr lang="en-US" sz="1200" i="1" dirty="0">
+            <a:pPr marL="0" indent="0">
+              <a:buNone/>
+            </a:pPr>
+            <a:r>
+              <a:rPr lang="es-ES" sz="1200" i="1">
                 <a:solidFill>
                   <a:srgbClr val="5B6B82"/>
                 </a:solidFill>
@@ -12067,7 +12223,7 @@
                 <a:ea typeface="Calibri" pitchFamily="34" charset="-122"/>
                 <a:cs typeface="Calibri" pitchFamily="34" charset="-120"/>
               </a:rPr>
-              <a:t>Personas ficticias del caso académico (SIDERPERU como caso propuesto), definidas en Roles y Prototipos (FGAP030).</a:t>
+              <a:t>Personas ficticias del caso académico (taller de manufactura metalmecánica como caso propuesto), definidas en Roles y Prototipos (FGAP030).</a:t>
             </a:r>
             <a:endParaRPr lang="en-US" sz="1200" dirty="0"/>
           </a:p>
@@ -12075,7 +12231,7 @@
       </p:sp>
       <p:sp>
         <p:nvSpPr>
-          <p:cNvPr id="25" name="Slide Number Placeholder 0"/>
+          <p:cNvPr id="34" name="Slide Number Placeholder 0"/>
           <p:cNvSpPr>
             <a:spLocks noGrp="1"/>
           </p:cNvSpPr>
@@ -12093,7 +12249,7 @@
           </a:prstGeom>
           <a:extLst>
             <a:ext uri="{C572A759-6A51-4108-AA02-DFA0A04FC94B}">
-              <ma14:wrappingTextBoxFlag xmlns:ma14="http://schemas.microsoft.com/office/mac/drawingml/2011/main" val="0"/>
+              <ma14:wrappingTextBoxFlag xmlns:ma14="http://schemas.microsoft.com/office/mac/drawingml/2011/main" xmlns="" val="0"/>
             </a:ext>
           </a:extLst>
         </p:spPr>
@@ -12113,10 +12269,10 @@
           </a:lstStyle>
           <a:p>
             <a:pPr algn="r"/>
-            <a:fld id="{F7021451-1387-4CA6-816F-3879F97B5CBC}" type="slidenum">
-              <a:rPr b="0" lang="en-US"/>
+            <a:r>
+              <a:rPr lang="en-US" b="0"/>
               <a:t>7</a:t>
-            </a:fld>
+            </a:r>
             <a:endParaRPr lang="en-US"/>
           </a:p>
         </p:txBody>
@@ -12149,9 +12305,11 @@
       <p:sp>
         <p:nvSpPr>
           <p:cNvPr id="2" name="Text 0"/>
-          <p:cNvSpPr/>
+          <p:cNvSpPr>
+            <a:spLocks noGrp="1"/>
+          </p:cNvSpPr>
           <p:nvPr>
-            <p:ph idx="100" type="title" hasCustomPrompt="1"/>
+            <p:ph type="title" idx="100" hasCustomPrompt="1"/>
           </p:nvPr>
         </p:nvSpPr>
         <p:spPr>
@@ -12169,11 +12327,11 @@
           <a:bodyPr wrap="square" lIns="0" tIns="0" rIns="0" bIns="0" rtlCol="0" anchor="ctr"/>
           <a:lstStyle/>
           <a:p>
-            <a:pPr algn="l" indent="0" marL="0">
-              <a:buNone/>
-            </a:pPr>
-            <a:r>
-              <a:rPr lang="en-US" sz="3200" b="1" dirty="0">
+            <a:pPr marL="0" indent="0" algn="l">
+              <a:buNone/>
+            </a:pPr>
+            <a:r>
+              <a:rPr lang="es-ES" sz="3200" b="1">
                 <a:solidFill>
                   <a:srgbClr val="0F1B2D"/>
                 </a:solidFill>
@@ -12213,13 +12371,20 @@
             <a:prstDash val="solid"/>
           </a:ln>
           <a:effectLst>
-            <a:outerShdw sx="100000" sy="100000" kx="0" ky="0" algn="bl" rotWithShape="0" blurRad="101600" dist="25400" dir="5400000">
+            <a:outerShdw blurRad="101600" dist="25400" dir="5400000" algn="bl" rotWithShape="0">
               <a:srgbClr val="0F1B2D">
                 <a:alpha val="8000"/>
               </a:srgbClr>
             </a:outerShdw>
           </a:effectLst>
         </p:spPr>
+        <p:txBody>
+          <a:bodyPr/>
+          <a:lstStyle/>
+          <a:p>
+            <a:endParaRPr lang="es-ES"/>
+          </a:p>
+        </p:txBody>
       </p:sp>
       <p:sp>
         <p:nvSpPr>
@@ -12245,17 +12410,24 @@
             <a:prstDash val="solid"/>
           </a:ln>
         </p:spPr>
+        <p:txBody>
+          <a:bodyPr/>
+          <a:lstStyle/>
+          <a:p>
+            <a:endParaRPr lang="es-ES"/>
+          </a:p>
+        </p:txBody>
       </p:sp>
       <p:pic>
         <p:nvPicPr>
-          <p:cNvPr id="5" name="Image 0" descr="preencoded.png">    </p:cNvPr>
+          <p:cNvPr id="5" name="Image 0" descr="preencoded.png"/>
           <p:cNvPicPr>
             <a:picLocks noChangeAspect="1"/>
           </p:cNvPicPr>
           <p:nvPr/>
         </p:nvPicPr>
         <p:blipFill>
-          <a:blip r:embed="rId1"/>
+          <a:blip r:embed="rId3"/>
           <a:stretch>
             <a:fillRect/>
           </a:stretch>
@@ -12291,11 +12463,11 @@
           <a:bodyPr wrap="square" lIns="0" tIns="0" rIns="0" bIns="0" rtlCol="0" anchor="ctr"/>
           <a:lstStyle/>
           <a:p>
-            <a:pPr indent="0" marL="0">
-              <a:buNone/>
-            </a:pPr>
-            <a:r>
-              <a:rPr lang="en-US" sz="1100" b="1" dirty="0">
+            <a:pPr marL="0" indent="0">
+              <a:buNone/>
+            </a:pPr>
+            <a:r>
+              <a:rPr lang="en-US" sz="1100" b="1">
                 <a:solidFill>
                   <a:srgbClr val="F5A623"/>
                 </a:solidFill>
@@ -12330,11 +12502,11 @@
           <a:bodyPr wrap="square" lIns="0" tIns="0" rIns="0" bIns="0" rtlCol="0" anchor="ctr"/>
           <a:lstStyle/>
           <a:p>
-            <a:pPr indent="0" marL="0">
-              <a:buNone/>
-            </a:pPr>
-            <a:r>
-              <a:rPr lang="en-US" sz="1600" b="1" dirty="0">
+            <a:pPr marL="0" indent="0">
+              <a:buNone/>
+            </a:pPr>
+            <a:r>
+              <a:rPr lang="en-US" sz="1600" b="1">
                 <a:solidFill>
                   <a:srgbClr val="0F1B2D"/>
                 </a:solidFill>
@@ -12369,11 +12541,11 @@
           <a:bodyPr wrap="square" lIns="0" tIns="0" rIns="0" bIns="0" rtlCol="0" anchor="ctr"/>
           <a:lstStyle/>
           <a:p>
-            <a:pPr indent="0" marL="0">
-              <a:buNone/>
-            </a:pPr>
-            <a:r>
-              <a:rPr lang="en-US" sz="1300" dirty="0">
+            <a:pPr marL="0" indent="0">
+              <a:buNone/>
+            </a:pPr>
+            <a:r>
+              <a:rPr lang="es-ES" sz="1300">
                 <a:solidFill>
                   <a:srgbClr val="5B6B82"/>
                 </a:solidFill>
@@ -12413,13 +12585,20 @@
             <a:prstDash val="solid"/>
           </a:ln>
           <a:effectLst>
-            <a:outerShdw sx="100000" sy="100000" kx="0" ky="0" algn="bl" rotWithShape="0" blurRad="101600" dist="25400" dir="5400000">
+            <a:outerShdw blurRad="101600" dist="25400" dir="5400000" algn="bl" rotWithShape="0">
               <a:srgbClr val="0F1B2D">
                 <a:alpha val="8000"/>
               </a:srgbClr>
             </a:outerShdw>
           </a:effectLst>
         </p:spPr>
+        <p:txBody>
+          <a:bodyPr/>
+          <a:lstStyle/>
+          <a:p>
+            <a:endParaRPr lang="es-ES"/>
+          </a:p>
+        </p:txBody>
       </p:sp>
       <p:sp>
         <p:nvSpPr>
@@ -12445,17 +12624,24 @@
             <a:prstDash val="solid"/>
           </a:ln>
         </p:spPr>
+        <p:txBody>
+          <a:bodyPr/>
+          <a:lstStyle/>
+          <a:p>
+            <a:endParaRPr lang="es-ES"/>
+          </a:p>
+        </p:txBody>
       </p:sp>
       <p:pic>
         <p:nvPicPr>
-          <p:cNvPr id="11" name="Image 1" descr="preencoded.png">    </p:cNvPr>
+          <p:cNvPr id="11" name="Image 1" descr="preencoded.png"/>
           <p:cNvPicPr>
             <a:picLocks noChangeAspect="1"/>
           </p:cNvPicPr>
           <p:nvPr/>
         </p:nvPicPr>
         <p:blipFill>
-          <a:blip r:embed="rId2"/>
+          <a:blip r:embed="rId4"/>
           <a:stretch>
             <a:fillRect/>
           </a:stretch>
@@ -12491,11 +12677,11 @@
           <a:bodyPr wrap="square" lIns="0" tIns="0" rIns="0" bIns="0" rtlCol="0" anchor="ctr"/>
           <a:lstStyle/>
           <a:p>
-            <a:pPr indent="0" marL="0">
-              <a:buNone/>
-            </a:pPr>
-            <a:r>
-              <a:rPr lang="en-US" sz="1100" b="1" dirty="0">
+            <a:pPr marL="0" indent="0">
+              <a:buNone/>
+            </a:pPr>
+            <a:r>
+              <a:rPr lang="en-US" sz="1100" b="1">
                 <a:solidFill>
                   <a:srgbClr val="0F9D8A"/>
                 </a:solidFill>
@@ -12530,11 +12716,11 @@
           <a:bodyPr wrap="square" lIns="0" tIns="0" rIns="0" bIns="0" rtlCol="0" anchor="ctr"/>
           <a:lstStyle/>
           <a:p>
-            <a:pPr indent="0" marL="0">
-              <a:buNone/>
-            </a:pPr>
-            <a:r>
-              <a:rPr lang="en-US" sz="1600" b="1" dirty="0">
+            <a:pPr marL="0" indent="0">
+              <a:buNone/>
+            </a:pPr>
+            <a:r>
+              <a:rPr lang="en-US" sz="1600" b="1">
                 <a:solidFill>
                   <a:srgbClr val="0F1B2D"/>
                 </a:solidFill>
@@ -12569,11 +12755,11 @@
           <a:bodyPr wrap="square" lIns="0" tIns="0" rIns="0" bIns="0" rtlCol="0" anchor="ctr"/>
           <a:lstStyle/>
           <a:p>
-            <a:pPr indent="0" marL="0">
-              <a:buNone/>
-            </a:pPr>
-            <a:r>
-              <a:rPr lang="en-US" sz="1300" dirty="0">
+            <a:pPr marL="0" indent="0">
+              <a:buNone/>
+            </a:pPr>
+            <a:r>
+              <a:rPr lang="es-ES" sz="1300">
                 <a:solidFill>
                   <a:srgbClr val="5B6B82"/>
                 </a:solidFill>
@@ -12613,13 +12799,20 @@
             <a:prstDash val="solid"/>
           </a:ln>
           <a:effectLst>
-            <a:outerShdw sx="100000" sy="100000" kx="0" ky="0" algn="bl" rotWithShape="0" blurRad="101600" dist="25400" dir="5400000">
+            <a:outerShdw blurRad="101600" dist="25400" dir="5400000" algn="bl" rotWithShape="0">
               <a:srgbClr val="0F1B2D">
                 <a:alpha val="8000"/>
               </a:srgbClr>
             </a:outerShdw>
           </a:effectLst>
         </p:spPr>
+        <p:txBody>
+          <a:bodyPr/>
+          <a:lstStyle/>
+          <a:p>
+            <a:endParaRPr lang="es-ES"/>
+          </a:p>
+        </p:txBody>
       </p:sp>
       <p:sp>
         <p:nvSpPr>
@@ -12645,17 +12838,24 @@
             <a:prstDash val="solid"/>
           </a:ln>
         </p:spPr>
+        <p:txBody>
+          <a:bodyPr/>
+          <a:lstStyle/>
+          <a:p>
+            <a:endParaRPr lang="es-ES"/>
+          </a:p>
+        </p:txBody>
       </p:sp>
       <p:pic>
         <p:nvPicPr>
-          <p:cNvPr id="17" name="Image 2" descr="preencoded.png">    </p:cNvPr>
+          <p:cNvPr id="17" name="Image 2" descr="preencoded.png"/>
           <p:cNvPicPr>
             <a:picLocks noChangeAspect="1"/>
           </p:cNvPicPr>
           <p:nvPr/>
         </p:nvPicPr>
         <p:blipFill>
-          <a:blip r:embed="rId3"/>
+          <a:blip r:embed="rId5"/>
           <a:stretch>
             <a:fillRect/>
           </a:stretch>
@@ -12691,11 +12891,11 @@
           <a:bodyPr wrap="square" lIns="0" tIns="0" rIns="0" bIns="0" rtlCol="0" anchor="ctr"/>
           <a:lstStyle/>
           <a:p>
-            <a:pPr indent="0" marL="0">
-              <a:buNone/>
-            </a:pPr>
-            <a:r>
-              <a:rPr lang="en-US" sz="1100" b="1" dirty="0">
+            <a:pPr marL="0" indent="0">
+              <a:buNone/>
+            </a:pPr>
+            <a:r>
+              <a:rPr lang="en-US" sz="1100" b="1">
                 <a:solidFill>
                   <a:srgbClr val="5B4BDB"/>
                 </a:solidFill>
@@ -12730,11 +12930,11 @@
           <a:bodyPr wrap="square" lIns="0" tIns="0" rIns="0" bIns="0" rtlCol="0" anchor="ctr"/>
           <a:lstStyle/>
           <a:p>
-            <a:pPr indent="0" marL="0">
-              <a:buNone/>
-            </a:pPr>
-            <a:r>
-              <a:rPr lang="en-US" sz="1600" b="1" dirty="0">
+            <a:pPr marL="0" indent="0">
+              <a:buNone/>
+            </a:pPr>
+            <a:r>
+              <a:rPr lang="en-US" sz="1600" b="1">
                 <a:solidFill>
                   <a:srgbClr val="0F1B2D"/>
                 </a:solidFill>
@@ -12769,11 +12969,11 @@
           <a:bodyPr wrap="square" lIns="0" tIns="0" rIns="0" bIns="0" rtlCol="0" anchor="ctr"/>
           <a:lstStyle/>
           <a:p>
-            <a:pPr indent="0" marL="0">
-              <a:buNone/>
-            </a:pPr>
-            <a:r>
-              <a:rPr lang="en-US" sz="1300" dirty="0">
+            <a:pPr marL="0" indent="0">
+              <a:buNone/>
+            </a:pPr>
+            <a:r>
+              <a:rPr lang="en-US" sz="1300">
                 <a:solidFill>
                   <a:srgbClr val="5B6B82"/>
                 </a:solidFill>
@@ -12781,7 +12981,7 @@
                 <a:ea typeface="Calibri" pitchFamily="34" charset="-122"/>
                 <a:cs typeface="Calibri" pitchFamily="34" charset="-120"/>
               </a:rPr>
-              <a:t>Datos, YOLOv4 y ConvLSTM.</a:t>
+              <a:t>Datos, YOLOv8 y ConvLSTM.</a:t>
             </a:r>
             <a:endParaRPr lang="en-US" sz="1300" dirty="0"/>
           </a:p>
@@ -12813,6 +13013,13 @@
             <a:prstDash val="solid"/>
           </a:ln>
         </p:spPr>
+        <p:txBody>
+          <a:bodyPr/>
+          <a:lstStyle/>
+          <a:p>
+            <a:endParaRPr lang="es-ES"/>
+          </a:p>
+        </p:txBody>
       </p:sp>
       <p:sp>
         <p:nvSpPr>
@@ -12835,11 +13042,11 @@
           <a:bodyPr wrap="square" lIns="0" tIns="0" rIns="0" bIns="0" rtlCol="0" anchor="ctr"/>
           <a:lstStyle/>
           <a:p>
-            <a:pPr algn="ctr" indent="0" marL="0">
-              <a:buNone/>
-            </a:pPr>
-            <a:r>
-              <a:rPr lang="en-US" sz="2000" b="1" dirty="0">
+            <a:pPr marL="0" indent="0" algn="ctr">
+              <a:buNone/>
+            </a:pPr>
+            <a:r>
+              <a:rPr lang="en-US" sz="2000" b="1">
                 <a:solidFill>
                   <a:srgbClr val="FFFFFF"/>
                 </a:solidFill>
@@ -12874,11 +13081,11 @@
           <a:bodyPr wrap="square" lIns="0" tIns="0" rIns="0" bIns="0" rtlCol="0" anchor="ctr"/>
           <a:lstStyle/>
           <a:p>
-            <a:pPr indent="0" marL="0">
-              <a:buNone/>
-            </a:pPr>
-            <a:r>
-              <a:rPr lang="en-US" sz="1600" b="1" dirty="0">
+            <a:pPr marL="0" indent="0">
+              <a:buNone/>
+            </a:pPr>
+            <a:r>
+              <a:rPr lang="es-ES" sz="1600" b="1">
                 <a:solidFill>
                   <a:srgbClr val="0F1B2D"/>
                 </a:solidFill>
@@ -12913,11 +13120,11 @@
           <a:bodyPr wrap="square" lIns="0" tIns="0" rIns="0" bIns="0" rtlCol="0" anchor="ctr"/>
           <a:lstStyle/>
           <a:p>
-            <a:pPr indent="0" marL="0">
-              <a:buNone/>
-            </a:pPr>
-            <a:r>
-              <a:rPr lang="en-US" sz="1300" dirty="0">
+            <a:pPr marL="0" indent="0">
+              <a:buNone/>
+            </a:pPr>
+            <a:r>
+              <a:rPr lang="en-US" sz="1300">
                 <a:solidFill>
                   <a:srgbClr val="5B6B82"/>
                 </a:solidFill>
@@ -12957,6 +13164,13 @@
             <a:prstDash val="solid"/>
           </a:ln>
         </p:spPr>
+        <p:txBody>
+          <a:bodyPr/>
+          <a:lstStyle/>
+          <a:p>
+            <a:endParaRPr lang="es-ES"/>
+          </a:p>
+        </p:txBody>
       </p:sp>
       <p:sp>
         <p:nvSpPr>
@@ -12979,11 +13193,11 @@
           <a:bodyPr wrap="square" lIns="0" tIns="0" rIns="0" bIns="0" rtlCol="0" anchor="ctr"/>
           <a:lstStyle/>
           <a:p>
-            <a:pPr algn="ctr" indent="0" marL="0">
-              <a:buNone/>
-            </a:pPr>
-            <a:r>
-              <a:rPr lang="en-US" sz="2000" b="1" dirty="0">
+            <a:pPr marL="0" indent="0" algn="ctr">
+              <a:buNone/>
+            </a:pPr>
+            <a:r>
+              <a:rPr lang="en-US" sz="2000" b="1">
                 <a:solidFill>
                   <a:srgbClr val="FFFFFF"/>
                 </a:solidFill>
@@ -13018,11 +13232,11 @@
           <a:bodyPr wrap="square" lIns="0" tIns="0" rIns="0" bIns="0" rtlCol="0" anchor="ctr"/>
           <a:lstStyle/>
           <a:p>
-            <a:pPr indent="0" marL="0">
-              <a:buNone/>
-            </a:pPr>
-            <a:r>
-              <a:rPr lang="en-US" sz="1600" b="1" dirty="0">
+            <a:pPr marL="0" indent="0">
+              <a:buNone/>
+            </a:pPr>
+            <a:r>
+              <a:rPr lang="es-ES" sz="1600" b="1">
                 <a:solidFill>
                   <a:srgbClr val="0F1B2D"/>
                 </a:solidFill>
@@ -13030,7 +13244,7 @@
                 <a:ea typeface="Calibri" pitchFamily="34" charset="-122"/>
                 <a:cs typeface="Calibri" pitchFamily="34" charset="-120"/>
               </a:rPr>
-              <a:t>YOLOv4, selección de frames y secuencias</a:t>
+              <a:t>YOLOv8, selección de frames y secuencias</a:t>
             </a:r>
             <a:endParaRPr lang="en-US" sz="1600" dirty="0"/>
           </a:p>
@@ -13057,11 +13271,11 @@
           <a:bodyPr wrap="square" lIns="0" tIns="0" rIns="0" bIns="0" rtlCol="0" anchor="ctr"/>
           <a:lstStyle/>
           <a:p>
-            <a:pPr indent="0" marL="0">
-              <a:buNone/>
-            </a:pPr>
-            <a:r>
-              <a:rPr lang="en-US" sz="1300" dirty="0">
+            <a:pPr marL="0" indent="0">
+              <a:buNone/>
+            </a:pPr>
+            <a:r>
+              <a:rPr lang="en-US" sz="1300">
                 <a:solidFill>
                   <a:srgbClr val="5B6B82"/>
                 </a:solidFill>
@@ -13101,6 +13315,13 @@
             <a:prstDash val="solid"/>
           </a:ln>
         </p:spPr>
+        <p:txBody>
+          <a:bodyPr/>
+          <a:lstStyle/>
+          <a:p>
+            <a:endParaRPr lang="es-ES"/>
+          </a:p>
+        </p:txBody>
       </p:sp>
       <p:sp>
         <p:nvSpPr>
@@ -13123,11 +13344,11 @@
           <a:bodyPr wrap="square" lIns="0" tIns="0" rIns="0" bIns="0" rtlCol="0" anchor="ctr"/>
           <a:lstStyle/>
           <a:p>
-            <a:pPr algn="ctr" indent="0" marL="0">
-              <a:buNone/>
-            </a:pPr>
-            <a:r>
-              <a:rPr lang="en-US" sz="2000" b="1" dirty="0">
+            <a:pPr marL="0" indent="0" algn="ctr">
+              <a:buNone/>
+            </a:pPr>
+            <a:r>
+              <a:rPr lang="en-US" sz="2000" b="1">
                 <a:solidFill>
                   <a:srgbClr val="FFFFFF"/>
                 </a:solidFill>
@@ -13162,11 +13383,11 @@
           <a:bodyPr wrap="square" lIns="0" tIns="0" rIns="0" bIns="0" rtlCol="0" anchor="ctr"/>
           <a:lstStyle/>
           <a:p>
-            <a:pPr indent="0" marL="0">
-              <a:buNone/>
-            </a:pPr>
-            <a:r>
-              <a:rPr lang="en-US" sz="1600" b="1" dirty="0">
+            <a:pPr marL="0" indent="0">
+              <a:buNone/>
+            </a:pPr>
+            <a:r>
+              <a:rPr lang="es-ES" sz="1600" b="1">
                 <a:solidFill>
                   <a:srgbClr val="0F1B2D"/>
                 </a:solidFill>
@@ -13201,11 +13422,11 @@
           <a:bodyPr wrap="square" lIns="0" tIns="0" rIns="0" bIns="0" rtlCol="0" anchor="ctr"/>
           <a:lstStyle/>
           <a:p>
-            <a:pPr indent="0" marL="0">
-              <a:buNone/>
-            </a:pPr>
-            <a:r>
-              <a:rPr lang="en-US" sz="1300" dirty="0">
+            <a:pPr marL="0" indent="0">
+              <a:buNone/>
+            </a:pPr>
+            <a:r>
+              <a:rPr lang="en-US" sz="1300">
                 <a:solidFill>
                   <a:srgbClr val="5B6B82"/>
                 </a:solidFill>
@@ -13245,6 +13466,13 @@
             <a:prstDash val="solid"/>
           </a:ln>
         </p:spPr>
+        <p:txBody>
+          <a:bodyPr/>
+          <a:lstStyle/>
+          <a:p>
+            <a:endParaRPr lang="es-ES"/>
+          </a:p>
+        </p:txBody>
       </p:sp>
       <p:sp>
         <p:nvSpPr>
@@ -13267,11 +13495,11 @@
           <a:bodyPr wrap="square" lIns="0" tIns="0" rIns="0" bIns="0" rtlCol="0" anchor="ctr"/>
           <a:lstStyle/>
           <a:p>
-            <a:pPr algn="ctr" indent="0" marL="0">
-              <a:buNone/>
-            </a:pPr>
-            <a:r>
-              <a:rPr lang="en-US" sz="2000" b="1" dirty="0">
+            <a:pPr marL="0" indent="0" algn="ctr">
+              <a:buNone/>
+            </a:pPr>
+            <a:r>
+              <a:rPr lang="en-US" sz="2000" b="1">
                 <a:solidFill>
                   <a:srgbClr val="FFFFFF"/>
                 </a:solidFill>
@@ -13306,11 +13534,11 @@
           <a:bodyPr wrap="square" lIns="0" tIns="0" rIns="0" bIns="0" rtlCol="0" anchor="ctr"/>
           <a:lstStyle/>
           <a:p>
-            <a:pPr indent="0" marL="0">
-              <a:buNone/>
-            </a:pPr>
-            <a:r>
-              <a:rPr lang="en-US" sz="1600" b="1" dirty="0">
+            <a:pPr marL="0" indent="0">
+              <a:buNone/>
+            </a:pPr>
+            <a:r>
+              <a:rPr lang="es-ES" sz="1600" b="1">
                 <a:solidFill>
                   <a:srgbClr val="0F1B2D"/>
                 </a:solidFill>
@@ -13345,11 +13573,11 @@
           <a:bodyPr wrap="square" lIns="0" tIns="0" rIns="0" bIns="0" rtlCol="0" anchor="ctr"/>
           <a:lstStyle/>
           <a:p>
-            <a:pPr indent="0" marL="0">
-              <a:buNone/>
-            </a:pPr>
-            <a:r>
-              <a:rPr lang="en-US" sz="1300" dirty="0">
+            <a:pPr marL="0" indent="0">
+              <a:buNone/>
+            </a:pPr>
+            <a:r>
+              <a:rPr lang="en-US" sz="1300">
                 <a:solidFill>
                   <a:srgbClr val="5B6B82"/>
                 </a:solidFill>
@@ -13384,11 +13612,11 @@
           <a:bodyPr wrap="square" lIns="0" tIns="0" rIns="0" bIns="0" rtlCol="0" anchor="ctr"/>
           <a:lstStyle/>
           <a:p>
-            <a:pPr indent="0" marL="0">
-              <a:buNone/>
-            </a:pPr>
-            <a:r>
-              <a:rPr lang="en-US" sz="1400" b="1" dirty="0">
+            <a:pPr marL="0" indent="0">
+              <a:buNone/>
+            </a:pPr>
+            <a:r>
+              <a:rPr lang="en-US" sz="1400" b="1">
                 <a:solidFill>
                   <a:srgbClr val="5B6B82"/>
                 </a:solidFill>
@@ -13396,49 +13624,7 @@
                 <a:ea typeface="Calibri" pitchFamily="34" charset="-122"/>
                 <a:cs typeface="Calibri" pitchFamily="34" charset="-120"/>
               </a:rPr>
-              <a:t>Inicio: </a:t>
-            </a:r>
-            <a:pPr indent="0" marL="0">
-              <a:buNone/>
-            </a:pPr>
-            <a:r>
-              <a:rPr lang="en-US" sz="1400" dirty="0">
-                <a:solidFill>
-                  <a:srgbClr val="5B6B82"/>
-                </a:solidFill>
-                <a:latin typeface="Calibri" pitchFamily="34" charset="0"/>
-                <a:ea typeface="Calibri" pitchFamily="34" charset="-122"/>
-                <a:cs typeface="Calibri" pitchFamily="34" charset="-120"/>
-              </a:rPr>
-              <a:t>05–16/10 · </a:t>
-            </a:r>
-            <a:pPr indent="0" marL="0">
-              <a:buNone/>
-            </a:pPr>
-            <a:r>
-              <a:rPr lang="en-US" sz="1400" b="1" dirty="0">
-                <a:solidFill>
-                  <a:srgbClr val="5B6B82"/>
-                </a:solidFill>
-                <a:latin typeface="Calibri" pitchFamily="34" charset="0"/>
-                <a:ea typeface="Calibri" pitchFamily="34" charset="-122"/>
-                <a:cs typeface="Calibri" pitchFamily="34" charset="-120"/>
-              </a:rPr>
-              <a:t>Cierre: </a:t>
-            </a:r>
-            <a:pPr indent="0" marL="0">
-              <a:buNone/>
-            </a:pPr>
-            <a:r>
-              <a:rPr lang="en-US" sz="1400" dirty="0">
-                <a:solidFill>
-                  <a:srgbClr val="5B6B82"/>
-                </a:solidFill>
-                <a:latin typeface="Calibri" pitchFamily="34" charset="0"/>
-                <a:ea typeface="Calibri" pitchFamily="34" charset="-122"/>
-                <a:cs typeface="Calibri" pitchFamily="34" charset="-120"/>
-              </a:rPr>
-              <a:t>14–18/12/2026</a:t>
+              <a:t>Inicio: 05–16/10 · Cierre: 14–18/12/2026</a:t>
             </a:r>
             <a:endParaRPr lang="en-US" sz="1400" dirty="0"/>
           </a:p>
@@ -13446,7 +13632,7 @@
       </p:sp>
       <p:sp>
         <p:nvSpPr>
-          <p:cNvPr id="25" name="Slide Number Placeholder 0"/>
+          <p:cNvPr id="38" name="Slide Number Placeholder 0"/>
           <p:cNvSpPr>
             <a:spLocks noGrp="1"/>
           </p:cNvSpPr>
@@ -13464,7 +13650,7 @@
           </a:prstGeom>
           <a:extLst>
             <a:ext uri="{C572A759-6A51-4108-AA02-DFA0A04FC94B}">
-              <ma14:wrappingTextBoxFlag xmlns:ma14="http://schemas.microsoft.com/office/mac/drawingml/2011/main" val="0"/>
+              <ma14:wrappingTextBoxFlag xmlns:ma14="http://schemas.microsoft.com/office/mac/drawingml/2011/main" xmlns="" val="0"/>
             </a:ext>
           </a:extLst>
         </p:spPr>
@@ -13484,10 +13670,10 @@
           </a:lstStyle>
           <a:p>
             <a:pPr algn="r"/>
-            <a:fld id="{F7021451-1387-4CA6-816F-3879F97B5CBC}" type="slidenum">
-              <a:rPr b="0" lang="en-US"/>
+            <a:r>
+              <a:rPr lang="en-US" b="0"/>
               <a:t>8</a:t>
-            </a:fld>
+            </a:r>
             <a:endParaRPr lang="en-US"/>
           </a:p>
         </p:txBody>
@@ -13520,9 +13706,11 @@
       <p:sp>
         <p:nvSpPr>
           <p:cNvPr id="2" name="Text 0"/>
-          <p:cNvSpPr/>
+          <p:cNvSpPr>
+            <a:spLocks noGrp="1"/>
+          </p:cNvSpPr>
           <p:nvPr>
-            <p:ph idx="100" type="title" hasCustomPrompt="1"/>
+            <p:ph type="title" idx="100" hasCustomPrompt="1"/>
           </p:nvPr>
         </p:nvSpPr>
         <p:spPr>
@@ -13540,11 +13728,11 @@
           <a:bodyPr wrap="square" lIns="0" tIns="0" rIns="0" bIns="0" rtlCol="0" anchor="ctr"/>
           <a:lstStyle/>
           <a:p>
-            <a:pPr algn="l" indent="0" marL="0">
-              <a:buNone/>
-            </a:pPr>
-            <a:r>
-              <a:rPr lang="en-US" sz="3200" b="1" dirty="0">
+            <a:pPr marL="0" indent="0" algn="l">
+              <a:buNone/>
+            </a:pPr>
+            <a:r>
+              <a:rPr lang="es-ES" sz="3200" b="1">
                 <a:solidFill>
                   <a:srgbClr val="0F1B2D"/>
                 </a:solidFill>
@@ -13584,13 +13772,20 @@
             <a:prstDash val="solid"/>
           </a:ln>
           <a:effectLst>
-            <a:outerShdw sx="100000" sy="100000" kx="0" ky="0" algn="bl" rotWithShape="0" blurRad="101600" dist="25400" dir="5400000">
+            <a:outerShdw blurRad="101600" dist="25400" dir="5400000" algn="bl" rotWithShape="0">
               <a:srgbClr val="0F1B2D">
                 <a:alpha val="8000"/>
               </a:srgbClr>
             </a:outerShdw>
           </a:effectLst>
         </p:spPr>
+        <p:txBody>
+          <a:bodyPr/>
+          <a:lstStyle/>
+          <a:p>
+            <a:endParaRPr lang="es-ES"/>
+          </a:p>
+        </p:txBody>
       </p:sp>
       <p:sp>
         <p:nvSpPr>
@@ -13616,17 +13811,24 @@
             <a:prstDash val="solid"/>
           </a:ln>
         </p:spPr>
+        <p:txBody>
+          <a:bodyPr/>
+          <a:lstStyle/>
+          <a:p>
+            <a:endParaRPr lang="es-ES"/>
+          </a:p>
+        </p:txBody>
       </p:sp>
       <p:pic>
         <p:nvPicPr>
-          <p:cNvPr id="5" name="Image 0" descr="preencoded.png">    </p:cNvPr>
+          <p:cNvPr id="5" name="Image 0" descr="preencoded.png"/>
           <p:cNvPicPr>
             <a:picLocks noChangeAspect="1"/>
           </p:cNvPicPr>
           <p:nvPr/>
         </p:nvPicPr>
         <p:blipFill>
-          <a:blip r:embed="rId1"/>
+          <a:blip r:embed="rId3"/>
           <a:stretch>
             <a:fillRect/>
           </a:stretch>
@@ -13662,11 +13864,11 @@
           <a:bodyPr wrap="square" lIns="0" tIns="0" rIns="0" bIns="0" rtlCol="0" anchor="ctr"/>
           <a:lstStyle/>
           <a:p>
-            <a:pPr indent="0" marL="0">
-              <a:buNone/>
-            </a:pPr>
-            <a:r>
-              <a:rPr lang="en-US" sz="1200" b="1" dirty="0">
+            <a:pPr marL="0" indent="0">
+              <a:buNone/>
+            </a:pPr>
+            <a:r>
+              <a:rPr lang="en-US" sz="1200" b="1">
                 <a:solidFill>
                   <a:srgbClr val="2F6FE4"/>
                 </a:solidFill>
@@ -13701,11 +13903,11 @@
           <a:bodyPr wrap="square" lIns="0" tIns="0" rIns="0" bIns="0" rtlCol="0" anchor="t"/>
           <a:lstStyle/>
           <a:p>
-            <a:pPr indent="0" marL="0">
-              <a:buNone/>
-            </a:pPr>
-            <a:r>
-              <a:rPr lang="en-US" sz="1500" b="1" dirty="0">
+            <a:pPr marL="0" indent="0">
+              <a:buNone/>
+            </a:pPr>
+            <a:r>
+              <a:rPr lang="en-US" sz="1500" b="1">
                 <a:solidFill>
                   <a:srgbClr val="0F1B2D"/>
                 </a:solidFill>
@@ -13740,11 +13942,11 @@
           <a:bodyPr wrap="square" lIns="0" tIns="0" rIns="0" bIns="0" rtlCol="0" anchor="t"/>
           <a:lstStyle/>
           <a:p>
-            <a:pPr indent="0" marL="0">
-              <a:buNone/>
-            </a:pPr>
-            <a:r>
-              <a:rPr lang="en-US" sz="1300" b="1" dirty="0">
+            <a:pPr marL="0" indent="0">
+              <a:buNone/>
+            </a:pPr>
+            <a:r>
+              <a:rPr lang="es-ES" sz="1300" b="1">
                 <a:solidFill>
                   <a:srgbClr val="0F1B2D"/>
                 </a:solidFill>
@@ -13752,21 +13954,7 @@
                 <a:ea typeface="Calibri" pitchFamily="34" charset="-122"/>
                 <a:cs typeface="Calibri" pitchFamily="34" charset="-120"/>
               </a:rPr>
-              <a:t>Como investigador: </a:t>
-            </a:r>
-            <a:pPr indent="0" marL="0">
-              <a:buNone/>
-            </a:pPr>
-            <a:r>
-              <a:rPr lang="en-US" sz="1300" dirty="0">
-                <a:solidFill>
-                  <a:srgbClr val="5B6B82"/>
-                </a:solidFill>
-                <a:latin typeface="Calibri" pitchFamily="34" charset="0"/>
-                <a:ea typeface="Calibri" pitchFamily="34" charset="-122"/>
-                <a:cs typeface="Calibri" pitchFamily="34" charset="-120"/>
-              </a:rPr>
-              <a:t>Cargar y normalizar el video industrial para dejarlo listo para el análisis.</a:t>
+              <a:t>Como Administrador TI (Jorge): Cargar y normalizar el video industrial para dejarlo listo para el análisis.</a:t>
             </a:r>
             <a:endParaRPr lang="en-US" sz="1300" dirty="0"/>
           </a:p>
@@ -13798,13 +13986,20 @@
             <a:prstDash val="solid"/>
           </a:ln>
           <a:effectLst>
-            <a:outerShdw sx="100000" sy="100000" kx="0" ky="0" algn="bl" rotWithShape="0" blurRad="101600" dist="25400" dir="5400000">
+            <a:outerShdw blurRad="101600" dist="25400" dir="5400000" algn="bl" rotWithShape="0">
               <a:srgbClr val="0F1B2D">
                 <a:alpha val="8000"/>
               </a:srgbClr>
             </a:outerShdw>
           </a:effectLst>
         </p:spPr>
+        <p:txBody>
+          <a:bodyPr/>
+          <a:lstStyle/>
+          <a:p>
+            <a:endParaRPr lang="es-ES"/>
+          </a:p>
+        </p:txBody>
       </p:sp>
       <p:sp>
         <p:nvSpPr>
@@ -13830,17 +14025,24 @@
             <a:prstDash val="solid"/>
           </a:ln>
         </p:spPr>
+        <p:txBody>
+          <a:bodyPr/>
+          <a:lstStyle/>
+          <a:p>
+            <a:endParaRPr lang="es-ES"/>
+          </a:p>
+        </p:txBody>
       </p:sp>
       <p:pic>
         <p:nvPicPr>
-          <p:cNvPr id="11" name="Image 1" descr="preencoded.png">    </p:cNvPr>
+          <p:cNvPr id="11" name="Image 1" descr="preencoded.png"/>
           <p:cNvPicPr>
             <a:picLocks noChangeAspect="1"/>
           </p:cNvPicPr>
           <p:nvPr/>
         </p:nvPicPr>
         <p:blipFill>
-          <a:blip r:embed="rId2"/>
+          <a:blip r:embed="rId4"/>
           <a:stretch>
             <a:fillRect/>
           </a:stretch>
@@ -13876,11 +14078,11 @@
           <a:bodyPr wrap="square" lIns="0" tIns="0" rIns="0" bIns="0" rtlCol="0" anchor="ctr"/>
           <a:lstStyle/>
           <a:p>
-            <a:pPr indent="0" marL="0">
-              <a:buNone/>
-            </a:pPr>
-            <a:r>
-              <a:rPr lang="en-US" sz="1200" b="1" dirty="0">
+            <a:pPr marL="0" indent="0">
+              <a:buNone/>
+            </a:pPr>
+            <a:r>
+              <a:rPr lang="en-US" sz="1200" b="1">
                 <a:solidFill>
                   <a:srgbClr val="5B4BDB"/>
                 </a:solidFill>
@@ -13915,11 +14117,11 @@
           <a:bodyPr wrap="square" lIns="0" tIns="0" rIns="0" bIns="0" rtlCol="0" anchor="t"/>
           <a:lstStyle/>
           <a:p>
-            <a:pPr indent="0" marL="0">
-              <a:buNone/>
-            </a:pPr>
-            <a:r>
-              <a:rPr lang="en-US" sz="1500" b="1" dirty="0">
+            <a:pPr marL="0" indent="0">
+              <a:buNone/>
+            </a:pPr>
+            <a:r>
+              <a:rPr lang="es-ES" sz="1500" b="1">
                 <a:solidFill>
                   <a:srgbClr val="0F1B2D"/>
                 </a:solidFill>
@@ -13927,7 +14129,7 @@
                 <a:ea typeface="Calibri" pitchFamily="34" charset="-122"/>
                 <a:cs typeface="Calibri" pitchFamily="34" charset="-120"/>
               </a:rPr>
-              <a:t>Extracción espacial y filtrado (YOLOv4)</a:t>
+              <a:t>Extracción espacial y filtrado (YOLOv8)</a:t>
             </a:r>
             <a:endParaRPr lang="en-US" sz="1500" dirty="0"/>
           </a:p>
@@ -13954,11 +14156,11 @@
           <a:bodyPr wrap="square" lIns="0" tIns="0" rIns="0" bIns="0" rtlCol="0" anchor="t"/>
           <a:lstStyle/>
           <a:p>
-            <a:pPr indent="0" marL="0">
-              <a:buNone/>
-            </a:pPr>
-            <a:r>
-              <a:rPr lang="en-US" sz="1300" b="1" dirty="0">
+            <a:pPr marL="0" indent="0">
+              <a:buNone/>
+            </a:pPr>
+            <a:r>
+              <a:rPr lang="es-ES" sz="1300" b="1">
                 <a:solidFill>
                   <a:srgbClr val="0F1B2D"/>
                 </a:solidFill>
@@ -13966,21 +14168,7 @@
                 <a:ea typeface="Calibri" pitchFamily="34" charset="-122"/>
                 <a:cs typeface="Calibri" pitchFamily="34" charset="-120"/>
               </a:rPr>
-              <a:t>Como investigador: </a:t>
-            </a:r>
-            <a:pPr indent="0" marL="0">
-              <a:buNone/>
-            </a:pPr>
-            <a:r>
-              <a:rPr lang="en-US" sz="1300" dirty="0">
-                <a:solidFill>
-                  <a:srgbClr val="5B6B82"/>
-                </a:solidFill>
-                <a:latin typeface="Calibri" pitchFamily="34" charset="0"/>
-                <a:ea typeface="Calibri" pitchFamily="34" charset="-122"/>
-                <a:cs typeface="Calibri" pitchFamily="34" charset="-120"/>
-              </a:rPr>
-              <a:t>Detectar trabajadores y descartar frames irrelevantes para aligerar el procesamiento.</a:t>
+              <a:t>Como Supervisora SST (Mariana): Detectar trabajadores y descartar frames irrelevantes para aligerar el procesamiento.</a:t>
             </a:r>
             <a:endParaRPr lang="en-US" sz="1300" dirty="0"/>
           </a:p>
@@ -14012,13 +14200,20 @@
             <a:prstDash val="solid"/>
           </a:ln>
           <a:effectLst>
-            <a:outerShdw sx="100000" sy="100000" kx="0" ky="0" algn="bl" rotWithShape="0" blurRad="101600" dist="25400" dir="5400000">
+            <a:outerShdw blurRad="101600" dist="25400" dir="5400000" algn="bl" rotWithShape="0">
               <a:srgbClr val="0F1B2D">
                 <a:alpha val="8000"/>
               </a:srgbClr>
             </a:outerShdw>
           </a:effectLst>
         </p:spPr>
+        <p:txBody>
+          <a:bodyPr/>
+          <a:lstStyle/>
+          <a:p>
+            <a:endParaRPr lang="es-ES"/>
+          </a:p>
+        </p:txBody>
       </p:sp>
       <p:sp>
         <p:nvSpPr>
@@ -14044,17 +14239,24 @@
             <a:prstDash val="solid"/>
           </a:ln>
         </p:spPr>
+        <p:txBody>
+          <a:bodyPr/>
+          <a:lstStyle/>
+          <a:p>
+            <a:endParaRPr lang="es-ES"/>
+          </a:p>
+        </p:txBody>
       </p:sp>
       <p:pic>
         <p:nvPicPr>
-          <p:cNvPr id="17" name="Image 2" descr="preencoded.png">    </p:cNvPr>
+          <p:cNvPr id="17" name="Image 2" descr="preencoded.png"/>
           <p:cNvPicPr>
             <a:picLocks noChangeAspect="1"/>
           </p:cNvPicPr>
           <p:nvPr/>
         </p:nvPicPr>
         <p:blipFill>
-          <a:blip r:embed="rId3"/>
+          <a:blip r:embed="rId5"/>
           <a:stretch>
             <a:fillRect/>
           </a:stretch>
@@ -14090,11 +14292,11 @@
           <a:bodyPr wrap="square" lIns="0" tIns="0" rIns="0" bIns="0" rtlCol="0" anchor="ctr"/>
           <a:lstStyle/>
           <a:p>
-            <a:pPr indent="0" marL="0">
-              <a:buNone/>
-            </a:pPr>
-            <a:r>
-              <a:rPr lang="en-US" sz="1200" b="1" dirty="0">
+            <a:pPr marL="0" indent="0">
+              <a:buNone/>
+            </a:pPr>
+            <a:r>
+              <a:rPr lang="en-US" sz="1200" b="1">
                 <a:solidFill>
                   <a:srgbClr val="5B4BDB"/>
                 </a:solidFill>
@@ -14129,11 +14331,11 @@
           <a:bodyPr wrap="square" lIns="0" tIns="0" rIns="0" bIns="0" rtlCol="0" anchor="t"/>
           <a:lstStyle/>
           <a:p>
-            <a:pPr indent="0" marL="0">
-              <a:buNone/>
-            </a:pPr>
-            <a:r>
-              <a:rPr lang="en-US" sz="1500" b="1" dirty="0">
+            <a:pPr marL="0" indent="0">
+              <a:buNone/>
+            </a:pPr>
+            <a:r>
+              <a:rPr lang="en-US" sz="1500" b="1">
                 <a:solidFill>
                   <a:srgbClr val="0F1B2D"/>
                 </a:solidFill>
@@ -14168,11 +14370,11 @@
           <a:bodyPr wrap="square" lIns="0" tIns="0" rIns="0" bIns="0" rtlCol="0" anchor="t"/>
           <a:lstStyle/>
           <a:p>
-            <a:pPr indent="0" marL="0">
-              <a:buNone/>
-            </a:pPr>
-            <a:r>
-              <a:rPr lang="en-US" sz="1300" b="1" dirty="0">
+            <a:pPr marL="0" indent="0">
+              <a:buNone/>
+            </a:pPr>
+            <a:r>
+              <a:rPr lang="es-ES" sz="1300" b="1">
                 <a:solidFill>
                   <a:srgbClr val="0F1B2D"/>
                 </a:solidFill>
@@ -14180,21 +14382,7 @@
                 <a:ea typeface="Calibri" pitchFamily="34" charset="-122"/>
                 <a:cs typeface="Calibri" pitchFamily="34" charset="-120"/>
               </a:rPr>
-              <a:t>Como investigador: </a:t>
-            </a:r>
-            <a:pPr indent="0" marL="0">
-              <a:buNone/>
-            </a:pPr>
-            <a:r>
-              <a:rPr lang="en-US" sz="1300" dirty="0">
-                <a:solidFill>
-                  <a:srgbClr val="5B6B82"/>
-                </a:solidFill>
-                <a:latin typeface="Calibri" pitchFamily="34" charset="0"/>
-                <a:ea typeface="Calibri" pitchFamily="34" charset="-122"/>
-                <a:cs typeface="Calibri" pitchFamily="34" charset="-120"/>
-              </a:rPr>
-              <a:t>Agrupar los frames filtrados en clips de una sola acción.</a:t>
+              <a:t>Como Supervisora SST (Mariana): Agrupar los frames filtrados en clips de una sola acción.</a:t>
             </a:r>
             <a:endParaRPr lang="en-US" sz="1300" dirty="0"/>
           </a:p>
@@ -14226,13 +14414,20 @@
             <a:prstDash val="solid"/>
           </a:ln>
           <a:effectLst>
-            <a:outerShdw sx="100000" sy="100000" kx="0" ky="0" algn="bl" rotWithShape="0" blurRad="101600" dist="25400" dir="5400000">
+            <a:outerShdw blurRad="101600" dist="25400" dir="5400000" algn="bl" rotWithShape="0">
               <a:srgbClr val="0F1B2D">
                 <a:alpha val="8000"/>
               </a:srgbClr>
             </a:outerShdw>
           </a:effectLst>
         </p:spPr>
+        <p:txBody>
+          <a:bodyPr/>
+          <a:lstStyle/>
+          <a:p>
+            <a:endParaRPr lang="es-ES"/>
+          </a:p>
+        </p:txBody>
       </p:sp>
       <p:sp>
         <p:nvSpPr>
@@ -14258,17 +14453,24 @@
             <a:prstDash val="solid"/>
           </a:ln>
         </p:spPr>
+        <p:txBody>
+          <a:bodyPr/>
+          <a:lstStyle/>
+          <a:p>
+            <a:endParaRPr lang="es-ES"/>
+          </a:p>
+        </p:txBody>
       </p:sp>
       <p:pic>
         <p:nvPicPr>
-          <p:cNvPr id="23" name="Image 3" descr="preencoded.png">    </p:cNvPr>
+          <p:cNvPr id="23" name="Image 3" descr="preencoded.png"/>
           <p:cNvPicPr>
             <a:picLocks noChangeAspect="1"/>
           </p:cNvPicPr>
           <p:nvPr/>
         </p:nvPicPr>
         <p:blipFill>
-          <a:blip r:embed="rId4"/>
+          <a:blip r:embed="rId6"/>
           <a:stretch>
             <a:fillRect/>
           </a:stretch>
@@ -14304,11 +14506,11 @@
           <a:bodyPr wrap="square" lIns="0" tIns="0" rIns="0" bIns="0" rtlCol="0" anchor="ctr"/>
           <a:lstStyle/>
           <a:p>
-            <a:pPr indent="0" marL="0">
-              <a:buNone/>
-            </a:pPr>
-            <a:r>
-              <a:rPr lang="en-US" sz="1200" b="1" dirty="0">
+            <a:pPr marL="0" indent="0">
+              <a:buNone/>
+            </a:pPr>
+            <a:r>
+              <a:rPr lang="en-US" sz="1200" b="1">
                 <a:solidFill>
                   <a:srgbClr val="E0483E"/>
                 </a:solidFill>
@@ -14343,11 +14545,11 @@
           <a:bodyPr wrap="square" lIns="0" tIns="0" rIns="0" bIns="0" rtlCol="0" anchor="t"/>
           <a:lstStyle/>
           <a:p>
-            <a:pPr indent="0" marL="0">
-              <a:buNone/>
-            </a:pPr>
-            <a:r>
-              <a:rPr lang="en-US" sz="1500" b="1" dirty="0">
+            <a:pPr marL="0" indent="0">
+              <a:buNone/>
+            </a:pPr>
+            <a:r>
+              <a:rPr lang="en-US" sz="1500" b="1">
                 <a:solidFill>
                   <a:srgbClr val="0F1B2D"/>
                 </a:solidFill>
@@ -14382,11 +14584,11 @@
           <a:bodyPr wrap="square" lIns="0" tIns="0" rIns="0" bIns="0" rtlCol="0" anchor="t"/>
           <a:lstStyle/>
           <a:p>
-            <a:pPr indent="0" marL="0">
-              <a:buNone/>
-            </a:pPr>
-            <a:r>
-              <a:rPr lang="en-US" sz="1300" b="1" dirty="0">
+            <a:pPr marL="0" indent="0">
+              <a:buNone/>
+            </a:pPr>
+            <a:r>
+              <a:rPr lang="en-US" sz="1300" b="1">
                 <a:solidFill>
                   <a:srgbClr val="0F1B2D"/>
                 </a:solidFill>
@@ -14394,21 +14596,7 @@
                 <a:ea typeface="Calibri" pitchFamily="34" charset="-122"/>
                 <a:cs typeface="Calibri" pitchFamily="34" charset="-120"/>
               </a:rPr>
-              <a:t>Como investigador: </a:t>
-            </a:r>
-            <a:pPr indent="0" marL="0">
-              <a:buNone/>
-            </a:pPr>
-            <a:r>
-              <a:rPr lang="en-US" sz="1300" dirty="0">
-                <a:solidFill>
-                  <a:srgbClr val="5B6B82"/>
-                </a:solidFill>
-                <a:latin typeface="Calibri" pitchFamily="34" charset="0"/>
-                <a:ea typeface="Calibri" pitchFamily="34" charset="-122"/>
-                <a:cs typeface="Calibri" pitchFamily="34" charset="-120"/>
-              </a:rPr>
-              <a:t>Clasificar cada clip como conducta segura o insegura. Épica central.</a:t>
+              <a:t>Como Supervisora SST (Mariana): Clasificar cada clip como conducta segura o insegura. Épica central.</a:t>
             </a:r>
             <a:endParaRPr lang="en-US" sz="1300" dirty="0"/>
           </a:p>
@@ -14440,13 +14628,20 @@
             <a:prstDash val="solid"/>
           </a:ln>
           <a:effectLst>
-            <a:outerShdw sx="100000" sy="100000" kx="0" ky="0" algn="bl" rotWithShape="0" blurRad="101600" dist="25400" dir="5400000">
+            <a:outerShdw blurRad="101600" dist="25400" dir="5400000" algn="bl" rotWithShape="0">
               <a:srgbClr val="0F1B2D">
                 <a:alpha val="8000"/>
               </a:srgbClr>
             </a:outerShdw>
           </a:effectLst>
         </p:spPr>
+        <p:txBody>
+          <a:bodyPr/>
+          <a:lstStyle/>
+          <a:p>
+            <a:endParaRPr lang="es-ES"/>
+          </a:p>
+        </p:txBody>
       </p:sp>
       <p:sp>
         <p:nvSpPr>
@@ -14472,17 +14667,24 @@
             <a:prstDash val="solid"/>
           </a:ln>
         </p:spPr>
+        <p:txBody>
+          <a:bodyPr/>
+          <a:lstStyle/>
+          <a:p>
+            <a:endParaRPr lang="es-ES"/>
+          </a:p>
+        </p:txBody>
       </p:sp>
       <p:pic>
         <p:nvPicPr>
-          <p:cNvPr id="29" name="Image 4" descr="preencoded.png">    </p:cNvPr>
+          <p:cNvPr id="29" name="Image 4" descr="preencoded.png"/>
           <p:cNvPicPr>
             <a:picLocks noChangeAspect="1"/>
           </p:cNvPicPr>
           <p:nvPr/>
         </p:nvPicPr>
         <p:blipFill>
-          <a:blip r:embed="rId5"/>
+          <a:blip r:embed="rId7"/>
           <a:stretch>
             <a:fillRect/>
           </a:stretch>
@@ -14518,11 +14720,11 @@
           <a:bodyPr wrap="square" lIns="0" tIns="0" rIns="0" bIns="0" rtlCol="0" anchor="ctr"/>
           <a:lstStyle/>
           <a:p>
-            <a:pPr indent="0" marL="0">
-              <a:buNone/>
-            </a:pPr>
-            <a:r>
-              <a:rPr lang="en-US" sz="1200" b="1" dirty="0">
+            <a:pPr marL="0" indent="0">
+              <a:buNone/>
+            </a:pPr>
+            <a:r>
+              <a:rPr lang="en-US" sz="1200" b="1">
                 <a:solidFill>
                   <a:srgbClr val="0F9D8A"/>
                 </a:solidFill>
@@ -14557,11 +14759,11 @@
           <a:bodyPr wrap="square" lIns="0" tIns="0" rIns="0" bIns="0" rtlCol="0" anchor="t"/>
           <a:lstStyle/>
           <a:p>
-            <a:pPr indent="0" marL="0">
-              <a:buNone/>
-            </a:pPr>
-            <a:r>
-              <a:rPr lang="en-US" sz="1500" b="1" dirty="0">
+            <a:pPr marL="0" indent="0">
+              <a:buNone/>
+            </a:pPr>
+            <a:r>
+              <a:rPr lang="en-US" sz="1500" b="1">
                 <a:solidFill>
                   <a:srgbClr val="0F1B2D"/>
                 </a:solidFill>
@@ -14596,11 +14798,11 @@
           <a:bodyPr wrap="square" lIns="0" tIns="0" rIns="0" bIns="0" rtlCol="0" anchor="t"/>
           <a:lstStyle/>
           <a:p>
-            <a:pPr indent="0" marL="0">
-              <a:buNone/>
-            </a:pPr>
-            <a:r>
-              <a:rPr lang="en-US" sz="1300" b="1" dirty="0">
+            <a:pPr marL="0" indent="0">
+              <a:buNone/>
+            </a:pPr>
+            <a:r>
+              <a:rPr lang="es-ES" sz="1300" b="1">
                 <a:solidFill>
                   <a:srgbClr val="0F1B2D"/>
                 </a:solidFill>
@@ -14608,21 +14810,7 @@
                 <a:ea typeface="Calibri" pitchFamily="34" charset="-122"/>
                 <a:cs typeface="Calibri" pitchFamily="34" charset="-120"/>
               </a:rPr>
-              <a:t>Como evaluador del sistema: </a:t>
-            </a:r>
-            <a:pPr indent="0" marL="0">
-              <a:buNone/>
-            </a:pPr>
-            <a:r>
-              <a:rPr lang="en-US" sz="1300" dirty="0">
-                <a:solidFill>
-                  <a:srgbClr val="5B6B82"/>
-                </a:solidFill>
-                <a:latin typeface="Calibri" pitchFamily="34" charset="0"/>
-                <a:ea typeface="Calibri" pitchFamily="34" charset="-122"/>
-                <a:cs typeface="Calibri" pitchFamily="34" charset="-120"/>
-              </a:rPr>
-              <a:t>Ver el video con etiquetas, recibir alertas y registrar los resultados.</a:t>
+              <a:t>Como evaluador del sistema: Ver el video con etiquetas, recibir alertas y registrar los resultados.</a:t>
             </a:r>
             <a:endParaRPr lang="en-US" sz="1300" dirty="0"/>
           </a:p>
@@ -14654,13 +14842,20 @@
             <a:prstDash val="solid"/>
           </a:ln>
           <a:effectLst>
-            <a:outerShdw sx="100000" sy="100000" kx="0" ky="0" algn="bl" rotWithShape="0" blurRad="101600" dist="25400" dir="5400000">
+            <a:outerShdw blurRad="101600" dist="25400" dir="5400000" algn="bl" rotWithShape="0">
               <a:srgbClr val="0F1B2D">
                 <a:alpha val="8000"/>
               </a:srgbClr>
             </a:outerShdw>
           </a:effectLst>
         </p:spPr>
+        <p:txBody>
+          <a:bodyPr/>
+          <a:lstStyle/>
+          <a:p>
+            <a:endParaRPr lang="es-ES"/>
+          </a:p>
+        </p:txBody>
       </p:sp>
       <p:sp>
         <p:nvSpPr>
@@ -14686,17 +14881,24 @@
             <a:prstDash val="solid"/>
           </a:ln>
         </p:spPr>
+        <p:txBody>
+          <a:bodyPr/>
+          <a:lstStyle/>
+          <a:p>
+            <a:endParaRPr lang="es-ES"/>
+          </a:p>
+        </p:txBody>
       </p:sp>
       <p:pic>
         <p:nvPicPr>
-          <p:cNvPr id="35" name="Image 5" descr="preencoded.png">    </p:cNvPr>
+          <p:cNvPr id="35" name="Image 5" descr="preencoded.png"/>
           <p:cNvPicPr>
             <a:picLocks noChangeAspect="1"/>
           </p:cNvPicPr>
           <p:nvPr/>
         </p:nvPicPr>
         <p:blipFill>
-          <a:blip r:embed="rId6"/>
+          <a:blip r:embed="rId8"/>
           <a:stretch>
             <a:fillRect/>
           </a:stretch>
@@ -14732,11 +14934,11 @@
           <a:bodyPr wrap="square" lIns="0" tIns="0" rIns="0" bIns="0" rtlCol="0" anchor="ctr"/>
           <a:lstStyle/>
           <a:p>
-            <a:pPr indent="0" marL="0">
-              <a:buNone/>
-            </a:pPr>
-            <a:r>
-              <a:rPr lang="en-US" sz="1200" b="1" dirty="0">
+            <a:pPr marL="0" indent="0">
+              <a:buNone/>
+            </a:pPr>
+            <a:r>
+              <a:rPr lang="en-US" sz="1200" b="1">
                 <a:solidFill>
                   <a:srgbClr val="B07A12"/>
                 </a:solidFill>
@@ -14771,11 +14973,11 @@
           <a:bodyPr wrap="square" lIns="0" tIns="0" rIns="0" bIns="0" rtlCol="0" anchor="t"/>
           <a:lstStyle/>
           <a:p>
-            <a:pPr indent="0" marL="0">
-              <a:buNone/>
-            </a:pPr>
-            <a:r>
-              <a:rPr lang="en-US" sz="1500" b="1" dirty="0">
+            <a:pPr marL="0" indent="0">
+              <a:buNone/>
+            </a:pPr>
+            <a:r>
+              <a:rPr lang="en-US" sz="1500" b="1">
                 <a:solidFill>
                   <a:srgbClr val="0F1B2D"/>
                 </a:solidFill>
@@ -14810,11 +15012,11 @@
           <a:bodyPr wrap="square" lIns="0" tIns="0" rIns="0" bIns="0" rtlCol="0" anchor="t"/>
           <a:lstStyle/>
           <a:p>
-            <a:pPr indent="0" marL="0">
-              <a:buNone/>
-            </a:pPr>
-            <a:r>
-              <a:rPr lang="en-US" sz="1300" b="1" dirty="0">
+            <a:pPr marL="0" indent="0">
+              <a:buNone/>
+            </a:pPr>
+            <a:r>
+              <a:rPr lang="es-ES" sz="1300" b="1">
                 <a:solidFill>
                   <a:srgbClr val="0F1B2D"/>
                 </a:solidFill>
@@ -14822,21 +15024,7 @@
                 <a:ea typeface="Calibri" pitchFamily="34" charset="-122"/>
                 <a:cs typeface="Calibri" pitchFamily="34" charset="-120"/>
               </a:rPr>
-              <a:t>Como administrador técnico: </a:t>
-            </a:r>
-            <a:pPr indent="0" marL="0">
-              <a:buNone/>
-            </a:pPr>
-            <a:r>
-              <a:rPr lang="en-US" sz="1300" dirty="0">
-                <a:solidFill>
-                  <a:srgbClr val="5B6B82"/>
-                </a:solidFill>
-                <a:latin typeface="Calibri" pitchFamily="34" charset="0"/>
-                <a:ea typeface="Calibri" pitchFamily="34" charset="-122"/>
-                <a:cs typeface="Calibri" pitchFamily="34" charset="-120"/>
-              </a:rPr>
-              <a:t>Ajustar umbrales y parámetros, y revisar los registros de procesamiento.</a:t>
+              <a:t>Como administrador técnico: Ajustar umbrales y parámetros, y revisar los registros de procesamiento.</a:t>
             </a:r>
             <a:endParaRPr lang="en-US" sz="1300" dirty="0"/>
           </a:p>
@@ -14844,7 +15032,7 @@
       </p:sp>
       <p:sp>
         <p:nvSpPr>
-          <p:cNvPr id="25" name="Slide Number Placeholder 0"/>
+          <p:cNvPr id="39" name="Slide Number Placeholder 0"/>
           <p:cNvSpPr>
             <a:spLocks noGrp="1"/>
           </p:cNvSpPr>
@@ -14862,7 +15050,7 @@
           </a:prstGeom>
           <a:extLst>
             <a:ext uri="{C572A759-6A51-4108-AA02-DFA0A04FC94B}">
-              <ma14:wrappingTextBoxFlag xmlns:ma14="http://schemas.microsoft.com/office/mac/drawingml/2011/main" val="0"/>
+              <ma14:wrappingTextBoxFlag xmlns:ma14="http://schemas.microsoft.com/office/mac/drawingml/2011/main" xmlns="" val="0"/>
             </a:ext>
           </a:extLst>
         </p:spPr>
@@ -14882,10 +15070,10 @@
           </a:lstStyle>
           <a:p>
             <a:pPr algn="r"/>
-            <a:fld id="{F7021451-1387-4CA6-816F-3879F97B5CBC}" type="slidenum">
-              <a:rPr b="0" lang="en-US"/>
+            <a:r>
+              <a:rPr lang="en-US" b="0"/>
               <a:t>9</a:t>
-            </a:fld>
+            </a:r>
             <a:endParaRPr lang="en-US"/>
           </a:p>
         </p:txBody>
@@ -15191,4 +15379,319 @@
     </a:ext>
   </a:extLst>
 </a:theme>
+</file>
+
+<file path=ppt/theme/theme2.xml><?xml version="1.0" encoding="utf-8"?>
+<a:theme xmlns:a="http://schemas.openxmlformats.org/drawingml/2006/main" name="Tema de Office">
+  <a:themeElements>
+    <a:clrScheme name="Office">
+      <a:dk1>
+        <a:sysClr val="windowText" lastClr="000000"/>
+      </a:dk1>
+      <a:lt1>
+        <a:sysClr val="window" lastClr="FFFFFF"/>
+      </a:lt1>
+      <a:dk2>
+        <a:srgbClr val="0E2841"/>
+      </a:dk2>
+      <a:lt2>
+        <a:srgbClr val="E8E8E8"/>
+      </a:lt2>
+      <a:accent1>
+        <a:srgbClr val="156082"/>
+      </a:accent1>
+      <a:accent2>
+        <a:srgbClr val="E97132"/>
+      </a:accent2>
+      <a:accent3>
+        <a:srgbClr val="196B24"/>
+      </a:accent3>
+      <a:accent4>
+        <a:srgbClr val="0F9ED5"/>
+      </a:accent4>
+      <a:accent5>
+        <a:srgbClr val="A02B93"/>
+      </a:accent5>
+      <a:accent6>
+        <a:srgbClr val="4EA72E"/>
+      </a:accent6>
+      <a:hlink>
+        <a:srgbClr val="467886"/>
+      </a:hlink>
+      <a:folHlink>
+        <a:srgbClr val="96607D"/>
+      </a:folHlink>
+    </a:clrScheme>
+    <a:fontScheme name="Office">
+      <a:majorFont>
+        <a:latin typeface="Aptos Display" panose="02110004020202020204"/>
+        <a:ea typeface=""/>
+        <a:cs typeface=""/>
+        <a:font script="Jpan" typeface="游ゴシック Light"/>
+        <a:font script="Hang" typeface="맑은 고딕"/>
+        <a:font script="Hans" typeface="等线 Light"/>
+        <a:font script="Hant" typeface="新細明體"/>
+        <a:font script="Arab" typeface="Times New Roman"/>
+        <a:font script="Hebr" typeface="Times New Roman"/>
+        <a:font script="Thai" typeface="Angsana New"/>
+        <a:font script="Ethi" typeface="Nyala"/>
+        <a:font script="Beng" typeface="Vrinda"/>
+        <a:font script="Gujr" typeface="Shruti"/>
+        <a:font script="Khmr" typeface="MoolBoran"/>
+        <a:font script="Knda" typeface="Tunga"/>
+        <a:font script="Guru" typeface="Raavi"/>
+        <a:font script="Cans" typeface="Euphemia"/>
+        <a:font script="Cher" typeface="Plantagenet Cherokee"/>
+        <a:font script="Yiii" typeface="Microsoft Yi Baiti"/>
+        <a:font script="Tibt" typeface="Microsoft Himalaya"/>
+        <a:font script="Thaa" typeface="MV Boli"/>
+        <a:font script="Deva" typeface="Mangal"/>
+        <a:font script="Telu" typeface="Gautami"/>
+        <a:font script="Taml" typeface="Latha"/>
+        <a:font script="Syrc" typeface="Estrangelo Edessa"/>
+        <a:font script="Orya" typeface="Kalinga"/>
+        <a:font script="Mlym" typeface="Kartika"/>
+        <a:font script="Laoo" typeface="DokChampa"/>
+        <a:font script="Sinh" typeface="Iskoola Pota"/>
+        <a:font script="Mong" typeface="Mongolian Baiti"/>
+        <a:font script="Viet" typeface="Times New Roman"/>
+        <a:font script="Uigh" typeface="Microsoft Uighur"/>
+        <a:font script="Geor" typeface="Sylfaen"/>
+        <a:font script="Armn" typeface="Arial"/>
+        <a:font script="Bugi" typeface="Leelawadee UI"/>
+        <a:font script="Bopo" typeface="Microsoft JhengHei"/>
+        <a:font script="Java" typeface="Javanese Text"/>
+        <a:font script="Lisu" typeface="Segoe UI"/>
+        <a:font script="Mymr" typeface="Myanmar Text"/>
+        <a:font script="Nkoo" typeface="Ebrima"/>
+        <a:font script="Olck" typeface="Nirmala UI"/>
+        <a:font script="Osma" typeface="Ebrima"/>
+        <a:font script="Phag" typeface="Phagspa"/>
+        <a:font script="Syrn" typeface="Estrangelo Edessa"/>
+        <a:font script="Syrj" typeface="Estrangelo Edessa"/>
+        <a:font script="Syre" typeface="Estrangelo Edessa"/>
+        <a:font script="Sora" typeface="Nirmala UI"/>
+        <a:font script="Tale" typeface="Microsoft Tai Le"/>
+        <a:font script="Talu" typeface="Microsoft New Tai Lue"/>
+        <a:font script="Tfng" typeface="Ebrima"/>
+      </a:majorFont>
+      <a:minorFont>
+        <a:latin typeface="Aptos" panose="02110004020202020204"/>
+        <a:ea typeface=""/>
+        <a:cs typeface=""/>
+        <a:font script="Jpan" typeface="游ゴシック"/>
+        <a:font script="Hang" typeface="맑은 고딕"/>
+        <a:font script="Hans" typeface="等线"/>
+        <a:font script="Hant" typeface="新細明體"/>
+        <a:font script="Arab" typeface="Arial"/>
+        <a:font script="Hebr" typeface="Arial"/>
+        <a:font script="Thai" typeface="Cordia New"/>
+        <a:font script="Ethi" typeface="Nyala"/>
+        <a:font script="Beng" typeface="Vrinda"/>
+        <a:font script="Gujr" typeface="Shruti"/>
+        <a:font script="Khmr" typeface="DaunPenh"/>
+        <a:font script="Knda" typeface="Tunga"/>
+        <a:font script="Guru" typeface="Raavi"/>
+        <a:font script="Cans" typeface="Euphemia"/>
+        <a:font script="Cher" typeface="Plantagenet Cherokee"/>
+        <a:font script="Yiii" typeface="Microsoft Yi Baiti"/>
+        <a:font script="Tibt" typeface="Microsoft Himalaya"/>
+        <a:font script="Thaa" typeface="MV Boli"/>
+        <a:font script="Deva" typeface="Mangal"/>
+        <a:font script="Telu" typeface="Gautami"/>
+        <a:font script="Taml" typeface="Latha"/>
+        <a:font script="Syrc" typeface="Estrangelo Edessa"/>
+        <a:font script="Orya" typeface="Kalinga"/>
+        <a:font script="Mlym" typeface="Kartika"/>
+        <a:font script="Laoo" typeface="DokChampa"/>
+        <a:font script="Sinh" typeface="Iskoola Pota"/>
+        <a:font script="Mong" typeface="Mongolian Baiti"/>
+        <a:font script="Viet" typeface="Arial"/>
+        <a:font script="Uigh" typeface="Microsoft Uighur"/>
+        <a:font script="Geor" typeface="Sylfaen"/>
+        <a:font script="Armn" typeface="Arial"/>
+        <a:font script="Bugi" typeface="Leelawadee UI"/>
+        <a:font script="Bopo" typeface="Microsoft JhengHei"/>
+        <a:font script="Java" typeface="Javanese Text"/>
+        <a:font script="Lisu" typeface="Segoe UI"/>
+        <a:font script="Mymr" typeface="Myanmar Text"/>
+        <a:font script="Nkoo" typeface="Ebrima"/>
+        <a:font script="Olck" typeface="Nirmala UI"/>
+        <a:font script="Osma" typeface="Ebrima"/>
+        <a:font script="Phag" typeface="Phagspa"/>
+        <a:font script="Syrn" typeface="Estrangelo Edessa"/>
+        <a:font script="Syrj" typeface="Estrangelo Edessa"/>
+        <a:font script="Syre" typeface="Estrangelo Edessa"/>
+        <a:font script="Sora" typeface="Nirmala UI"/>
+        <a:font script="Tale" typeface="Microsoft Tai Le"/>
+        <a:font script="Talu" typeface="Microsoft New Tai Lue"/>
+        <a:font script="Tfng" typeface="Ebrima"/>
+      </a:minorFont>
+    </a:fontScheme>
+    <a:fmtScheme name="Office">
+      <a:fillStyleLst>
+        <a:solidFill>
+          <a:schemeClr val="phClr"/>
+        </a:solidFill>
+        <a:gradFill rotWithShape="1">
+          <a:gsLst>
+            <a:gs pos="0">
+              <a:schemeClr val="phClr">
+                <a:lumMod val="110000"/>
+                <a:satMod val="105000"/>
+                <a:tint val="67000"/>
+              </a:schemeClr>
+            </a:gs>
+            <a:gs pos="50000">
+              <a:schemeClr val="phClr">
+                <a:lumMod val="105000"/>
+                <a:satMod val="103000"/>
+                <a:tint val="73000"/>
+              </a:schemeClr>
+            </a:gs>
+            <a:gs pos="100000">
+              <a:schemeClr val="phClr">
+                <a:lumMod val="105000"/>
+                <a:satMod val="109000"/>
+                <a:tint val="81000"/>
+              </a:schemeClr>
+            </a:gs>
+          </a:gsLst>
+          <a:lin ang="5400000" scaled="0"/>
+        </a:gradFill>
+        <a:gradFill rotWithShape="1">
+          <a:gsLst>
+            <a:gs pos="0">
+              <a:schemeClr val="phClr">
+                <a:satMod val="103000"/>
+                <a:lumMod val="102000"/>
+                <a:tint val="94000"/>
+              </a:schemeClr>
+            </a:gs>
+            <a:gs pos="50000">
+              <a:schemeClr val="phClr">
+                <a:satMod val="110000"/>
+                <a:lumMod val="100000"/>
+                <a:shade val="100000"/>
+              </a:schemeClr>
+            </a:gs>
+            <a:gs pos="100000">
+              <a:schemeClr val="phClr">
+                <a:lumMod val="99000"/>
+                <a:satMod val="120000"/>
+                <a:shade val="78000"/>
+              </a:schemeClr>
+            </a:gs>
+          </a:gsLst>
+          <a:lin ang="5400000" scaled="0"/>
+        </a:gradFill>
+      </a:fillStyleLst>
+      <a:lnStyleLst>
+        <a:ln w="12700" cap="flat" cmpd="sng" algn="ctr">
+          <a:solidFill>
+            <a:schemeClr val="phClr"/>
+          </a:solidFill>
+          <a:prstDash val="solid"/>
+          <a:miter lim="800000"/>
+        </a:ln>
+        <a:ln w="19050" cap="flat" cmpd="sng" algn="ctr">
+          <a:solidFill>
+            <a:schemeClr val="phClr"/>
+          </a:solidFill>
+          <a:prstDash val="solid"/>
+          <a:miter lim="800000"/>
+        </a:ln>
+        <a:ln w="25400" cap="flat" cmpd="sng" algn="ctr">
+          <a:solidFill>
+            <a:schemeClr val="phClr"/>
+          </a:solidFill>
+          <a:prstDash val="solid"/>
+          <a:miter lim="800000"/>
+        </a:ln>
+      </a:lnStyleLst>
+      <a:effectStyleLst>
+        <a:effectStyle>
+          <a:effectLst/>
+        </a:effectStyle>
+        <a:effectStyle>
+          <a:effectLst/>
+        </a:effectStyle>
+        <a:effectStyle>
+          <a:effectLst>
+            <a:outerShdw blurRad="57150" dist="19050" dir="5400000" algn="ctr" rotWithShape="0">
+              <a:srgbClr val="000000">
+                <a:alpha val="63000"/>
+              </a:srgbClr>
+            </a:outerShdw>
+          </a:effectLst>
+        </a:effectStyle>
+      </a:effectStyleLst>
+      <a:bgFillStyleLst>
+        <a:solidFill>
+          <a:schemeClr val="phClr"/>
+        </a:solidFill>
+        <a:solidFill>
+          <a:schemeClr val="phClr">
+            <a:tint val="95000"/>
+            <a:satMod val="170000"/>
+          </a:schemeClr>
+        </a:solidFill>
+        <a:gradFill rotWithShape="1">
+          <a:gsLst>
+            <a:gs pos="0">
+              <a:schemeClr val="phClr">
+                <a:tint val="93000"/>
+                <a:satMod val="150000"/>
+                <a:shade val="98000"/>
+                <a:lumMod val="102000"/>
+              </a:schemeClr>
+            </a:gs>
+            <a:gs pos="50000">
+              <a:schemeClr val="phClr">
+                <a:tint val="98000"/>
+                <a:satMod val="130000"/>
+                <a:shade val="90000"/>
+                <a:lumMod val="103000"/>
+              </a:schemeClr>
+            </a:gs>
+            <a:gs pos="100000">
+              <a:schemeClr val="phClr">
+                <a:shade val="63000"/>
+                <a:satMod val="120000"/>
+              </a:schemeClr>
+            </a:gs>
+          </a:gsLst>
+          <a:lin ang="5400000" scaled="0"/>
+        </a:gradFill>
+      </a:bgFillStyleLst>
+    </a:fmtScheme>
+  </a:themeElements>
+  <a:objectDefaults>
+    <a:lnDef>
+      <a:spPr/>
+      <a:bodyPr/>
+      <a:lstStyle/>
+      <a:style>
+        <a:lnRef idx="2">
+          <a:schemeClr val="accent1"/>
+        </a:lnRef>
+        <a:fillRef idx="0">
+          <a:schemeClr val="accent1"/>
+        </a:fillRef>
+        <a:effectRef idx="1">
+          <a:schemeClr val="accent1"/>
+        </a:effectRef>
+        <a:fontRef idx="minor">
+          <a:schemeClr val="tx1"/>
+        </a:fontRef>
+      </a:style>
+    </a:lnDef>
+  </a:objectDefaults>
+  <a:extraClrSchemeLst/>
+  <a:extLst>
+    <a:ext uri="{05A4C25C-085E-4340-85A3-A5531E510DB2}">
+      <thm15:themeFamily xmlns:thm15="http://schemas.microsoft.com/office/thememl/2012/main" name="Office Theme" id="{2E142A2C-CD16-42D6-873A-C26D2A0506FA}" vid="{1BDDFF52-6CD6-40A5-AB3C-68EB2F1E4D0A}"/>
+    </a:ext>
+  </a:extLst>
+</a:theme>
 </file>